--- a/clientes/flavia-muccelin/Cultura-Organizacional-e-de-Marca-Forma-e-My-Home.pptx
+++ b/clientes/flavia-muccelin/Cultura-Organizacional-e-de-Marca-Forma-e-My-Home.pptx
@@ -3377,14 +3377,14 @@
         </p:nvSpPr>
         <p:spPr>
           <a:xfrm>
-            <a:off x="2011680" y="2894259"/>
+            <a:off x="2011680" y="3643503"/>
             <a:ext cx="1188720" cy="27432"/>
           </a:xfrm>
           <a:prstGeom prst="rect">
             <a:avLst/>
           </a:prstGeom>
           <a:solidFill>
-            <a:srgbClr val="A9724A"/>
+            <a:srgbClr val="CC754E"/>
           </a:solidFill>
           <a:ln>
             <a:noFill/>
@@ -3421,8 +3421,8 @@
         </p:nvSpPr>
         <p:spPr>
           <a:xfrm>
-            <a:off x="2011680" y="3296595"/>
-            <a:ext cx="14081760" cy="3211007"/>
+            <a:off x="2011680" y="4045839"/>
+            <a:ext cx="14081760" cy="1590040"/>
           </a:xfrm>
           <a:prstGeom prst="rect">
             <a:avLst/>
@@ -3437,13 +3437,13 @@
           <a:p>
             <a:pPr algn="l">
               <a:lnSpc>
-                <a:spcPct val="126000"/>
-              </a:lnSpc>
-            </a:pPr>
-            <a:r>
-              <a:rPr sz="7400" i="0" b="0">
-                <a:solidFill>
-                  <a:srgbClr val="1C1C1A"/>
+                <a:spcPts val="5180"/>
+              </a:lnSpc>
+            </a:pPr>
+            <a:r>
+              <a:rPr sz="3700" i="0" b="0">
+                <a:solidFill>
+                  <a:srgbClr val="323330"/>
                 </a:solidFill>
                 <a:latin typeface="Outfit 1 Light"/>
               </a:rPr>
@@ -3453,13 +3453,13 @@
           <a:p>
             <a:pPr algn="l">
               <a:lnSpc>
-                <a:spcPct val="126000"/>
-              </a:lnSpc>
-            </a:pPr>
-            <a:r>
-              <a:rPr sz="7400" i="0" b="0">
-                <a:solidFill>
-                  <a:srgbClr val="1C1C1A"/>
+                <a:spcPts val="5180"/>
+              </a:lnSpc>
+            </a:pPr>
+            <a:r>
+              <a:rPr sz="3700" i="0" b="0">
+                <a:solidFill>
+                  <a:srgbClr val="323330"/>
                 </a:solidFill>
                 <a:latin typeface="Outfit 1 Light"/>
               </a:rPr>
@@ -3476,8 +3476,8 @@
         </p:nvSpPr>
         <p:spPr>
           <a:xfrm>
-            <a:off x="2011680" y="6335390"/>
-            <a:ext cx="11887200" cy="554431"/>
+            <a:off x="2011680" y="5604637"/>
+            <a:ext cx="11887200" cy="535940"/>
           </a:xfrm>
           <a:prstGeom prst="rect">
             <a:avLst/>
@@ -3492,11 +3492,11 @@
           <a:p>
             <a:pPr algn="l">
               <a:lnSpc>
-                <a:spcPct val="140000"/>
-              </a:lnSpc>
-            </a:pPr>
-            <a:r>
-              <a:rPr sz="2100" i="0" b="0">
+                <a:spcPts val="3500"/>
+              </a:lnSpc>
+            </a:pPr>
+            <a:r>
+              <a:rPr sz="2500" i="0" b="0">
                 <a:solidFill>
                   <a:srgbClr val="6B6B66"/>
                 </a:solidFill>
@@ -3614,7 +3614,7 @@
         <p:spPr>
           <a:xfrm>
             <a:off x="2011680" y="1723644"/>
-            <a:ext cx="14264640" cy="882396"/>
+            <a:ext cx="14264640" cy="1005078"/>
           </a:xfrm>
           <a:prstGeom prst="rect">
             <a:avLst/>
@@ -3629,7 +3629,7 @@
           <a:p>
             <a:pPr algn="l">
               <a:lnSpc>
-                <a:spcPct val="114000"/>
+                <a:spcPts val="5754"/>
               </a:lnSpc>
             </a:pPr>
             <a:r>
@@ -3637,9 +3637,36 @@
                 <a:solidFill>
                   <a:srgbClr val="1C1C1A"/>
                 </a:solidFill>
+                <a:latin typeface="Outfit 1 Bold"/>
+              </a:rPr>
+              <a:t>LIBERDADE</a:t>
+            </a:r>
+            <a:r>
+              <a:rPr sz="4200" i="0" b="0">
+                <a:solidFill>
+                  <a:srgbClr val="1C1C1A"/>
+                </a:solidFill>
                 <a:latin typeface="Outfit 1 Light"/>
               </a:rPr>
-              <a:t>LIBERDADE PARA AGIR. RESPONSABILIDADE PARA ENTREGAR.</a:t>
+              <a:t> PARA AGIR. </a:t>
+            </a:r>
+            <a:r>
+              <a:rPr sz="4200" i="0" b="0">
+                <a:solidFill>
+                  <a:srgbClr val="1C1C1A"/>
+                </a:solidFill>
+                <a:latin typeface="Outfit 1 Bold"/>
+              </a:rPr>
+              <a:t>RESPONSABILIDADE</a:t>
+            </a:r>
+            <a:r>
+              <a:rPr sz="4200" i="0" b="0">
+                <a:solidFill>
+                  <a:srgbClr val="1C1C1A"/>
+                </a:solidFill>
+                <a:latin typeface="Outfit 1 Light"/>
+              </a:rPr>
+              <a:t> PARA ENTREGAR.</a:t>
             </a:r>
           </a:p>
         </p:txBody>
@@ -3652,14 +3679,14 @@
         </p:nvSpPr>
         <p:spPr>
           <a:xfrm>
-            <a:off x="2011680" y="3414552"/>
+            <a:off x="2011680" y="3368040"/>
             <a:ext cx="14264640" cy="10973"/>
           </a:xfrm>
           <a:prstGeom prst="rect">
             <a:avLst/>
           </a:prstGeom>
           <a:solidFill>
-            <a:srgbClr val="DFDDD7"/>
+            <a:srgbClr val="A5A49F"/>
           </a:solidFill>
           <a:ln>
             <a:noFill/>
@@ -3696,14 +3723,14 @@
         </p:nvSpPr>
         <p:spPr>
           <a:xfrm>
-            <a:off x="2011680" y="3762024"/>
+            <a:off x="2011680" y="3715512"/>
             <a:ext cx="14264640" cy="10973"/>
           </a:xfrm>
           <a:prstGeom prst="rect">
             <a:avLst/>
           </a:prstGeom>
           <a:solidFill>
-            <a:srgbClr val="DFDDD7"/>
+            <a:srgbClr val="A5A49F"/>
           </a:solidFill>
           <a:ln>
             <a:noFill/>
@@ -3740,8 +3767,8 @@
         </p:nvSpPr>
         <p:spPr>
           <a:xfrm>
-            <a:off x="2011680" y="3999768"/>
-            <a:ext cx="4754880" cy="256032"/>
+            <a:off x="2011680" y="3989832"/>
+            <a:ext cx="4754880" cy="365760"/>
           </a:xfrm>
           <a:prstGeom prst="rect">
             <a:avLst/>
@@ -3756,13 +3783,13 @@
           <a:p>
             <a:pPr algn="l">
               <a:lnSpc>
-                <a:spcPct val="140000"/>
-              </a:lnSpc>
-            </a:pPr>
-            <a:r>
-              <a:rPr sz="1400" i="0" b="0" spc="220">
-                <a:solidFill>
-                  <a:srgbClr val="A5A49F"/>
+                <a:spcPts val="2520"/>
+              </a:lnSpc>
+            </a:pPr>
+            <a:r>
+              <a:rPr sz="1800" i="0" b="0" spc="282">
+                <a:solidFill>
+                  <a:srgbClr val="1C1C1A"/>
                 </a:solidFill>
                 <a:latin typeface="Outfit 1 Semi-Bold"/>
               </a:rPr>
@@ -3779,8 +3806,8 @@
         </p:nvSpPr>
         <p:spPr>
           <a:xfrm>
-            <a:off x="7132320" y="3926616"/>
-            <a:ext cx="9144000" cy="616452"/>
+            <a:off x="7132320" y="3916680"/>
+            <a:ext cx="9144000" cy="589178"/>
           </a:xfrm>
           <a:prstGeom prst="rect">
             <a:avLst/>
@@ -3795,11 +3822,11 @@
           <a:p>
             <a:pPr algn="l">
               <a:lnSpc>
-                <a:spcPct val="140000"/>
-              </a:lnSpc>
-            </a:pPr>
-            <a:r>
-              <a:rPr sz="2100" i="0" b="0">
+                <a:spcPts val="3500"/>
+              </a:lnSpc>
+            </a:pPr>
+            <a:r>
+              <a:rPr sz="2500" i="0" b="0">
                 <a:solidFill>
                   <a:srgbClr val="1C1C1A"/>
                 </a:solidFill>
@@ -3818,14 +3845,14 @@
         </p:nvSpPr>
         <p:spPr>
           <a:xfrm>
-            <a:off x="2011680" y="4616220"/>
+            <a:off x="2011680" y="4579010"/>
             <a:ext cx="14264640" cy="10973"/>
           </a:xfrm>
           <a:prstGeom prst="rect">
             <a:avLst/>
           </a:prstGeom>
           <a:solidFill>
-            <a:srgbClr val="DFDDD7"/>
+            <a:srgbClr val="A5A49F"/>
           </a:solidFill>
           <a:ln>
             <a:noFill/>
@@ -3862,8 +3889,8 @@
         </p:nvSpPr>
         <p:spPr>
           <a:xfrm>
-            <a:off x="2011680" y="4853964"/>
-            <a:ext cx="4754880" cy="256032"/>
+            <a:off x="2011680" y="4853330"/>
+            <a:ext cx="4754880" cy="365760"/>
           </a:xfrm>
           <a:prstGeom prst="rect">
             <a:avLst/>
@@ -3878,13 +3905,13 @@
           <a:p>
             <a:pPr algn="l">
               <a:lnSpc>
-                <a:spcPct val="140000"/>
-              </a:lnSpc>
-            </a:pPr>
-            <a:r>
-              <a:rPr sz="1400" i="0" b="0" spc="220">
-                <a:solidFill>
-                  <a:srgbClr val="A5A49F"/>
+                <a:spcPts val="2520"/>
+              </a:lnSpc>
+            </a:pPr>
+            <a:r>
+              <a:rPr sz="1800" i="0" b="0" spc="282">
+                <a:solidFill>
+                  <a:srgbClr val="1C1C1A"/>
                 </a:solidFill>
                 <a:latin typeface="Outfit 1 Semi-Bold"/>
               </a:rPr>
@@ -3901,8 +3928,8 @@
         </p:nvSpPr>
         <p:spPr>
           <a:xfrm>
-            <a:off x="7132320" y="4780812"/>
-            <a:ext cx="9144000" cy="616452"/>
+            <a:off x="7132320" y="4780178"/>
+            <a:ext cx="9144000" cy="589178"/>
           </a:xfrm>
           <a:prstGeom prst="rect">
             <a:avLst/>
@@ -3917,11 +3944,11 @@
           <a:p>
             <a:pPr algn="l">
               <a:lnSpc>
-                <a:spcPct val="140000"/>
-              </a:lnSpc>
-            </a:pPr>
-            <a:r>
-              <a:rPr sz="2100" i="0" b="0">
+                <a:spcPts val="3500"/>
+              </a:lnSpc>
+            </a:pPr>
+            <a:r>
+              <a:rPr sz="2500" i="0" b="0">
                 <a:solidFill>
                   <a:srgbClr val="1C1C1A"/>
                 </a:solidFill>
@@ -3940,14 +3967,14 @@
         </p:nvSpPr>
         <p:spPr>
           <a:xfrm>
-            <a:off x="2011680" y="5470416"/>
+            <a:off x="2011680" y="5442509"/>
             <a:ext cx="14264640" cy="10973"/>
           </a:xfrm>
           <a:prstGeom prst="rect">
             <a:avLst/>
           </a:prstGeom>
           <a:solidFill>
-            <a:srgbClr val="DFDDD7"/>
+            <a:srgbClr val="A5A49F"/>
           </a:solidFill>
           <a:ln>
             <a:noFill/>
@@ -3984,8 +4011,8 @@
         </p:nvSpPr>
         <p:spPr>
           <a:xfrm>
-            <a:off x="2011680" y="5708160"/>
-            <a:ext cx="4754880" cy="256032"/>
+            <a:off x="2011680" y="5716829"/>
+            <a:ext cx="4754880" cy="365760"/>
           </a:xfrm>
           <a:prstGeom prst="rect">
             <a:avLst/>
@@ -4000,13 +4027,13 @@
           <a:p>
             <a:pPr algn="l">
               <a:lnSpc>
-                <a:spcPct val="140000"/>
-              </a:lnSpc>
-            </a:pPr>
-            <a:r>
-              <a:rPr sz="1400" i="0" b="0" spc="220">
-                <a:solidFill>
-                  <a:srgbClr val="A5A49F"/>
+                <a:spcPts val="2520"/>
+              </a:lnSpc>
+            </a:pPr>
+            <a:r>
+              <a:rPr sz="1800" i="0" b="0" spc="282">
+                <a:solidFill>
+                  <a:srgbClr val="1C1C1A"/>
                 </a:solidFill>
                 <a:latin typeface="Outfit 1 Semi-Bold"/>
               </a:rPr>
@@ -4023,8 +4050,8 @@
         </p:nvSpPr>
         <p:spPr>
           <a:xfrm>
-            <a:off x="7132320" y="5635008"/>
-            <a:ext cx="9144000" cy="616452"/>
+            <a:off x="7132320" y="5643677"/>
+            <a:ext cx="9144000" cy="589178"/>
           </a:xfrm>
           <a:prstGeom prst="rect">
             <a:avLst/>
@@ -4039,11 +4066,11 @@
           <a:p>
             <a:pPr algn="l">
               <a:lnSpc>
-                <a:spcPct val="140000"/>
-              </a:lnSpc>
-            </a:pPr>
-            <a:r>
-              <a:rPr sz="2100" i="0" b="0">
+                <a:spcPts val="3500"/>
+              </a:lnSpc>
+            </a:pPr>
+            <a:r>
+              <a:rPr sz="2500" i="0" b="0">
                 <a:solidFill>
                   <a:srgbClr val="1C1C1A"/>
                 </a:solidFill>
@@ -4062,14 +4089,14 @@
         </p:nvSpPr>
         <p:spPr>
           <a:xfrm>
-            <a:off x="2011680" y="6324612"/>
+            <a:off x="2011680" y="6306007"/>
             <a:ext cx="14264640" cy="10973"/>
           </a:xfrm>
           <a:prstGeom prst="rect">
             <a:avLst/>
           </a:prstGeom>
           <a:solidFill>
-            <a:srgbClr val="DFDDD7"/>
+            <a:srgbClr val="A5A49F"/>
           </a:solidFill>
           <a:ln>
             <a:noFill/>
@@ -4106,8 +4133,8 @@
         </p:nvSpPr>
         <p:spPr>
           <a:xfrm>
-            <a:off x="2011680" y="6562356"/>
-            <a:ext cx="4754880" cy="256032"/>
+            <a:off x="2011680" y="6580327"/>
+            <a:ext cx="4754880" cy="365760"/>
           </a:xfrm>
           <a:prstGeom prst="rect">
             <a:avLst/>
@@ -4122,13 +4149,13 @@
           <a:p>
             <a:pPr algn="l">
               <a:lnSpc>
-                <a:spcPct val="140000"/>
-              </a:lnSpc>
-            </a:pPr>
-            <a:r>
-              <a:rPr sz="1400" i="0" b="0" spc="220">
-                <a:solidFill>
-                  <a:srgbClr val="A5A49F"/>
+                <a:spcPts val="2520"/>
+              </a:lnSpc>
+            </a:pPr>
+            <a:r>
+              <a:rPr sz="1800" i="0" b="0" spc="282">
+                <a:solidFill>
+                  <a:srgbClr val="1C1C1A"/>
                 </a:solidFill>
                 <a:latin typeface="Outfit 1 Semi-Bold"/>
               </a:rPr>
@@ -4145,8 +4172,8 @@
         </p:nvSpPr>
         <p:spPr>
           <a:xfrm>
-            <a:off x="7132320" y="6489204"/>
-            <a:ext cx="9144000" cy="616452"/>
+            <a:off x="7132320" y="6507175"/>
+            <a:ext cx="9144000" cy="589178"/>
           </a:xfrm>
           <a:prstGeom prst="rect">
             <a:avLst/>
@@ -4161,11 +4188,11 @@
           <a:p>
             <a:pPr algn="l">
               <a:lnSpc>
-                <a:spcPct val="140000"/>
-              </a:lnSpc>
-            </a:pPr>
-            <a:r>
-              <a:rPr sz="2100" i="0" b="0">
+                <a:spcPts val="3500"/>
+              </a:lnSpc>
+            </a:pPr>
+            <a:r>
+              <a:rPr sz="2500" i="0" b="0">
                 <a:solidFill>
                   <a:srgbClr val="1C1C1A"/>
                 </a:solidFill>
@@ -4184,14 +4211,14 @@
         </p:nvSpPr>
         <p:spPr>
           <a:xfrm>
-            <a:off x="2011680" y="7178808"/>
+            <a:off x="2011680" y="7169506"/>
             <a:ext cx="14264640" cy="10973"/>
           </a:xfrm>
           <a:prstGeom prst="rect">
             <a:avLst/>
           </a:prstGeom>
           <a:solidFill>
-            <a:srgbClr val="DFDDD7"/>
+            <a:srgbClr val="A5A49F"/>
           </a:solidFill>
           <a:ln>
             <a:noFill/>
@@ -4228,8 +4255,8 @@
         </p:nvSpPr>
         <p:spPr>
           <a:xfrm>
-            <a:off x="2011680" y="7416552"/>
-            <a:ext cx="4754880" cy="256032"/>
+            <a:off x="2011680" y="7443826"/>
+            <a:ext cx="4754880" cy="365760"/>
           </a:xfrm>
           <a:prstGeom prst="rect">
             <a:avLst/>
@@ -4244,13 +4271,13 @@
           <a:p>
             <a:pPr algn="l">
               <a:lnSpc>
-                <a:spcPct val="140000"/>
-              </a:lnSpc>
-            </a:pPr>
-            <a:r>
-              <a:rPr sz="1400" i="0" b="0" spc="220">
-                <a:solidFill>
-                  <a:srgbClr val="A9724A"/>
+                <a:spcPts val="2520"/>
+              </a:lnSpc>
+            </a:pPr>
+            <a:r>
+              <a:rPr sz="1800" i="0" b="0" spc="282">
+                <a:solidFill>
+                  <a:srgbClr val="CC754E"/>
                 </a:solidFill>
                 <a:latin typeface="Outfit 1 Semi-Bold"/>
               </a:rPr>
@@ -4267,8 +4294,8 @@
         </p:nvSpPr>
         <p:spPr>
           <a:xfrm>
-            <a:off x="7132320" y="7343400"/>
-            <a:ext cx="9144000" cy="616452"/>
+            <a:off x="7132320" y="7370674"/>
+            <a:ext cx="9144000" cy="589178"/>
           </a:xfrm>
           <a:prstGeom prst="rect">
             <a:avLst/>
@@ -4283,11 +4310,11 @@
           <a:p>
             <a:pPr algn="l">
               <a:lnSpc>
-                <a:spcPct val="140000"/>
-              </a:lnSpc>
-            </a:pPr>
-            <a:r>
-              <a:rPr sz="2100" i="0" b="0">
+                <a:spcPts val="3500"/>
+              </a:lnSpc>
+            </a:pPr>
+            <a:r>
+              <a:rPr sz="2500" i="0" b="0">
                 <a:solidFill>
                   <a:srgbClr val="1C1C1A"/>
                 </a:solidFill>
@@ -4313,7 +4340,7 @@
             <a:avLst/>
           </a:prstGeom>
           <a:solidFill>
-            <a:srgbClr val="A9724A"/>
+            <a:srgbClr val="CC754E"/>
           </a:solidFill>
           <a:ln>
             <a:noFill/>
@@ -4448,8 +4475,8 @@
         </p:nvSpPr>
         <p:spPr>
           <a:xfrm>
-            <a:off x="2011680" y="2932613"/>
-            <a:ext cx="14264640" cy="882396"/>
+            <a:off x="2011680" y="2992501"/>
+            <a:ext cx="14264640" cy="1005078"/>
           </a:xfrm>
           <a:prstGeom prst="rect">
             <a:avLst/>
@@ -4464,7 +4491,7 @@
           <a:p>
             <a:pPr algn="l">
               <a:lnSpc>
-                <a:spcPct val="114000"/>
+                <a:spcPts val="5754"/>
               </a:lnSpc>
             </a:pPr>
             <a:r>
@@ -4487,14 +4514,14 @@
         </p:nvSpPr>
         <p:spPr>
           <a:xfrm>
-            <a:off x="2011680" y="3869507"/>
+            <a:off x="2011680" y="3906139"/>
             <a:ext cx="14264640" cy="10973"/>
           </a:xfrm>
           <a:prstGeom prst="rect">
             <a:avLst/>
           </a:prstGeom>
           <a:solidFill>
-            <a:srgbClr val="DFDDD7"/>
+            <a:srgbClr val="A5A49F"/>
           </a:solidFill>
           <a:ln>
             <a:noFill/>
@@ -4531,14 +4558,14 @@
         </p:nvSpPr>
         <p:spPr>
           <a:xfrm>
-            <a:off x="2011680" y="4715581"/>
+            <a:off x="2011680" y="4728083"/>
             <a:ext cx="14264640" cy="10973"/>
           </a:xfrm>
           <a:prstGeom prst="rect">
             <a:avLst/>
           </a:prstGeom>
           <a:solidFill>
-            <a:srgbClr val="DFDDD7"/>
+            <a:srgbClr val="A5A49F"/>
           </a:solidFill>
           <a:ln>
             <a:noFill/>
@@ -4575,8 +4602,8 @@
         </p:nvSpPr>
         <p:spPr>
           <a:xfrm>
-            <a:off x="2011680" y="4216979"/>
-            <a:ext cx="14264640" cy="535178"/>
+            <a:off x="2011680" y="4253611"/>
+            <a:ext cx="14264640" cy="511048"/>
           </a:xfrm>
           <a:prstGeom prst="rect">
             <a:avLst/>
@@ -4591,11 +4618,11 @@
           <a:p>
             <a:pPr algn="l">
               <a:lnSpc>
-                <a:spcPct val="140000"/>
-              </a:lnSpc>
-            </a:pPr>
-            <a:r>
-              <a:rPr sz="2900" i="0" b="0">
+                <a:spcPts val="3919"/>
+              </a:lnSpc>
+            </a:pPr>
+            <a:r>
+              <a:rPr sz="2800" i="0" b="0">
                 <a:solidFill>
                   <a:srgbClr val="1C1C1A"/>
                 </a:solidFill>
@@ -4614,14 +4641,14 @@
         </p:nvSpPr>
         <p:spPr>
           <a:xfrm>
-            <a:off x="2011680" y="5415351"/>
+            <a:off x="2011680" y="5403723"/>
             <a:ext cx="14264640" cy="10973"/>
           </a:xfrm>
           <a:prstGeom prst="rect">
             <a:avLst/>
           </a:prstGeom>
           <a:solidFill>
-            <a:srgbClr val="DFDDD7"/>
+            <a:srgbClr val="A5A49F"/>
           </a:solidFill>
           <a:ln>
             <a:noFill/>
@@ -4658,8 +4685,8 @@
         </p:nvSpPr>
         <p:spPr>
           <a:xfrm>
-            <a:off x="2011680" y="4916749"/>
-            <a:ext cx="14264640" cy="535178"/>
+            <a:off x="2011680" y="4929251"/>
+            <a:ext cx="14264640" cy="511048"/>
           </a:xfrm>
           <a:prstGeom prst="rect">
             <a:avLst/>
@@ -4674,11 +4701,11 @@
           <a:p>
             <a:pPr algn="l">
               <a:lnSpc>
-                <a:spcPct val="140000"/>
-              </a:lnSpc>
-            </a:pPr>
-            <a:r>
-              <a:rPr sz="2900" i="0" b="0">
+                <a:spcPts val="3919"/>
+              </a:lnSpc>
+            </a:pPr>
+            <a:r>
+              <a:rPr sz="2800" i="0" b="0">
                 <a:solidFill>
                   <a:srgbClr val="1C1C1A"/>
                 </a:solidFill>
@@ -4697,14 +4724,14 @@
         </p:nvSpPr>
         <p:spPr>
           <a:xfrm>
-            <a:off x="2011680" y="6115121"/>
+            <a:off x="2011680" y="6079363"/>
             <a:ext cx="14264640" cy="10973"/>
           </a:xfrm>
           <a:prstGeom prst="rect">
             <a:avLst/>
           </a:prstGeom>
           <a:solidFill>
-            <a:srgbClr val="DFDDD7"/>
+            <a:srgbClr val="A5A49F"/>
           </a:solidFill>
           <a:ln>
             <a:noFill/>
@@ -4741,8 +4768,8 @@
         </p:nvSpPr>
         <p:spPr>
           <a:xfrm>
-            <a:off x="2011680" y="5616519"/>
-            <a:ext cx="14264640" cy="535178"/>
+            <a:off x="2011680" y="5604891"/>
+            <a:ext cx="14264640" cy="511048"/>
           </a:xfrm>
           <a:prstGeom prst="rect">
             <a:avLst/>
@@ -4757,11 +4784,11 @@
           <a:p>
             <a:pPr algn="l">
               <a:lnSpc>
-                <a:spcPct val="140000"/>
-              </a:lnSpc>
-            </a:pPr>
-            <a:r>
-              <a:rPr sz="2900" i="0" b="0">
+                <a:spcPts val="3919"/>
+              </a:lnSpc>
+            </a:pPr>
+            <a:r>
+              <a:rPr sz="2800" i="0" b="0">
                 <a:solidFill>
                   <a:srgbClr val="1C1C1A"/>
                 </a:solidFill>
@@ -4780,14 +4807,14 @@
         </p:nvSpPr>
         <p:spPr>
           <a:xfrm>
-            <a:off x="2011680" y="6814891"/>
+            <a:off x="2011680" y="6755003"/>
             <a:ext cx="14264640" cy="10973"/>
           </a:xfrm>
           <a:prstGeom prst="rect">
             <a:avLst/>
           </a:prstGeom>
           <a:solidFill>
-            <a:srgbClr val="DFDDD7"/>
+            <a:srgbClr val="A5A49F"/>
           </a:solidFill>
           <a:ln>
             <a:noFill/>
@@ -4824,8 +4851,8 @@
         </p:nvSpPr>
         <p:spPr>
           <a:xfrm>
-            <a:off x="2011680" y="6316289"/>
-            <a:ext cx="14264640" cy="535178"/>
+            <a:off x="2011680" y="6280531"/>
+            <a:ext cx="14264640" cy="511048"/>
           </a:xfrm>
           <a:prstGeom prst="rect">
             <a:avLst/>
@@ -4840,11 +4867,11 @@
           <a:p>
             <a:pPr algn="l">
               <a:lnSpc>
-                <a:spcPct val="140000"/>
-              </a:lnSpc>
-            </a:pPr>
-            <a:r>
-              <a:rPr sz="2900" i="0" b="0">
+                <a:spcPts val="3919"/>
+              </a:lnSpc>
+            </a:pPr>
+            <a:r>
+              <a:rPr sz="2800" i="0" b="0">
                 <a:solidFill>
                   <a:srgbClr val="1C1C1A"/>
                 </a:solidFill>
@@ -4961,14 +4988,14 @@
         </p:nvSpPr>
         <p:spPr>
           <a:xfrm>
-            <a:off x="2011680" y="1917055"/>
+            <a:off x="2011680" y="2985643"/>
             <a:ext cx="1188720" cy="27432"/>
           </a:xfrm>
           <a:prstGeom prst="rect">
             <a:avLst/>
           </a:prstGeom>
           <a:solidFill>
-            <a:srgbClr val="A9724A"/>
+            <a:srgbClr val="CC754E"/>
           </a:solidFill>
           <a:ln>
             <a:noFill/>
@@ -5005,8 +5032,8 @@
         </p:nvSpPr>
         <p:spPr>
           <a:xfrm>
-            <a:off x="2011680" y="2319391"/>
-            <a:ext cx="14081760" cy="5115885"/>
+            <a:off x="2011680" y="3387979"/>
+            <a:ext cx="14081760" cy="2905760"/>
           </a:xfrm>
           <a:prstGeom prst="rect">
             <a:avLst/>
@@ -5021,13 +5048,13 @@
           <a:p>
             <a:pPr algn="l">
               <a:lnSpc>
-                <a:spcPct val="126000"/>
-              </a:lnSpc>
-            </a:pPr>
-            <a:r>
-              <a:rPr sz="6100" i="0" b="0">
-                <a:solidFill>
-                  <a:srgbClr val="1C1C1A"/>
+                <a:spcPts val="5180"/>
+              </a:lnSpc>
+            </a:pPr>
+            <a:r>
+              <a:rPr sz="3700" i="0" b="0">
+                <a:solidFill>
+                  <a:srgbClr val="323330"/>
                 </a:solidFill>
                 <a:latin typeface="Outfit 1 Light"/>
               </a:rPr>
@@ -5037,13 +5064,13 @@
           <a:p>
             <a:pPr algn="l">
               <a:lnSpc>
-                <a:spcPct val="126000"/>
-              </a:lnSpc>
-            </a:pPr>
-            <a:r>
-              <a:rPr sz="6100" i="0" b="0">
-                <a:solidFill>
-                  <a:srgbClr val="1C1C1A"/>
+                <a:spcPts val="5180"/>
+              </a:lnSpc>
+            </a:pPr>
+            <a:r>
+              <a:rPr sz="3700" i="0" b="0">
+                <a:solidFill>
+                  <a:srgbClr val="323330"/>
                 </a:solidFill>
                 <a:latin typeface="Outfit 1 Light"/>
               </a:rPr>
@@ -5053,13 +5080,13 @@
           <a:p>
             <a:pPr algn="l">
               <a:lnSpc>
-                <a:spcPct val="126000"/>
-              </a:lnSpc>
-            </a:pPr>
-            <a:r>
-              <a:rPr sz="6100" i="0" b="0">
-                <a:solidFill>
-                  <a:srgbClr val="1C1C1A"/>
+                <a:spcPts val="5180"/>
+              </a:lnSpc>
+            </a:pPr>
+            <a:r>
+              <a:rPr sz="3700" i="0" b="0">
+                <a:solidFill>
+                  <a:srgbClr val="323330"/>
                 </a:solidFill>
                 <a:latin typeface="Outfit 1 Light"/>
               </a:rPr>
@@ -5069,13 +5096,13 @@
           <a:p>
             <a:pPr algn="l">
               <a:lnSpc>
-                <a:spcPct val="126000"/>
-              </a:lnSpc>
-            </a:pPr>
-            <a:r>
-              <a:rPr sz="6100" i="0" b="0">
-                <a:solidFill>
-                  <a:srgbClr val="1C1C1A"/>
+                <a:spcPts val="5180"/>
+              </a:lnSpc>
+            </a:pPr>
+            <a:r>
+              <a:rPr sz="3700" i="0" b="0">
+                <a:solidFill>
+                  <a:srgbClr val="323330"/>
                 </a:solidFill>
                 <a:latin typeface="Outfit 1 Light"/>
               </a:rPr>
@@ -5092,8 +5119,8 @@
         </p:nvSpPr>
         <p:spPr>
           <a:xfrm>
-            <a:off x="2011680" y="7312594"/>
-            <a:ext cx="11887200" cy="554431"/>
+            <a:off x="2011680" y="6262497"/>
+            <a:ext cx="11887200" cy="535940"/>
           </a:xfrm>
           <a:prstGeom prst="rect">
             <a:avLst/>
@@ -5108,11 +5135,11 @@
           <a:p>
             <a:pPr algn="l">
               <a:lnSpc>
-                <a:spcPct val="140000"/>
-              </a:lnSpc>
-            </a:pPr>
-            <a:r>
-              <a:rPr sz="2100" i="0" b="0">
+                <a:spcPts val="3500"/>
+              </a:lnSpc>
+            </a:pPr>
+            <a:r>
+              <a:rPr sz="2500" i="0" b="0">
                 <a:solidFill>
                   <a:srgbClr val="6B6B66"/>
                 </a:solidFill>
@@ -5229,8 +5256,8 @@
         </p:nvSpPr>
         <p:spPr>
           <a:xfrm>
-            <a:off x="2011680" y="2331720"/>
-            <a:ext cx="14264640" cy="882396"/>
+            <a:off x="2011680" y="2269617"/>
+            <a:ext cx="14264640" cy="1005078"/>
           </a:xfrm>
           <a:prstGeom prst="rect">
             <a:avLst/>
@@ -5245,7 +5272,7 @@
           <a:p>
             <a:pPr algn="l">
               <a:lnSpc>
-                <a:spcPct val="114000"/>
+                <a:spcPts val="5754"/>
               </a:lnSpc>
             </a:pPr>
             <a:r>
@@ -5255,7 +5282,25 @@
                 </a:solidFill>
                 <a:latin typeface="Outfit 1 Light"/>
               </a:rPr>
-              <a:t>A CULTURA SE REVELA DIANTE DOS PROBLEMAS.</a:t>
+              <a:t>A CULTURA SE REVELA </a:t>
+            </a:r>
+            <a:r>
+              <a:rPr sz="4200" i="0" b="0">
+                <a:solidFill>
+                  <a:srgbClr val="1C1C1A"/>
+                </a:solidFill>
+                <a:latin typeface="Outfit 1 Bold"/>
+              </a:rPr>
+              <a:t>DIANTE DOS PROBLEMAS</a:t>
+            </a:r>
+            <a:r>
+              <a:rPr sz="4200" i="0" b="0">
+                <a:solidFill>
+                  <a:srgbClr val="1C1C1A"/>
+                </a:solidFill>
+                <a:latin typeface="Outfit 1 Light"/>
+              </a:rPr>
+              <a:t>.</a:t>
             </a:r>
           </a:p>
         </p:txBody>
@@ -5268,14 +5313,14 @@
         </p:nvSpPr>
         <p:spPr>
           <a:xfrm>
-            <a:off x="2011680" y="3268614"/>
+            <a:off x="2011680" y="3183255"/>
             <a:ext cx="14264640" cy="10973"/>
           </a:xfrm>
           <a:prstGeom prst="rect">
             <a:avLst/>
           </a:prstGeom>
           <a:solidFill>
-            <a:srgbClr val="DFDDD7"/>
+            <a:srgbClr val="A5A49F"/>
           </a:solidFill>
           <a:ln>
             <a:noFill/>
@@ -5312,14 +5357,14 @@
         </p:nvSpPr>
         <p:spPr>
           <a:xfrm>
-            <a:off x="2011680" y="3616086"/>
-            <a:ext cx="4419600" cy="10973"/>
+            <a:off x="2011680" y="3530727"/>
+            <a:ext cx="4419600" cy="56693"/>
           </a:xfrm>
           <a:prstGeom prst="rect">
             <a:avLst/>
           </a:prstGeom>
           <a:solidFill>
-            <a:srgbClr val="DFDDD7"/>
+            <a:srgbClr val="CC754E"/>
           </a:solidFill>
           <a:ln>
             <a:noFill/>
@@ -5356,8 +5401,8 @@
         </p:nvSpPr>
         <p:spPr>
           <a:xfrm>
-            <a:off x="2011680" y="3872118"/>
-            <a:ext cx="4419600" cy="526085"/>
+            <a:off x="2011680" y="3805047"/>
+            <a:ext cx="4419600" cy="535940"/>
           </a:xfrm>
           <a:prstGeom prst="rect">
             <a:avLst/>
@@ -5372,11 +5417,11 @@
           <a:p>
             <a:pPr algn="l">
               <a:lnSpc>
-                <a:spcPct val="140000"/>
-              </a:lnSpc>
-            </a:pPr>
-            <a:r>
-              <a:rPr sz="2300" i="0" b="0">
+                <a:spcPts val="3500"/>
+              </a:lnSpc>
+            </a:pPr>
+            <a:r>
+              <a:rPr sz="2500" i="0" b="0">
                 <a:solidFill>
                   <a:srgbClr val="1C1C1A"/>
                 </a:solidFill>
@@ -5395,8 +5440,8 @@
         </p:nvSpPr>
         <p:spPr>
           <a:xfrm>
-            <a:off x="2011680" y="4562795"/>
-            <a:ext cx="4419600" cy="1017422"/>
+            <a:off x="2011680" y="4542155"/>
+            <a:ext cx="4419600" cy="1424940"/>
           </a:xfrm>
           <a:prstGeom prst="rect">
             <a:avLst/>
@@ -5411,11 +5456,11 @@
           <a:p>
             <a:pPr algn="l">
               <a:lnSpc>
-                <a:spcPct val="140000"/>
-              </a:lnSpc>
-            </a:pPr>
-            <a:r>
-              <a:rPr sz="2100" i="0" b="0">
+                <a:spcPts val="3500"/>
+              </a:lnSpc>
+            </a:pPr>
+            <a:r>
+              <a:rPr sz="2500" i="0" b="0">
                 <a:solidFill>
                   <a:srgbClr val="6B6B66"/>
                 </a:solidFill>
@@ -5434,14 +5479,14 @@
         </p:nvSpPr>
         <p:spPr>
           <a:xfrm>
-            <a:off x="6934200" y="3616086"/>
-            <a:ext cx="4419600" cy="10973"/>
+            <a:off x="6934200" y="3530727"/>
+            <a:ext cx="4419600" cy="56693"/>
           </a:xfrm>
           <a:prstGeom prst="rect">
             <a:avLst/>
           </a:prstGeom>
           <a:solidFill>
-            <a:srgbClr val="DFDDD7"/>
+            <a:srgbClr val="CC754E"/>
           </a:solidFill>
           <a:ln>
             <a:noFill/>
@@ -5478,8 +5523,8 @@
         </p:nvSpPr>
         <p:spPr>
           <a:xfrm>
-            <a:off x="6934200" y="3872118"/>
-            <a:ext cx="4419600" cy="526085"/>
+            <a:off x="6934200" y="3805047"/>
+            <a:ext cx="4419600" cy="535940"/>
           </a:xfrm>
           <a:prstGeom prst="rect">
             <a:avLst/>
@@ -5494,11 +5539,11 @@
           <a:p>
             <a:pPr algn="l">
               <a:lnSpc>
-                <a:spcPct val="140000"/>
-              </a:lnSpc>
-            </a:pPr>
-            <a:r>
-              <a:rPr sz="2300" i="0" b="0">
+                <a:spcPts val="3500"/>
+              </a:lnSpc>
+            </a:pPr>
+            <a:r>
+              <a:rPr sz="2500" i="0" b="0">
                 <a:solidFill>
                   <a:srgbClr val="1C1C1A"/>
                 </a:solidFill>
@@ -5517,8 +5562,8 @@
         </p:nvSpPr>
         <p:spPr>
           <a:xfrm>
-            <a:off x="6934200" y="4562795"/>
-            <a:ext cx="4419600" cy="1480414"/>
+            <a:off x="6934200" y="4542155"/>
+            <a:ext cx="4419600" cy="1424940"/>
           </a:xfrm>
           <a:prstGeom prst="rect">
             <a:avLst/>
@@ -5533,11 +5578,11 @@
           <a:p>
             <a:pPr algn="l">
               <a:lnSpc>
-                <a:spcPct val="140000"/>
-              </a:lnSpc>
-            </a:pPr>
-            <a:r>
-              <a:rPr sz="2100" i="0" b="0">
+                <a:spcPts val="3500"/>
+              </a:lnSpc>
+            </a:pPr>
+            <a:r>
+              <a:rPr sz="2500" i="0" b="0">
                 <a:solidFill>
                   <a:srgbClr val="6B6B66"/>
                 </a:solidFill>
@@ -5556,14 +5601,14 @@
         </p:nvSpPr>
         <p:spPr>
           <a:xfrm>
-            <a:off x="11856720" y="3616086"/>
-            <a:ext cx="4419600" cy="10973"/>
+            <a:off x="11856720" y="3530727"/>
+            <a:ext cx="4419600" cy="56693"/>
           </a:xfrm>
           <a:prstGeom prst="rect">
             <a:avLst/>
           </a:prstGeom>
           <a:solidFill>
-            <a:srgbClr val="DFDDD7"/>
+            <a:srgbClr val="CC754E"/>
           </a:solidFill>
           <a:ln>
             <a:noFill/>
@@ -5600,8 +5645,8 @@
         </p:nvSpPr>
         <p:spPr>
           <a:xfrm>
-            <a:off x="11856720" y="3872118"/>
-            <a:ext cx="4419600" cy="526085"/>
+            <a:off x="11856720" y="3805047"/>
+            <a:ext cx="4419600" cy="535940"/>
           </a:xfrm>
           <a:prstGeom prst="rect">
             <a:avLst/>
@@ -5616,11 +5661,11 @@
           <a:p>
             <a:pPr algn="l">
               <a:lnSpc>
-                <a:spcPct val="140000"/>
-              </a:lnSpc>
-            </a:pPr>
-            <a:r>
-              <a:rPr sz="2300" i="0" b="0">
+                <a:spcPts val="3500"/>
+              </a:lnSpc>
+            </a:pPr>
+            <a:r>
+              <a:rPr sz="2500" i="0" b="0">
                 <a:solidFill>
                   <a:srgbClr val="1C1C1A"/>
                 </a:solidFill>
@@ -5639,8 +5684,8 @@
         </p:nvSpPr>
         <p:spPr>
           <a:xfrm>
-            <a:off x="11856720" y="4562795"/>
-            <a:ext cx="4419600" cy="1017422"/>
+            <a:off x="11856720" y="4542155"/>
+            <a:ext cx="4419600" cy="980440"/>
           </a:xfrm>
           <a:prstGeom prst="rect">
             <a:avLst/>
@@ -5655,11 +5700,11 @@
           <a:p>
             <a:pPr algn="l">
               <a:lnSpc>
-                <a:spcPct val="140000"/>
-              </a:lnSpc>
-            </a:pPr>
-            <a:r>
-              <a:rPr sz="2100" i="0" b="0">
+                <a:spcPts val="3500"/>
+              </a:lnSpc>
+            </a:pPr>
+            <a:r>
+              <a:rPr sz="2500" i="0" b="0">
                 <a:solidFill>
                   <a:srgbClr val="6B6B66"/>
                 </a:solidFill>
@@ -5678,8 +5723,8 @@
         </p:nvSpPr>
         <p:spPr>
           <a:xfrm>
-            <a:off x="2011680" y="6454689"/>
-            <a:ext cx="12252960" cy="1017422"/>
+            <a:off x="3986784" y="6534023"/>
+            <a:ext cx="10314432" cy="980440"/>
           </a:xfrm>
           <a:prstGeom prst="rect">
             <a:avLst/>
@@ -5692,13 +5737,13 @@
           </a:bodyPr>
           <a:lstStyle/>
           <a:p>
-            <a:pPr algn="l">
-              <a:lnSpc>
-                <a:spcPct val="140000"/>
-              </a:lnSpc>
-            </a:pPr>
-            <a:r>
-              <a:rPr sz="2100" i="0" b="0">
+            <a:pPr algn="ctr">
+              <a:lnSpc>
+                <a:spcPts val="3500"/>
+              </a:lnSpc>
+            </a:pPr>
+            <a:r>
+              <a:rPr sz="2500" i="0" b="0">
                 <a:solidFill>
                   <a:srgbClr val="6B6B66"/>
                 </a:solidFill>
@@ -5815,14 +5860,14 @@
         </p:nvSpPr>
         <p:spPr>
           <a:xfrm>
-            <a:off x="2011680" y="2355098"/>
+            <a:off x="2011680" y="3314573"/>
             <a:ext cx="1188720" cy="27432"/>
           </a:xfrm>
           <a:prstGeom prst="rect">
             <a:avLst/>
           </a:prstGeom>
           <a:solidFill>
-            <a:srgbClr val="A9724A"/>
+            <a:srgbClr val="CC754E"/>
           </a:solidFill>
           <a:ln>
             <a:noFill/>
@@ -5859,8 +5904,8 @@
         </p:nvSpPr>
         <p:spPr>
           <a:xfrm>
-            <a:off x="2011680" y="2757434"/>
-            <a:ext cx="14081760" cy="4262658"/>
+            <a:off x="2011680" y="3716909"/>
+            <a:ext cx="14081760" cy="2247900"/>
           </a:xfrm>
           <a:prstGeom prst="rect">
             <a:avLst/>
@@ -5875,13 +5920,13 @@
           <a:p>
             <a:pPr algn="l">
               <a:lnSpc>
-                <a:spcPct val="126000"/>
-              </a:lnSpc>
-            </a:pPr>
-            <a:r>
-              <a:rPr sz="6700" i="0" b="0">
-                <a:solidFill>
-                  <a:srgbClr val="1C1C1A"/>
+                <a:spcPts val="5180"/>
+              </a:lnSpc>
+            </a:pPr>
+            <a:r>
+              <a:rPr sz="3700" i="0" b="0">
+                <a:solidFill>
+                  <a:srgbClr val="323330"/>
                 </a:solidFill>
                 <a:latin typeface="Outfit 1 Light"/>
               </a:rPr>
@@ -5891,13 +5936,13 @@
           <a:p>
             <a:pPr algn="l">
               <a:lnSpc>
-                <a:spcPct val="126000"/>
-              </a:lnSpc>
-            </a:pPr>
-            <a:r>
-              <a:rPr sz="6700" i="0" b="0">
-                <a:solidFill>
-                  <a:srgbClr val="1C1C1A"/>
+                <a:spcPts val="5180"/>
+              </a:lnSpc>
+            </a:pPr>
+            <a:r>
+              <a:rPr sz="3700" i="0" b="0">
+                <a:solidFill>
+                  <a:srgbClr val="323330"/>
                 </a:solidFill>
                 <a:latin typeface="Outfit 1 Light"/>
               </a:rPr>
@@ -5907,13 +5952,13 @@
           <a:p>
             <a:pPr algn="l">
               <a:lnSpc>
-                <a:spcPct val="126000"/>
-              </a:lnSpc>
-            </a:pPr>
-            <a:r>
-              <a:rPr sz="6700" i="0" b="0">
-                <a:solidFill>
-                  <a:srgbClr val="1C1C1A"/>
+                <a:spcPts val="5180"/>
+              </a:lnSpc>
+            </a:pPr>
+            <a:r>
+              <a:rPr sz="3700" i="0" b="0">
+                <a:solidFill>
+                  <a:srgbClr val="323330"/>
                 </a:solidFill>
                 <a:latin typeface="Outfit 1 Light"/>
               </a:rPr>
@@ -5930,8 +5975,8 @@
         </p:nvSpPr>
         <p:spPr>
           <a:xfrm>
-            <a:off x="2011680" y="6874551"/>
-            <a:ext cx="11887200" cy="554431"/>
+            <a:off x="2011680" y="5933567"/>
+            <a:ext cx="11887200" cy="535940"/>
           </a:xfrm>
           <a:prstGeom prst="rect">
             <a:avLst/>
@@ -5946,11 +5991,11 @@
           <a:p>
             <a:pPr algn="l">
               <a:lnSpc>
-                <a:spcPct val="140000"/>
-              </a:lnSpc>
-            </a:pPr>
-            <a:r>
-              <a:rPr sz="2100" i="0" b="0">
+                <a:spcPts val="3500"/>
+              </a:lnSpc>
+            </a:pPr>
+            <a:r>
+              <a:rPr sz="2500" i="0" b="0">
                 <a:solidFill>
                   <a:srgbClr val="6B6B66"/>
                 </a:solidFill>
@@ -6068,7 +6113,7 @@
         <p:spPr>
           <a:xfrm>
             <a:off x="2011680" y="1723644"/>
-            <a:ext cx="14264640" cy="882396"/>
+            <a:ext cx="14264640" cy="1005078"/>
           </a:xfrm>
           <a:prstGeom prst="rect">
             <a:avLst/>
@@ -6083,7 +6128,7 @@
           <a:p>
             <a:pPr algn="l">
               <a:lnSpc>
-                <a:spcPct val="114000"/>
+                <a:spcPts val="5754"/>
               </a:lnSpc>
             </a:pPr>
             <a:r>
@@ -6093,7 +6138,25 @@
                 </a:solidFill>
                 <a:latin typeface="Outfit 1 Light"/>
               </a:rPr>
-              <a:t>O CRESCIMENTO EXIGE A EVOLUÇÃO DA CULTURA.</a:t>
+              <a:t>O CRESCIMENTO EXIGE A </a:t>
+            </a:r>
+            <a:r>
+              <a:rPr sz="4200" i="0" b="0">
+                <a:solidFill>
+                  <a:srgbClr val="1C1C1A"/>
+                </a:solidFill>
+                <a:latin typeface="Outfit 1 Bold"/>
+              </a:rPr>
+              <a:t>EVOLUÇÃO DA CULTURA</a:t>
+            </a:r>
+            <a:r>
+              <a:rPr sz="4200" i="0" b="0">
+                <a:solidFill>
+                  <a:srgbClr val="1C1C1A"/>
+                </a:solidFill>
+                <a:latin typeface="Outfit 1 Light"/>
+              </a:rPr>
+              <a:t>.</a:t>
             </a:r>
           </a:p>
         </p:txBody>
@@ -6106,14 +6169,14 @@
         </p:nvSpPr>
         <p:spPr>
           <a:xfrm>
-            <a:off x="2011680" y="2660538"/>
+            <a:off x="2011680" y="2637282"/>
             <a:ext cx="14264640" cy="10973"/>
           </a:xfrm>
           <a:prstGeom prst="rect">
             <a:avLst/>
           </a:prstGeom>
           <a:solidFill>
-            <a:srgbClr val="DFDDD7"/>
+            <a:srgbClr val="A5A49F"/>
           </a:solidFill>
           <a:ln>
             <a:noFill/>
@@ -6166,7 +6229,7 @@
           <a:p>
             <a:pPr algn="l">
               <a:lnSpc>
-                <a:spcPct val="140000"/>
+                <a:spcPts val="1959"/>
               </a:lnSpc>
             </a:pPr>
             <a:r>
@@ -6205,13 +6268,13 @@
           <a:p>
             <a:pPr algn="l">
               <a:lnSpc>
-                <a:spcPct val="140000"/>
+                <a:spcPts val="1959"/>
               </a:lnSpc>
             </a:pPr>
             <a:r>
               <a:rPr sz="1400" i="0" b="0" spc="220">
                 <a:solidFill>
-                  <a:srgbClr val="A9724A"/>
+                  <a:srgbClr val="CC754E"/>
                 </a:solidFill>
                 <a:latin typeface="Outfit 1 Semi-Bold"/>
               </a:rPr>
@@ -6235,7 +6298,7 @@
             <a:avLst/>
           </a:prstGeom>
           <a:solidFill>
-            <a:srgbClr val="DFDDD7"/>
+            <a:srgbClr val="A5A49F"/>
           </a:solidFill>
           <a:ln>
             <a:noFill/>
@@ -6272,8 +6335,8 @@
         </p:nvSpPr>
         <p:spPr>
           <a:xfrm>
-            <a:off x="2011680" y="3982212"/>
-            <a:ext cx="4754880" cy="256032"/>
+            <a:off x="2011680" y="4018788"/>
+            <a:ext cx="4754880" cy="365760"/>
           </a:xfrm>
           <a:prstGeom prst="rect">
             <a:avLst/>
@@ -6288,13 +6351,13 @@
           <a:p>
             <a:pPr algn="l">
               <a:lnSpc>
-                <a:spcPct val="140000"/>
-              </a:lnSpc>
-            </a:pPr>
-            <a:r>
-              <a:rPr sz="1400" i="0" b="0" spc="220">
-                <a:solidFill>
-                  <a:srgbClr val="A5A49F"/>
+                <a:spcPts val="2520"/>
+              </a:lnSpc>
+            </a:pPr>
+            <a:r>
+              <a:rPr sz="1800" i="0" b="0" spc="282">
+                <a:solidFill>
+                  <a:srgbClr val="1C1C1A"/>
                 </a:solidFill>
                 <a:latin typeface="Outfit 1 Semi-Bold"/>
               </a:rPr>
@@ -6311,8 +6374,8 @@
         </p:nvSpPr>
         <p:spPr>
           <a:xfrm>
-            <a:off x="7132320" y="3909060"/>
-            <a:ext cx="9144000" cy="619963"/>
+            <a:off x="7132320" y="3945636"/>
+            <a:ext cx="9144000" cy="583387"/>
           </a:xfrm>
           <a:prstGeom prst="rect">
             <a:avLst/>
@@ -6327,11 +6390,11 @@
           <a:p>
             <a:pPr algn="l">
               <a:lnSpc>
-                <a:spcPct val="140000"/>
-              </a:lnSpc>
-            </a:pPr>
-            <a:r>
-              <a:rPr sz="2100" i="0" b="0">
+                <a:spcPts val="3500"/>
+              </a:lnSpc>
+            </a:pPr>
+            <a:r>
+              <a:rPr sz="2500" i="0" b="0">
                 <a:solidFill>
                   <a:srgbClr val="1C1C1A"/>
                 </a:solidFill>
@@ -6357,7 +6420,7 @@
             <a:avLst/>
           </a:prstGeom>
           <a:solidFill>
-            <a:srgbClr val="DFDDD7"/>
+            <a:srgbClr val="A5A49F"/>
           </a:solidFill>
           <a:ln>
             <a:noFill/>
@@ -6394,8 +6457,8 @@
         </p:nvSpPr>
         <p:spPr>
           <a:xfrm>
-            <a:off x="2011680" y="4839919"/>
-            <a:ext cx="4754880" cy="256032"/>
+            <a:off x="2011680" y="4876495"/>
+            <a:ext cx="4754880" cy="365760"/>
           </a:xfrm>
           <a:prstGeom prst="rect">
             <a:avLst/>
@@ -6410,13 +6473,13 @@
           <a:p>
             <a:pPr algn="l">
               <a:lnSpc>
-                <a:spcPct val="140000"/>
-              </a:lnSpc>
-            </a:pPr>
-            <a:r>
-              <a:rPr sz="1400" i="0" b="0" spc="220">
-                <a:solidFill>
-                  <a:srgbClr val="A5A49F"/>
+                <a:spcPts val="2520"/>
+              </a:lnSpc>
+            </a:pPr>
+            <a:r>
+              <a:rPr sz="1800" i="0" b="0" spc="282">
+                <a:solidFill>
+                  <a:srgbClr val="1C1C1A"/>
                 </a:solidFill>
                 <a:latin typeface="Outfit 1 Semi-Bold"/>
               </a:rPr>
@@ -6433,8 +6496,8 @@
         </p:nvSpPr>
         <p:spPr>
           <a:xfrm>
-            <a:off x="7132320" y="4766767"/>
-            <a:ext cx="9144000" cy="619963"/>
+            <a:off x="7132320" y="4803343"/>
+            <a:ext cx="9144000" cy="583387"/>
           </a:xfrm>
           <a:prstGeom prst="rect">
             <a:avLst/>
@@ -6449,11 +6512,11 @@
           <a:p>
             <a:pPr algn="l">
               <a:lnSpc>
-                <a:spcPct val="140000"/>
-              </a:lnSpc>
-            </a:pPr>
-            <a:r>
-              <a:rPr sz="2100" i="0" b="0">
+                <a:spcPts val="3500"/>
+              </a:lnSpc>
+            </a:pPr>
+            <a:r>
+              <a:rPr sz="2500" i="0" b="0">
                 <a:solidFill>
                   <a:srgbClr val="1C1C1A"/>
                 </a:solidFill>
@@ -6479,7 +6542,7 @@
             <a:avLst/>
           </a:prstGeom>
           <a:solidFill>
-            <a:srgbClr val="DFDDD7"/>
+            <a:srgbClr val="A5A49F"/>
           </a:solidFill>
           <a:ln>
             <a:noFill/>
@@ -6516,8 +6579,8 @@
         </p:nvSpPr>
         <p:spPr>
           <a:xfrm>
-            <a:off x="2011680" y="5697626"/>
-            <a:ext cx="4754880" cy="256032"/>
+            <a:off x="2011680" y="5734202"/>
+            <a:ext cx="4754880" cy="365760"/>
           </a:xfrm>
           <a:prstGeom prst="rect">
             <a:avLst/>
@@ -6532,13 +6595,13 @@
           <a:p>
             <a:pPr algn="l">
               <a:lnSpc>
-                <a:spcPct val="140000"/>
-              </a:lnSpc>
-            </a:pPr>
-            <a:r>
-              <a:rPr sz="1400" i="0" b="0" spc="220">
-                <a:solidFill>
-                  <a:srgbClr val="A5A49F"/>
+                <a:spcPts val="2520"/>
+              </a:lnSpc>
+            </a:pPr>
+            <a:r>
+              <a:rPr sz="1800" i="0" b="0" spc="282">
+                <a:solidFill>
+                  <a:srgbClr val="1C1C1A"/>
                 </a:solidFill>
                 <a:latin typeface="Outfit 1 Semi-Bold"/>
               </a:rPr>
@@ -6555,8 +6618,8 @@
         </p:nvSpPr>
         <p:spPr>
           <a:xfrm>
-            <a:off x="7132320" y="5624474"/>
-            <a:ext cx="9144000" cy="619963"/>
+            <a:off x="7132320" y="5661050"/>
+            <a:ext cx="9144000" cy="583387"/>
           </a:xfrm>
           <a:prstGeom prst="rect">
             <a:avLst/>
@@ -6571,11 +6634,11 @@
           <a:p>
             <a:pPr algn="l">
               <a:lnSpc>
-                <a:spcPct val="140000"/>
-              </a:lnSpc>
-            </a:pPr>
-            <a:r>
-              <a:rPr sz="2100" i="0" b="0">
+                <a:spcPts val="3500"/>
+              </a:lnSpc>
+            </a:pPr>
+            <a:r>
+              <a:rPr sz="2500" i="0" b="0">
                 <a:solidFill>
                   <a:srgbClr val="1C1C1A"/>
                 </a:solidFill>
@@ -6601,7 +6664,7 @@
             <a:avLst/>
           </a:prstGeom>
           <a:solidFill>
-            <a:srgbClr val="DFDDD7"/>
+            <a:srgbClr val="A5A49F"/>
           </a:solidFill>
           <a:ln>
             <a:noFill/>
@@ -6638,8 +6701,8 @@
         </p:nvSpPr>
         <p:spPr>
           <a:xfrm>
-            <a:off x="2011680" y="6555334"/>
-            <a:ext cx="4754880" cy="256032"/>
+            <a:off x="2011680" y="6591910"/>
+            <a:ext cx="4754880" cy="365760"/>
           </a:xfrm>
           <a:prstGeom prst="rect">
             <a:avLst/>
@@ -6654,13 +6717,13 @@
           <a:p>
             <a:pPr algn="l">
               <a:lnSpc>
-                <a:spcPct val="140000"/>
-              </a:lnSpc>
-            </a:pPr>
-            <a:r>
-              <a:rPr sz="1400" i="0" b="0" spc="220">
-                <a:solidFill>
-                  <a:srgbClr val="A5A49F"/>
+                <a:spcPts val="2520"/>
+              </a:lnSpc>
+            </a:pPr>
+            <a:r>
+              <a:rPr sz="1800" i="0" b="0" spc="282">
+                <a:solidFill>
+                  <a:srgbClr val="1C1C1A"/>
                 </a:solidFill>
                 <a:latin typeface="Outfit 1 Semi-Bold"/>
               </a:rPr>
@@ -6677,8 +6740,8 @@
         </p:nvSpPr>
         <p:spPr>
           <a:xfrm>
-            <a:off x="7132320" y="6482182"/>
-            <a:ext cx="9144000" cy="619963"/>
+            <a:off x="7132320" y="6518758"/>
+            <a:ext cx="9144000" cy="583387"/>
           </a:xfrm>
           <a:prstGeom prst="rect">
             <a:avLst/>
@@ -6693,11 +6756,11 @@
           <a:p>
             <a:pPr algn="l">
               <a:lnSpc>
-                <a:spcPct val="140000"/>
-              </a:lnSpc>
-            </a:pPr>
-            <a:r>
-              <a:rPr sz="2100" i="0" b="0">
+                <a:spcPts val="3500"/>
+              </a:lnSpc>
+            </a:pPr>
+            <a:r>
+              <a:rPr sz="2500" i="0" b="0">
                 <a:solidFill>
                   <a:srgbClr val="1C1C1A"/>
                 </a:solidFill>
@@ -6723,7 +6786,7 @@
             <a:avLst/>
           </a:prstGeom>
           <a:solidFill>
-            <a:srgbClr val="DFDDD7"/>
+            <a:srgbClr val="A5A49F"/>
           </a:solidFill>
           <a:ln>
             <a:noFill/>
@@ -6760,8 +6823,8 @@
         </p:nvSpPr>
         <p:spPr>
           <a:xfrm>
-            <a:off x="2011680" y="7413041"/>
-            <a:ext cx="4754880" cy="256032"/>
+            <a:off x="2011680" y="7449617"/>
+            <a:ext cx="4754880" cy="365760"/>
           </a:xfrm>
           <a:prstGeom prst="rect">
             <a:avLst/>
@@ -6776,13 +6839,13 @@
           <a:p>
             <a:pPr algn="l">
               <a:lnSpc>
-                <a:spcPct val="140000"/>
-              </a:lnSpc>
-            </a:pPr>
-            <a:r>
-              <a:rPr sz="1400" i="0" b="0" spc="220">
-                <a:solidFill>
-                  <a:srgbClr val="A9724A"/>
+                <a:spcPts val="2520"/>
+              </a:lnSpc>
+            </a:pPr>
+            <a:r>
+              <a:rPr sz="1800" i="0" b="0" spc="282">
+                <a:solidFill>
+                  <a:srgbClr val="CC754E"/>
                 </a:solidFill>
                 <a:latin typeface="Outfit 1 Semi-Bold"/>
               </a:rPr>
@@ -6799,8 +6862,8 @@
         </p:nvSpPr>
         <p:spPr>
           <a:xfrm>
-            <a:off x="7132320" y="7339889"/>
-            <a:ext cx="9144000" cy="619963"/>
+            <a:off x="7132320" y="7376465"/>
+            <a:ext cx="9144000" cy="583387"/>
           </a:xfrm>
           <a:prstGeom prst="rect">
             <a:avLst/>
@@ -6815,11 +6878,11 @@
           <a:p>
             <a:pPr algn="l">
               <a:lnSpc>
-                <a:spcPct val="140000"/>
-              </a:lnSpc>
-            </a:pPr>
-            <a:r>
-              <a:rPr sz="2100" i="0" b="0">
+                <a:spcPts val="3500"/>
+              </a:lnSpc>
+            </a:pPr>
+            <a:r>
+              <a:rPr sz="2500" i="0" b="0">
                 <a:solidFill>
                   <a:srgbClr val="1C1C1A"/>
                 </a:solidFill>
@@ -6845,7 +6908,7 @@
             <a:avLst/>
           </a:prstGeom>
           <a:solidFill>
-            <a:srgbClr val="A9724A"/>
+            <a:srgbClr val="CC754E"/>
           </a:solidFill>
           <a:ln>
             <a:noFill/>
@@ -6980,14 +7043,14 @@
         </p:nvSpPr>
         <p:spPr>
           <a:xfrm>
-            <a:off x="2011680" y="2800838"/>
+            <a:off x="2011680" y="3314573"/>
             <a:ext cx="1188720" cy="27432"/>
           </a:xfrm>
           <a:prstGeom prst="rect">
             <a:avLst/>
           </a:prstGeom>
           <a:solidFill>
-            <a:srgbClr val="A9724A"/>
+            <a:srgbClr val="CC754E"/>
           </a:solidFill>
           <a:ln>
             <a:noFill/>
@@ -7024,8 +7087,8 @@
         </p:nvSpPr>
         <p:spPr>
           <a:xfrm>
-            <a:off x="2011680" y="3203174"/>
-            <a:ext cx="14081760" cy="3310219"/>
+            <a:off x="2011680" y="3716909"/>
+            <a:ext cx="14081760" cy="2247900"/>
           </a:xfrm>
           <a:prstGeom prst="rect">
             <a:avLst/>
@@ -7040,13 +7103,13 @@
           <a:p>
             <a:pPr algn="l">
               <a:lnSpc>
-                <a:spcPct val="126000"/>
-              </a:lnSpc>
-            </a:pPr>
-            <a:r>
-              <a:rPr sz="5100" i="0" b="0">
-                <a:solidFill>
-                  <a:srgbClr val="1C1C1A"/>
+                <a:spcPts val="5180"/>
+              </a:lnSpc>
+            </a:pPr>
+            <a:r>
+              <a:rPr sz="3700" i="0" b="0">
+                <a:solidFill>
+                  <a:srgbClr val="323330"/>
                 </a:solidFill>
                 <a:latin typeface="Outfit 1 Light"/>
               </a:rPr>
@@ -7056,13 +7119,13 @@
           <a:p>
             <a:pPr algn="l">
               <a:lnSpc>
-                <a:spcPct val="126000"/>
-              </a:lnSpc>
-            </a:pPr>
-            <a:r>
-              <a:rPr sz="5100" i="0" b="0">
-                <a:solidFill>
-                  <a:srgbClr val="1C1C1A"/>
+                <a:spcPts val="5180"/>
+              </a:lnSpc>
+            </a:pPr>
+            <a:r>
+              <a:rPr sz="3700" i="0" b="0">
+                <a:solidFill>
+                  <a:srgbClr val="323330"/>
                 </a:solidFill>
                 <a:latin typeface="Outfit 1 Light"/>
               </a:rPr>
@@ -7072,13 +7135,13 @@
           <a:p>
             <a:pPr algn="l">
               <a:lnSpc>
-                <a:spcPct val="126000"/>
-              </a:lnSpc>
-            </a:pPr>
-            <a:r>
-              <a:rPr sz="5100" i="0" b="0">
-                <a:solidFill>
-                  <a:srgbClr val="1C1C1A"/>
+                <a:spcPts val="5180"/>
+              </a:lnSpc>
+            </a:pPr>
+            <a:r>
+              <a:rPr sz="3700" i="0" b="0">
+                <a:solidFill>
+                  <a:srgbClr val="323330"/>
                 </a:solidFill>
                 <a:latin typeface="Outfit 1 Light"/>
               </a:rPr>
@@ -7095,8 +7158,8 @@
         </p:nvSpPr>
         <p:spPr>
           <a:xfrm>
-            <a:off x="2011680" y="6428811"/>
-            <a:ext cx="11887200" cy="554431"/>
+            <a:off x="2011680" y="5933567"/>
+            <a:ext cx="11887200" cy="535940"/>
           </a:xfrm>
           <a:prstGeom prst="rect">
             <a:avLst/>
@@ -7111,11 +7174,11 @@
           <a:p>
             <a:pPr algn="l">
               <a:lnSpc>
-                <a:spcPct val="140000"/>
-              </a:lnSpc>
-            </a:pPr>
-            <a:r>
-              <a:rPr sz="2100" i="0" b="0">
+                <a:spcPts val="3500"/>
+              </a:lnSpc>
+            </a:pPr>
+            <a:r>
+              <a:rPr sz="2500" i="0" b="0">
                 <a:solidFill>
                   <a:srgbClr val="6B6B66"/>
                 </a:solidFill>
@@ -7230,8 +7293,8 @@
         </p:nvSpPr>
         <p:spPr>
           <a:xfrm>
-            <a:off x="2011680" y="3411829"/>
-            <a:ext cx="3657600" cy="274320"/>
+            <a:off x="2011680" y="3120009"/>
+            <a:ext cx="15247620" cy="292608"/>
           </a:xfrm>
           <a:prstGeom prst="rect">
             <a:avLst/>
@@ -7244,9 +7307,9 @@
           </a:bodyPr>
           <a:lstStyle/>
           <a:p>
-            <a:pPr algn="l">
-              <a:lnSpc>
-                <a:spcPct val="140000"/>
+            <a:pPr algn="r">
+              <a:lnSpc>
+                <a:spcPts val="1959"/>
               </a:lnSpc>
             </a:pPr>
             <a:r>
@@ -7269,8 +7332,8 @@
         </p:nvSpPr>
         <p:spPr>
           <a:xfrm>
-            <a:off x="2011680" y="3960469"/>
-            <a:ext cx="12801600" cy="1551940"/>
+            <a:off x="2011680" y="3595497"/>
+            <a:ext cx="15247620" cy="1873250"/>
           </a:xfrm>
           <a:prstGeom prst="rect">
             <a:avLst/>
@@ -7283,17 +7346,17 @@
           </a:bodyPr>
           <a:lstStyle/>
           <a:p>
-            <a:pPr algn="l">
-              <a:lnSpc>
-                <a:spcPct val="100000"/>
-              </a:lnSpc>
-            </a:pPr>
-            <a:r>
-              <a:rPr sz="9400" i="0" b="0">
+            <a:pPr algn="r">
+              <a:lnSpc>
+                <a:spcPts val="13310"/>
+              </a:lnSpc>
+            </a:pPr>
+            <a:r>
+              <a:rPr sz="12100" i="0" b="0">
                 <a:solidFill>
                   <a:srgbClr val="FFFFFF"/>
                 </a:solidFill>
-                <a:latin typeface="Outfit 1 Light"/>
+                <a:latin typeface="Outfit 1 Bold"/>
               </a:rPr>
               <a:t>CULTURA DE MARCA</a:t>
             </a:r>
@@ -7302,58 +7365,14 @@
       </p:sp>
       <p:sp>
         <p:nvSpPr>
-          <p:cNvPr id="6" name="Rectangle 5"/>
-          <p:cNvSpPr/>
-          <p:nvPr/>
-        </p:nvSpPr>
-        <p:spPr>
-          <a:xfrm>
-            <a:off x="2011680" y="5751677"/>
-            <a:ext cx="14264640" cy="10973"/>
-          </a:xfrm>
-          <a:prstGeom prst="rect">
-            <a:avLst/>
-          </a:prstGeom>
-          <a:solidFill>
-            <a:srgbClr val="A5A49F"/>
-          </a:solidFill>
-          <a:ln>
-            <a:noFill/>
-          </a:ln>
-          <a:effectLst/>
-        </p:spPr>
-        <p:style>
-          <a:lnRef idx="1">
-            <a:schemeClr val="accent1"/>
-          </a:lnRef>
-          <a:fillRef idx="3">
-            <a:schemeClr val="accent1"/>
-          </a:fillRef>
-          <a:effectRef idx="2">
-            <a:schemeClr val="accent1"/>
-          </a:effectRef>
-          <a:fontRef idx="minor">
-            <a:schemeClr val="lt1"/>
-          </a:fontRef>
-        </p:style>
-        <p:txBody>
-          <a:bodyPr rtlCol="0" anchor="ctr"/>
-          <a:lstStyle/>
-          <a:p>
-            <a:pPr algn="ctr"/>
-          </a:p>
-        </p:txBody>
-      </p:sp>
-      <p:sp>
-        <p:nvSpPr>
-          <p:cNvPr id="7" name="TextBox 6"/>
+          <p:cNvPr id="6" name="TextBox 5"/>
           <p:cNvSpPr txBox="1"/>
           <p:nvPr/>
         </p:nvSpPr>
         <p:spPr>
           <a:xfrm>
-            <a:off x="2011680" y="6025997"/>
-            <a:ext cx="11887200" cy="620573"/>
+            <a:off x="2011680" y="5541899"/>
+            <a:ext cx="15247620" cy="829564"/>
           </a:xfrm>
           <a:prstGeom prst="rect">
             <a:avLst/>
@@ -7366,13 +7385,13 @@
           </a:bodyPr>
           <a:lstStyle/>
           <a:p>
-            <a:pPr algn="l">
-              <a:lnSpc>
-                <a:spcPct val="140000"/>
-              </a:lnSpc>
-            </a:pPr>
-            <a:r>
-              <a:rPr sz="2400" i="0" b="0">
+            <a:pPr algn="r">
+              <a:lnSpc>
+                <a:spcPts val="5452"/>
+              </a:lnSpc>
+            </a:pPr>
+            <a:r>
+              <a:rPr sz="4700" i="0" b="0">
                 <a:solidFill>
                   <a:srgbClr val="FFFFFF"/>
                 </a:solidFill>
@@ -7385,14 +7404,14 @@
       </p:sp>
       <p:sp>
         <p:nvSpPr>
-          <p:cNvPr id="8" name="TextBox 7"/>
+          <p:cNvPr id="7" name="TextBox 6"/>
           <p:cNvSpPr txBox="1"/>
           <p:nvPr/>
         </p:nvSpPr>
         <p:spPr>
           <a:xfrm>
-            <a:off x="2011680" y="8220558"/>
-            <a:ext cx="11521440" cy="484530"/>
+            <a:off x="2011680" y="8293100"/>
+            <a:ext cx="11521440" cy="411988"/>
           </a:xfrm>
           <a:prstGeom prst="rect">
             <a:avLst/>
@@ -7537,8 +7556,8 @@
         </p:nvSpPr>
         <p:spPr>
           <a:xfrm>
-            <a:off x="2011680" y="3410438"/>
-            <a:ext cx="14264640" cy="882396"/>
+            <a:off x="2011680" y="3549015"/>
+            <a:ext cx="14264640" cy="1005078"/>
           </a:xfrm>
           <a:prstGeom prst="rect">
             <a:avLst/>
@@ -7553,7 +7572,7 @@
           <a:p>
             <a:pPr algn="l">
               <a:lnSpc>
-                <a:spcPct val="114000"/>
+                <a:spcPts val="5754"/>
               </a:lnSpc>
             </a:pPr>
             <a:r>
@@ -7563,7 +7582,25 @@
                 </a:solidFill>
                 <a:latin typeface="Outfit 1 Light"/>
               </a:rPr>
-              <a:t>O QUE É CULTURA DE MARCA?</a:t>
+              <a:t>O QUE É </a:t>
+            </a:r>
+            <a:r>
+              <a:rPr sz="4200" i="0" b="0">
+                <a:solidFill>
+                  <a:srgbClr val="1C1C1A"/>
+                </a:solidFill>
+                <a:latin typeface="Outfit 1 Bold"/>
+              </a:rPr>
+              <a:t>CULTURA DE MARCA</a:t>
+            </a:r>
+            <a:r>
+              <a:rPr sz="4200" i="0" b="0">
+                <a:solidFill>
+                  <a:srgbClr val="1C1C1A"/>
+                </a:solidFill>
+                <a:latin typeface="Outfit 1 Light"/>
+              </a:rPr>
+              <a:t>?</a:t>
             </a:r>
           </a:p>
         </p:txBody>
@@ -7576,14 +7613,14 @@
         </p:nvSpPr>
         <p:spPr>
           <a:xfrm>
-            <a:off x="2011680" y="4347332"/>
+            <a:off x="2011680" y="4462653"/>
             <a:ext cx="14264640" cy="10973"/>
           </a:xfrm>
           <a:prstGeom prst="rect">
             <a:avLst/>
           </a:prstGeom>
           <a:solidFill>
-            <a:srgbClr val="DFDDD7"/>
+            <a:srgbClr val="A5A49F"/>
           </a:solidFill>
           <a:ln>
             <a:noFill/>
@@ -7620,8 +7657,8 @@
         </p:nvSpPr>
         <p:spPr>
           <a:xfrm>
-            <a:off x="2011680" y="4694804"/>
-            <a:ext cx="12252960" cy="1678838"/>
+            <a:off x="2011680" y="4810125"/>
+            <a:ext cx="12252960" cy="1424940"/>
           </a:xfrm>
           <a:prstGeom prst="rect">
             <a:avLst/>
@@ -7636,11 +7673,11 @@
           <a:p>
             <a:pPr algn="l">
               <a:lnSpc>
-                <a:spcPct val="140000"/>
-              </a:lnSpc>
-            </a:pPr>
-            <a:r>
-              <a:rPr sz="2400" i="0" b="0">
+                <a:spcPts val="3500"/>
+              </a:lnSpc>
+            </a:pPr>
+            <a:r>
+              <a:rPr sz="2500" i="0" b="0">
                 <a:solidFill>
                   <a:srgbClr val="6B6B66"/>
                 </a:solidFill>
@@ -7751,7 +7788,7 @@
           <a:p>
             <a:pPr algn="l">
               <a:lnSpc>
-                <a:spcPct val="114000"/>
+                <a:spcPts val="8549"/>
               </a:lnSpc>
             </a:pPr>
             <a:r>
@@ -7767,7 +7804,7 @@
           <a:p>
             <a:pPr algn="l">
               <a:lnSpc>
-                <a:spcPct val="114000"/>
+                <a:spcPts val="8549"/>
               </a:lnSpc>
             </a:pPr>
             <a:r>
@@ -8127,7 +8164,7 @@
           <a:p>
             <a:pPr algn="ctr">
               <a:lnSpc>
-                <a:spcPct val="140000"/>
+                <a:spcPts val="2729"/>
               </a:lnSpc>
             </a:pPr>
             <a:r>
@@ -8248,8 +8285,8 @@
         </p:nvSpPr>
         <p:spPr>
           <a:xfrm>
-            <a:off x="2011680" y="3113562"/>
-            <a:ext cx="14264640" cy="882396"/>
+            <a:off x="2011680" y="2939923"/>
+            <a:ext cx="14264640" cy="1005078"/>
           </a:xfrm>
           <a:prstGeom prst="rect">
             <a:avLst/>
@@ -8264,7 +8301,7 @@
           <a:p>
             <a:pPr algn="l">
               <a:lnSpc>
-                <a:spcPct val="114000"/>
+                <a:spcPts val="5754"/>
               </a:lnSpc>
             </a:pPr>
             <a:r>
@@ -8287,14 +8324,14 @@
         </p:nvSpPr>
         <p:spPr>
           <a:xfrm>
-            <a:off x="2011680" y="4050456"/>
+            <a:off x="2011680" y="3853561"/>
             <a:ext cx="14264640" cy="10973"/>
           </a:xfrm>
           <a:prstGeom prst="rect">
             <a:avLst/>
           </a:prstGeom>
           <a:solidFill>
-            <a:srgbClr val="DFDDD7"/>
+            <a:srgbClr val="A5A49F"/>
           </a:solidFill>
           <a:ln>
             <a:noFill/>
@@ -8331,8 +8368,8 @@
         </p:nvSpPr>
         <p:spPr>
           <a:xfrm>
-            <a:off x="2011680" y="4397928"/>
-            <a:ext cx="12252960" cy="1017422"/>
+            <a:off x="2011680" y="4201033"/>
+            <a:ext cx="12252960" cy="1424940"/>
           </a:xfrm>
           <a:prstGeom prst="rect">
             <a:avLst/>
@@ -8347,11 +8384,11 @@
           <a:p>
             <a:pPr algn="l">
               <a:lnSpc>
-                <a:spcPct val="140000"/>
-              </a:lnSpc>
-            </a:pPr>
-            <a:r>
-              <a:rPr sz="2100" i="0" b="0">
+                <a:spcPts val="3500"/>
+              </a:lnSpc>
+            </a:pPr>
+            <a:r>
+              <a:rPr sz="2500" i="0" b="0">
                 <a:solidFill>
                   <a:srgbClr val="6B6B66"/>
                 </a:solidFill>
@@ -8370,8 +8407,8 @@
         </p:nvSpPr>
         <p:spPr>
           <a:xfrm>
-            <a:off x="2011680" y="5653095"/>
-            <a:ext cx="12252960" cy="1017422"/>
+            <a:off x="2011680" y="5863717"/>
+            <a:ext cx="12252960" cy="980440"/>
           </a:xfrm>
           <a:prstGeom prst="rect">
             <a:avLst/>
@@ -8386,11 +8423,11 @@
           <a:p>
             <a:pPr algn="l">
               <a:lnSpc>
-                <a:spcPct val="140000"/>
-              </a:lnSpc>
-            </a:pPr>
-            <a:r>
-              <a:rPr sz="2100" i="0" b="0">
+                <a:spcPts val="3500"/>
+              </a:lnSpc>
+            </a:pPr>
+            <a:r>
+              <a:rPr sz="2500" i="0" b="0">
                 <a:solidFill>
                   <a:srgbClr val="6B6B66"/>
                 </a:solidFill>
@@ -8507,8 +8544,8 @@
         </p:nvSpPr>
         <p:spPr>
           <a:xfrm>
-            <a:off x="2011680" y="3222173"/>
-            <a:ext cx="14264640" cy="882396"/>
+            <a:off x="2011680" y="3137281"/>
+            <a:ext cx="14264640" cy="1005078"/>
           </a:xfrm>
           <a:prstGeom prst="rect">
             <a:avLst/>
@@ -8523,7 +8560,7 @@
           <a:p>
             <a:pPr algn="l">
               <a:lnSpc>
-                <a:spcPct val="114000"/>
+                <a:spcPts val="5754"/>
               </a:lnSpc>
             </a:pPr>
             <a:r>
@@ -8546,14 +8583,14 @@
         </p:nvSpPr>
         <p:spPr>
           <a:xfrm>
-            <a:off x="2011680" y="4159067"/>
+            <a:off x="2011680" y="4050919"/>
             <a:ext cx="14264640" cy="10973"/>
           </a:xfrm>
           <a:prstGeom prst="rect">
             <a:avLst/>
           </a:prstGeom>
           <a:solidFill>
-            <a:srgbClr val="DFDDD7"/>
+            <a:srgbClr val="A5A49F"/>
           </a:solidFill>
           <a:ln>
             <a:noFill/>
@@ -8590,14 +8627,14 @@
         </p:nvSpPr>
         <p:spPr>
           <a:xfrm>
-            <a:off x="2011680" y="4860361"/>
+            <a:off x="2011680" y="4800473"/>
             <a:ext cx="6880860" cy="10973"/>
           </a:xfrm>
           <a:prstGeom prst="rect">
             <a:avLst/>
           </a:prstGeom>
           <a:solidFill>
-            <a:srgbClr val="DFDDD7"/>
+            <a:srgbClr val="A5A49F"/>
           </a:solidFill>
           <a:ln>
             <a:noFill/>
@@ -8634,8 +8671,8 @@
         </p:nvSpPr>
         <p:spPr>
           <a:xfrm>
-            <a:off x="2011680" y="4506539"/>
-            <a:ext cx="6880860" cy="390398"/>
+            <a:off x="2011680" y="4398391"/>
+            <a:ext cx="6880860" cy="438658"/>
           </a:xfrm>
           <a:prstGeom prst="rect">
             <a:avLst/>
@@ -8650,11 +8687,11 @@
           <a:p>
             <a:pPr algn="l">
               <a:lnSpc>
-                <a:spcPct val="140000"/>
-              </a:lnSpc>
-            </a:pPr>
-            <a:r>
-              <a:rPr sz="2300" i="0" b="0">
+                <a:spcPts val="3500"/>
+              </a:lnSpc>
+            </a:pPr>
+            <a:r>
+              <a:rPr sz="2500" i="0" b="0">
                 <a:solidFill>
                   <a:srgbClr val="1C1C1A"/>
                 </a:solidFill>
@@ -8673,14 +8710,14 @@
         </p:nvSpPr>
         <p:spPr>
           <a:xfrm>
-            <a:off x="2011680" y="5415351"/>
+            <a:off x="2011680" y="5403723"/>
             <a:ext cx="6880860" cy="10973"/>
           </a:xfrm>
           <a:prstGeom prst="rect">
             <a:avLst/>
           </a:prstGeom>
           <a:solidFill>
-            <a:srgbClr val="DFDDD7"/>
+            <a:srgbClr val="A5A49F"/>
           </a:solidFill>
           <a:ln>
             <a:noFill/>
@@ -8717,8 +8754,8 @@
         </p:nvSpPr>
         <p:spPr>
           <a:xfrm>
-            <a:off x="2011680" y="5061529"/>
-            <a:ext cx="6880860" cy="390398"/>
+            <a:off x="2011680" y="5001641"/>
+            <a:ext cx="6880860" cy="438658"/>
           </a:xfrm>
           <a:prstGeom prst="rect">
             <a:avLst/>
@@ -8733,11 +8770,11 @@
           <a:p>
             <a:pPr algn="l">
               <a:lnSpc>
-                <a:spcPct val="140000"/>
-              </a:lnSpc>
-            </a:pPr>
-            <a:r>
-              <a:rPr sz="2300" i="0" b="0">
+                <a:spcPts val="3500"/>
+              </a:lnSpc>
+            </a:pPr>
+            <a:r>
+              <a:rPr sz="2500" i="0" b="0">
                 <a:solidFill>
                   <a:srgbClr val="1C1C1A"/>
                 </a:solidFill>
@@ -8756,14 +8793,14 @@
         </p:nvSpPr>
         <p:spPr>
           <a:xfrm>
-            <a:off x="2011680" y="5970341"/>
+            <a:off x="2011680" y="6006973"/>
             <a:ext cx="6880860" cy="10973"/>
           </a:xfrm>
           <a:prstGeom prst="rect">
             <a:avLst/>
           </a:prstGeom>
           <a:solidFill>
-            <a:srgbClr val="DFDDD7"/>
+            <a:srgbClr val="A5A49F"/>
           </a:solidFill>
           <a:ln>
             <a:noFill/>
@@ -8800,8 +8837,8 @@
         </p:nvSpPr>
         <p:spPr>
           <a:xfrm>
-            <a:off x="2011680" y="5616519"/>
-            <a:ext cx="6880860" cy="390398"/>
+            <a:off x="2011680" y="5604891"/>
+            <a:ext cx="6880860" cy="438658"/>
           </a:xfrm>
           <a:prstGeom prst="rect">
             <a:avLst/>
@@ -8816,11 +8853,11 @@
           <a:p>
             <a:pPr algn="l">
               <a:lnSpc>
-                <a:spcPct val="140000"/>
-              </a:lnSpc>
-            </a:pPr>
-            <a:r>
-              <a:rPr sz="2300" i="0" b="0">
+                <a:spcPts val="3500"/>
+              </a:lnSpc>
+            </a:pPr>
+            <a:r>
+              <a:rPr sz="2500" i="0" b="0">
                 <a:solidFill>
                   <a:srgbClr val="1C1C1A"/>
                 </a:solidFill>
@@ -8839,14 +8876,14 @@
         </p:nvSpPr>
         <p:spPr>
           <a:xfrm>
-            <a:off x="2011680" y="6525331"/>
+            <a:off x="2011680" y="6610223"/>
             <a:ext cx="6880860" cy="10973"/>
           </a:xfrm>
           <a:prstGeom prst="rect">
             <a:avLst/>
           </a:prstGeom>
           <a:solidFill>
-            <a:srgbClr val="DFDDD7"/>
+            <a:srgbClr val="A5A49F"/>
           </a:solidFill>
           <a:ln>
             <a:noFill/>
@@ -8883,8 +8920,8 @@
         </p:nvSpPr>
         <p:spPr>
           <a:xfrm>
-            <a:off x="2011680" y="6171509"/>
-            <a:ext cx="6880860" cy="390398"/>
+            <a:off x="2011680" y="6208141"/>
+            <a:ext cx="6880860" cy="438658"/>
           </a:xfrm>
           <a:prstGeom prst="rect">
             <a:avLst/>
@@ -8899,11 +8936,11 @@
           <a:p>
             <a:pPr algn="l">
               <a:lnSpc>
-                <a:spcPct val="140000"/>
-              </a:lnSpc>
-            </a:pPr>
-            <a:r>
-              <a:rPr sz="2300" i="0" b="0">
+                <a:spcPts val="3500"/>
+              </a:lnSpc>
+            </a:pPr>
+            <a:r>
+              <a:rPr sz="2500" i="0" b="0">
                 <a:solidFill>
                   <a:srgbClr val="1C1C1A"/>
                 </a:solidFill>
@@ -8922,14 +8959,14 @@
         </p:nvSpPr>
         <p:spPr>
           <a:xfrm>
-            <a:off x="9395460" y="4860361"/>
+            <a:off x="9395460" y="4800473"/>
             <a:ext cx="6880860" cy="10973"/>
           </a:xfrm>
           <a:prstGeom prst="rect">
             <a:avLst/>
           </a:prstGeom>
           <a:solidFill>
-            <a:srgbClr val="DFDDD7"/>
+            <a:srgbClr val="A5A49F"/>
           </a:solidFill>
           <a:ln>
             <a:noFill/>
@@ -8966,8 +9003,8 @@
         </p:nvSpPr>
         <p:spPr>
           <a:xfrm>
-            <a:off x="9395460" y="4506539"/>
-            <a:ext cx="6880860" cy="390398"/>
+            <a:off x="9395460" y="4398391"/>
+            <a:ext cx="6880860" cy="438658"/>
           </a:xfrm>
           <a:prstGeom prst="rect">
             <a:avLst/>
@@ -8982,11 +9019,11 @@
           <a:p>
             <a:pPr algn="l">
               <a:lnSpc>
-                <a:spcPct val="140000"/>
-              </a:lnSpc>
-            </a:pPr>
-            <a:r>
-              <a:rPr sz="2300" i="0" b="0">
+                <a:spcPts val="3500"/>
+              </a:lnSpc>
+            </a:pPr>
+            <a:r>
+              <a:rPr sz="2500" i="0" b="0">
                 <a:solidFill>
                   <a:srgbClr val="1C1C1A"/>
                 </a:solidFill>
@@ -9005,14 +9042,14 @@
         </p:nvSpPr>
         <p:spPr>
           <a:xfrm>
-            <a:off x="9395460" y="5415351"/>
+            <a:off x="9395460" y="5403723"/>
             <a:ext cx="6880860" cy="10973"/>
           </a:xfrm>
           <a:prstGeom prst="rect">
             <a:avLst/>
           </a:prstGeom>
           <a:solidFill>
-            <a:srgbClr val="DFDDD7"/>
+            <a:srgbClr val="A5A49F"/>
           </a:solidFill>
           <a:ln>
             <a:noFill/>
@@ -9049,8 +9086,8 @@
         </p:nvSpPr>
         <p:spPr>
           <a:xfrm>
-            <a:off x="9395460" y="5061529"/>
-            <a:ext cx="6880860" cy="390398"/>
+            <a:off x="9395460" y="5001641"/>
+            <a:ext cx="6880860" cy="438658"/>
           </a:xfrm>
           <a:prstGeom prst="rect">
             <a:avLst/>
@@ -9065,11 +9102,11 @@
           <a:p>
             <a:pPr algn="l">
               <a:lnSpc>
-                <a:spcPct val="140000"/>
-              </a:lnSpc>
-            </a:pPr>
-            <a:r>
-              <a:rPr sz="2300" i="0" b="0">
+                <a:spcPts val="3500"/>
+              </a:lnSpc>
+            </a:pPr>
+            <a:r>
+              <a:rPr sz="2500" i="0" b="0">
                 <a:solidFill>
                   <a:srgbClr val="1C1C1A"/>
                 </a:solidFill>
@@ -9088,14 +9125,14 @@
         </p:nvSpPr>
         <p:spPr>
           <a:xfrm>
-            <a:off x="9395460" y="5970341"/>
+            <a:off x="9395460" y="6006973"/>
             <a:ext cx="6880860" cy="10973"/>
           </a:xfrm>
           <a:prstGeom prst="rect">
             <a:avLst/>
           </a:prstGeom>
           <a:solidFill>
-            <a:srgbClr val="DFDDD7"/>
+            <a:srgbClr val="A5A49F"/>
           </a:solidFill>
           <a:ln>
             <a:noFill/>
@@ -9132,8 +9169,8 @@
         </p:nvSpPr>
         <p:spPr>
           <a:xfrm>
-            <a:off x="9395460" y="5616519"/>
-            <a:ext cx="6880860" cy="390398"/>
+            <a:off x="9395460" y="5604891"/>
+            <a:ext cx="6880860" cy="438658"/>
           </a:xfrm>
           <a:prstGeom prst="rect">
             <a:avLst/>
@@ -9148,11 +9185,11 @@
           <a:p>
             <a:pPr algn="l">
               <a:lnSpc>
-                <a:spcPct val="140000"/>
-              </a:lnSpc>
-            </a:pPr>
-            <a:r>
-              <a:rPr sz="2300" i="0" b="0">
+                <a:spcPts val="3500"/>
+              </a:lnSpc>
+            </a:pPr>
+            <a:r>
+              <a:rPr sz="2500" i="0" b="0">
                 <a:solidFill>
                   <a:srgbClr val="1C1C1A"/>
                 </a:solidFill>
@@ -9267,8 +9304,8 @@
         </p:nvSpPr>
         <p:spPr>
           <a:xfrm>
-            <a:off x="2011680" y="3411829"/>
-            <a:ext cx="3657600" cy="274320"/>
+            <a:off x="2011680" y="2948114"/>
+            <a:ext cx="15247620" cy="292608"/>
           </a:xfrm>
           <a:prstGeom prst="rect">
             <a:avLst/>
@@ -9281,9 +9318,9 @@
           </a:bodyPr>
           <a:lstStyle/>
           <a:p>
-            <a:pPr algn="l">
-              <a:lnSpc>
-                <a:spcPct val="140000"/>
+            <a:pPr algn="r">
+              <a:lnSpc>
+                <a:spcPts val="1959"/>
               </a:lnSpc>
             </a:pPr>
             <a:r>
@@ -9306,8 +9343,8 @@
         </p:nvSpPr>
         <p:spPr>
           <a:xfrm>
-            <a:off x="2011680" y="3960469"/>
-            <a:ext cx="12801600" cy="1551940"/>
+            <a:off x="2011680" y="3423602"/>
+            <a:ext cx="15247620" cy="2187575"/>
           </a:xfrm>
           <a:prstGeom prst="rect">
             <a:avLst/>
@@ -9320,17 +9357,17 @@
           </a:bodyPr>
           <a:lstStyle/>
           <a:p>
-            <a:pPr algn="l">
-              <a:lnSpc>
-                <a:spcPct val="100000"/>
-              </a:lnSpc>
-            </a:pPr>
-            <a:r>
-              <a:rPr sz="9400" i="0" b="0">
+            <a:pPr algn="r">
+              <a:lnSpc>
+                <a:spcPts val="15785"/>
+              </a:lnSpc>
+            </a:pPr>
+            <a:r>
+              <a:rPr sz="14350" i="0" b="0">
                 <a:solidFill>
                   <a:srgbClr val="FFFFFF"/>
                 </a:solidFill>
-                <a:latin typeface="Outfit 1 Light"/>
+                <a:latin typeface="Outfit 1 Bold"/>
               </a:rPr>
               <a:t>FORMA</a:t>
             </a:r>
@@ -9339,58 +9376,14 @@
       </p:sp>
       <p:sp>
         <p:nvSpPr>
-          <p:cNvPr id="6" name="Rectangle 5"/>
-          <p:cNvSpPr/>
-          <p:nvPr/>
-        </p:nvSpPr>
-        <p:spPr>
-          <a:xfrm>
-            <a:off x="2011680" y="5751677"/>
-            <a:ext cx="14264640" cy="10973"/>
-          </a:xfrm>
-          <a:prstGeom prst="rect">
-            <a:avLst/>
-          </a:prstGeom>
-          <a:solidFill>
-            <a:srgbClr val="A5A49F"/>
-          </a:solidFill>
-          <a:ln>
-            <a:noFill/>
-          </a:ln>
-          <a:effectLst/>
-        </p:spPr>
-        <p:style>
-          <a:lnRef idx="1">
-            <a:schemeClr val="accent1"/>
-          </a:lnRef>
-          <a:fillRef idx="3">
-            <a:schemeClr val="accent1"/>
-          </a:fillRef>
-          <a:effectRef idx="2">
-            <a:schemeClr val="accent1"/>
-          </a:effectRef>
-          <a:fontRef idx="minor">
-            <a:schemeClr val="lt1"/>
-          </a:fontRef>
-        </p:style>
-        <p:txBody>
-          <a:bodyPr rtlCol="0" anchor="ctr"/>
-          <a:lstStyle/>
-          <a:p>
-            <a:pPr algn="ctr"/>
-          </a:p>
-        </p:txBody>
-      </p:sp>
-      <p:sp>
-        <p:nvSpPr>
-          <p:cNvPr id="7" name="TextBox 6"/>
+          <p:cNvPr id="6" name="TextBox 5"/>
           <p:cNvSpPr txBox="1"/>
           <p:nvPr/>
         </p:nvSpPr>
         <p:spPr>
           <a:xfrm>
-            <a:off x="2011680" y="6025997"/>
-            <a:ext cx="11887200" cy="620573"/>
+            <a:off x="2011680" y="5684330"/>
+            <a:ext cx="15247620" cy="859028"/>
           </a:xfrm>
           <a:prstGeom prst="rect">
             <a:avLst/>
@@ -9403,13 +9396,13 @@
           </a:bodyPr>
           <a:lstStyle/>
           <a:p>
-            <a:pPr algn="l">
-              <a:lnSpc>
-                <a:spcPct val="140000"/>
-              </a:lnSpc>
-            </a:pPr>
-            <a:r>
-              <a:rPr sz="2400" i="0" b="0">
+            <a:pPr algn="r">
+              <a:lnSpc>
+                <a:spcPts val="5684"/>
+              </a:lnSpc>
+            </a:pPr>
+            <a:r>
+              <a:rPr sz="4900" i="0" b="0">
                 <a:solidFill>
                   <a:srgbClr val="FFFFFF"/>
                 </a:solidFill>
@@ -9422,14 +9415,14 @@
       </p:sp>
       <p:sp>
         <p:nvSpPr>
-          <p:cNvPr id="8" name="TextBox 7"/>
+          <p:cNvPr id="7" name="TextBox 6"/>
           <p:cNvSpPr txBox="1"/>
           <p:nvPr/>
         </p:nvSpPr>
         <p:spPr>
           <a:xfrm>
-            <a:off x="2011680" y="8220558"/>
-            <a:ext cx="11521440" cy="484530"/>
+            <a:off x="2011680" y="8293100"/>
+            <a:ext cx="11521440" cy="411988"/>
           </a:xfrm>
           <a:prstGeom prst="rect">
             <a:avLst/>
@@ -9616,14 +9609,14 @@
         </p:nvSpPr>
         <p:spPr>
           <a:xfrm>
-            <a:off x="11932920" y="4010101"/>
+            <a:off x="11932920" y="4037838"/>
             <a:ext cx="1188720" cy="27432"/>
           </a:xfrm>
           <a:prstGeom prst="rect">
             <a:avLst/>
           </a:prstGeom>
           <a:solidFill>
-            <a:srgbClr val="A9724A"/>
+            <a:srgbClr val="CC754E"/>
           </a:solidFill>
           <a:ln>
             <a:noFill/>
@@ -9660,7 +9653,7 @@
         </p:nvSpPr>
         <p:spPr>
           <a:xfrm>
-            <a:off x="11932920" y="4320997"/>
+            <a:off x="11932920" y="4348734"/>
             <a:ext cx="5760720" cy="292608"/>
           </a:xfrm>
           <a:prstGeom prst="rect">
@@ -9676,13 +9669,13 @@
           <a:p>
             <a:pPr algn="l">
               <a:lnSpc>
-                <a:spcPct val="140000"/>
+                <a:spcPts val="1959"/>
               </a:lnSpc>
             </a:pPr>
             <a:r>
               <a:rPr sz="1400" i="0" b="0" spc="300">
                 <a:solidFill>
-                  <a:srgbClr val="A9724A"/>
+                  <a:srgbClr val="CC754E"/>
                 </a:solidFill>
                 <a:latin typeface="Outfit 1 Semi-Bold"/>
               </a:rPr>
@@ -9699,8 +9692,8 @@
         </p:nvSpPr>
         <p:spPr>
           <a:xfrm>
-            <a:off x="11932920" y="4887925"/>
-            <a:ext cx="5760720" cy="1480414"/>
+            <a:off x="11932920" y="4915662"/>
+            <a:ext cx="5760720" cy="1424940"/>
           </a:xfrm>
           <a:prstGeom prst="rect">
             <a:avLst/>
@@ -9715,11 +9708,11 @@
           <a:p>
             <a:pPr algn="l">
               <a:lnSpc>
-                <a:spcPct val="140000"/>
-              </a:lnSpc>
-            </a:pPr>
-            <a:r>
-              <a:rPr sz="2100" i="0" b="0">
+                <a:spcPts val="3500"/>
+              </a:lnSpc>
+            </a:pPr>
+            <a:r>
+              <a:rPr sz="2500" i="0" b="0">
                 <a:solidFill>
                   <a:srgbClr val="6B6B66"/>
                 </a:solidFill>
@@ -9738,8 +9731,8 @@
         </p:nvSpPr>
         <p:spPr>
           <a:xfrm>
-            <a:off x="2011680" y="3170591"/>
-            <a:ext cx="8458200" cy="882396"/>
+            <a:off x="2011680" y="3320796"/>
+            <a:ext cx="8458200" cy="1005078"/>
           </a:xfrm>
           <a:prstGeom prst="rect">
             <a:avLst/>
@@ -9754,7 +9747,7 @@
           <a:p>
             <a:pPr algn="l">
               <a:lnSpc>
-                <a:spcPct val="114000"/>
+                <a:spcPts val="5754"/>
               </a:lnSpc>
             </a:pPr>
             <a:r>
@@ -9764,7 +9757,25 @@
                 </a:solidFill>
                 <a:latin typeface="Outfit 1 Light"/>
               </a:rPr>
-              <a:t>A LIBERDADE DE CRIAR EXIGE A CAPACIDADE DE REALIZAR.</a:t>
+              <a:t>A LIBERDADE DE CRIAR EXIGE A </a:t>
+            </a:r>
+            <a:r>
+              <a:rPr sz="4200" i="0" b="0">
+                <a:solidFill>
+                  <a:srgbClr val="1C1C1A"/>
+                </a:solidFill>
+                <a:latin typeface="Outfit 1 Bold"/>
+              </a:rPr>
+              <a:t>CAPACIDADE DE REALIZAR</a:t>
+            </a:r>
+            <a:r>
+              <a:rPr sz="4200" i="0" b="0">
+                <a:solidFill>
+                  <a:srgbClr val="1C1C1A"/>
+                </a:solidFill>
+                <a:latin typeface="Outfit 1 Light"/>
+              </a:rPr>
+              <a:t>.</a:t>
             </a:r>
           </a:p>
         </p:txBody>
@@ -9777,14 +9788,14 @@
         </p:nvSpPr>
         <p:spPr>
           <a:xfrm>
-            <a:off x="2011680" y="4861499"/>
+            <a:off x="2011680" y="4965192"/>
             <a:ext cx="8458200" cy="10973"/>
           </a:xfrm>
           <a:prstGeom prst="rect">
             <a:avLst/>
           </a:prstGeom>
           <a:solidFill>
-            <a:srgbClr val="DFDDD7"/>
+            <a:srgbClr val="A5A49F"/>
           </a:solidFill>
           <a:ln>
             <a:noFill/>
@@ -9821,8 +9832,8 @@
         </p:nvSpPr>
         <p:spPr>
           <a:xfrm>
-            <a:off x="2011680" y="5208971"/>
-            <a:ext cx="8458200" cy="1678838"/>
+            <a:off x="2011680" y="5312664"/>
+            <a:ext cx="8458200" cy="1424940"/>
           </a:xfrm>
           <a:prstGeom prst="rect">
             <a:avLst/>
@@ -9837,11 +9848,11 @@
           <a:p>
             <a:pPr algn="l">
               <a:lnSpc>
-                <a:spcPct val="140000"/>
-              </a:lnSpc>
-            </a:pPr>
-            <a:r>
-              <a:rPr sz="2400" i="0" b="0">
+                <a:spcPts val="3500"/>
+              </a:lnSpc>
+            </a:pPr>
+            <a:r>
+              <a:rPr sz="2500" i="0" b="0">
                 <a:solidFill>
                   <a:srgbClr val="6B6B66"/>
                 </a:solidFill>
@@ -9958,14 +9969,14 @@
         </p:nvSpPr>
         <p:spPr>
           <a:xfrm>
-            <a:off x="2011680" y="2894259"/>
+            <a:off x="2011680" y="3643503"/>
             <a:ext cx="1188720" cy="27432"/>
           </a:xfrm>
           <a:prstGeom prst="rect">
             <a:avLst/>
           </a:prstGeom>
           <a:solidFill>
-            <a:srgbClr val="A9724A"/>
+            <a:srgbClr val="CC754E"/>
           </a:solidFill>
           <a:ln>
             <a:noFill/>
@@ -10002,8 +10013,8 @@
         </p:nvSpPr>
         <p:spPr>
           <a:xfrm>
-            <a:off x="2011680" y="3296595"/>
-            <a:ext cx="14081760" cy="3211007"/>
+            <a:off x="2011680" y="4045839"/>
+            <a:ext cx="14081760" cy="1590040"/>
           </a:xfrm>
           <a:prstGeom prst="rect">
             <a:avLst/>
@@ -10018,13 +10029,13 @@
           <a:p>
             <a:pPr algn="l">
               <a:lnSpc>
-                <a:spcPct val="126000"/>
-              </a:lnSpc>
-            </a:pPr>
-            <a:r>
-              <a:rPr sz="7400" i="0" b="0">
-                <a:solidFill>
-                  <a:srgbClr val="1C1C1A"/>
+                <a:spcPts val="5180"/>
+              </a:lnSpc>
+            </a:pPr>
+            <a:r>
+              <a:rPr sz="3700" i="0" b="0">
+                <a:solidFill>
+                  <a:srgbClr val="323330"/>
                 </a:solidFill>
                 <a:latin typeface="Outfit 1 Light"/>
               </a:rPr>
@@ -10034,13 +10045,13 @@
           <a:p>
             <a:pPr algn="l">
               <a:lnSpc>
-                <a:spcPct val="126000"/>
-              </a:lnSpc>
-            </a:pPr>
-            <a:r>
-              <a:rPr sz="7400" i="0" b="0">
-                <a:solidFill>
-                  <a:srgbClr val="1C1C1A"/>
+                <a:spcPts val="5180"/>
+              </a:lnSpc>
+            </a:pPr>
+            <a:r>
+              <a:rPr sz="3700" i="0" b="0">
+                <a:solidFill>
+                  <a:srgbClr val="323330"/>
                 </a:solidFill>
                 <a:latin typeface="Outfit 1 Light"/>
               </a:rPr>
@@ -10057,8 +10068,8 @@
         </p:nvSpPr>
         <p:spPr>
           <a:xfrm>
-            <a:off x="2011680" y="6335390"/>
-            <a:ext cx="11887200" cy="554431"/>
+            <a:off x="2011680" y="5604637"/>
+            <a:ext cx="11887200" cy="535940"/>
           </a:xfrm>
           <a:prstGeom prst="rect">
             <a:avLst/>
@@ -10073,11 +10084,11 @@
           <a:p>
             <a:pPr algn="l">
               <a:lnSpc>
-                <a:spcPct val="140000"/>
-              </a:lnSpc>
-            </a:pPr>
-            <a:r>
-              <a:rPr sz="2100" i="0" b="0">
+                <a:spcPts val="3500"/>
+              </a:lnSpc>
+            </a:pPr>
+            <a:r>
+              <a:rPr sz="2500" i="0" b="0">
                 <a:solidFill>
                   <a:srgbClr val="6B6B66"/>
                 </a:solidFill>
@@ -10194,8 +10205,8 @@
         </p:nvSpPr>
         <p:spPr>
           <a:xfrm>
-            <a:off x="2011680" y="2784836"/>
-            <a:ext cx="14264640" cy="882396"/>
+            <a:off x="2011680" y="2491867"/>
+            <a:ext cx="14264640" cy="1005078"/>
           </a:xfrm>
           <a:prstGeom prst="rect">
             <a:avLst/>
@@ -10210,7 +10221,7 @@
           <a:p>
             <a:pPr algn="l">
               <a:lnSpc>
-                <a:spcPct val="114000"/>
+                <a:spcPts val="5754"/>
               </a:lnSpc>
             </a:pPr>
             <a:r>
@@ -10220,7 +10231,16 @@
                 </a:solidFill>
                 <a:latin typeface="Outfit 1 Light"/>
               </a:rPr>
-              <a:t>OS VALORES E A PERSONALIDADE DA FORMA</a:t>
+              <a:t>OS VALORES E A PERSONALIDADE DA </a:t>
+            </a:r>
+            <a:r>
+              <a:rPr sz="4200" i="0" b="0">
+                <a:solidFill>
+                  <a:srgbClr val="1C1C1A"/>
+                </a:solidFill>
+                <a:latin typeface="Outfit 1 Bold"/>
+              </a:rPr>
+              <a:t>FORMA</a:t>
             </a:r>
           </a:p>
         </p:txBody>
@@ -10233,14 +10253,14 @@
         </p:nvSpPr>
         <p:spPr>
           <a:xfrm>
-            <a:off x="2011680" y="3721730"/>
+            <a:off x="2011680" y="3405505"/>
             <a:ext cx="14264640" cy="10973"/>
           </a:xfrm>
           <a:prstGeom prst="rect">
             <a:avLst/>
           </a:prstGeom>
           <a:solidFill>
-            <a:srgbClr val="DFDDD7"/>
+            <a:srgbClr val="A5A49F"/>
           </a:solidFill>
           <a:ln>
             <a:noFill/>
@@ -10277,14 +10297,14 @@
         </p:nvSpPr>
         <p:spPr>
           <a:xfrm>
-            <a:off x="2011680" y="4069202"/>
-            <a:ext cx="6880860" cy="10973"/>
+            <a:off x="2011680" y="3752977"/>
+            <a:ext cx="6880860" cy="56693"/>
           </a:xfrm>
           <a:prstGeom prst="rect">
             <a:avLst/>
           </a:prstGeom>
           <a:solidFill>
-            <a:srgbClr val="DFDDD7"/>
+            <a:srgbClr val="CC754E"/>
           </a:solidFill>
           <a:ln>
             <a:noFill/>
@@ -10321,8 +10341,8 @@
         </p:nvSpPr>
         <p:spPr>
           <a:xfrm>
-            <a:off x="2011680" y="4325234"/>
-            <a:ext cx="6880860" cy="526085"/>
+            <a:off x="2011680" y="4027297"/>
+            <a:ext cx="6880860" cy="535940"/>
           </a:xfrm>
           <a:prstGeom prst="rect">
             <a:avLst/>
@@ -10337,11 +10357,11 @@
           <a:p>
             <a:pPr algn="l">
               <a:lnSpc>
-                <a:spcPct val="140000"/>
-              </a:lnSpc>
-            </a:pPr>
-            <a:r>
-              <a:rPr sz="2300" i="0" b="0">
+                <a:spcPts val="3500"/>
+              </a:lnSpc>
+            </a:pPr>
+            <a:r>
+              <a:rPr sz="2500" i="0" b="0">
                 <a:solidFill>
                   <a:srgbClr val="1C1C1A"/>
                 </a:solidFill>
@@ -10360,8 +10380,8 @@
         </p:nvSpPr>
         <p:spPr>
           <a:xfrm>
-            <a:off x="2011680" y="5015911"/>
-            <a:ext cx="6880860" cy="1017422"/>
+            <a:off x="2011680" y="4764405"/>
+            <a:ext cx="6880860" cy="980440"/>
           </a:xfrm>
           <a:prstGeom prst="rect">
             <a:avLst/>
@@ -10376,11 +10396,11 @@
           <a:p>
             <a:pPr algn="l">
               <a:lnSpc>
-                <a:spcPct val="140000"/>
-              </a:lnSpc>
-            </a:pPr>
-            <a:r>
-              <a:rPr sz="2100" i="0" b="0">
+                <a:spcPts val="3500"/>
+              </a:lnSpc>
+            </a:pPr>
+            <a:r>
+              <a:rPr sz="2500" i="0" b="0">
                 <a:solidFill>
                   <a:srgbClr val="6B6B66"/>
                 </a:solidFill>
@@ -10399,14 +10419,14 @@
         </p:nvSpPr>
         <p:spPr>
           <a:xfrm>
-            <a:off x="9395460" y="4069202"/>
-            <a:ext cx="6880860" cy="10973"/>
+            <a:off x="9395460" y="3752977"/>
+            <a:ext cx="6880860" cy="56693"/>
           </a:xfrm>
           <a:prstGeom prst="rect">
             <a:avLst/>
           </a:prstGeom>
           <a:solidFill>
-            <a:srgbClr val="DFDDD7"/>
+            <a:srgbClr val="CC754E"/>
           </a:solidFill>
           <a:ln>
             <a:noFill/>
@@ -10443,8 +10463,8 @@
         </p:nvSpPr>
         <p:spPr>
           <a:xfrm>
-            <a:off x="9395460" y="4325234"/>
-            <a:ext cx="6880860" cy="526085"/>
+            <a:off x="9395460" y="4027297"/>
+            <a:ext cx="6880860" cy="535940"/>
           </a:xfrm>
           <a:prstGeom prst="rect">
             <a:avLst/>
@@ -10459,11 +10479,11 @@
           <a:p>
             <a:pPr algn="l">
               <a:lnSpc>
-                <a:spcPct val="140000"/>
-              </a:lnSpc>
-            </a:pPr>
-            <a:r>
-              <a:rPr sz="2300" i="0" b="0">
+                <a:spcPts val="3500"/>
+              </a:lnSpc>
+            </a:pPr>
+            <a:r>
+              <a:rPr sz="2500" i="0" b="0">
                 <a:solidFill>
                   <a:srgbClr val="1C1C1A"/>
                 </a:solidFill>
@@ -10482,8 +10502,8 @@
         </p:nvSpPr>
         <p:spPr>
           <a:xfrm>
-            <a:off x="9395460" y="5015911"/>
-            <a:ext cx="6880860" cy="554431"/>
+            <a:off x="9395460" y="4764405"/>
+            <a:ext cx="6880860" cy="535940"/>
           </a:xfrm>
           <a:prstGeom prst="rect">
             <a:avLst/>
@@ -10498,11 +10518,11 @@
           <a:p>
             <a:pPr algn="l">
               <a:lnSpc>
-                <a:spcPct val="140000"/>
-              </a:lnSpc>
-            </a:pPr>
-            <a:r>
-              <a:rPr sz="2100" i="0" b="0">
+                <a:spcPts val="3500"/>
+              </a:lnSpc>
+            </a:pPr>
+            <a:r>
+              <a:rPr sz="2500" i="0" b="0">
                 <a:solidFill>
                   <a:srgbClr val="6B6B66"/>
                 </a:solidFill>
@@ -10515,14 +10535,58 @@
       </p:sp>
       <p:sp>
         <p:nvSpPr>
-          <p:cNvPr id="12" name="TextBox 11"/>
+          <p:cNvPr id="12" name="Rectangle 11"/>
+          <p:cNvSpPr/>
+          <p:nvPr/>
+        </p:nvSpPr>
+        <p:spPr>
+          <a:xfrm>
+            <a:off x="9133942" y="4063873"/>
+            <a:ext cx="19202" cy="1534668"/>
+          </a:xfrm>
+          <a:prstGeom prst="rect">
+            <a:avLst/>
+          </a:prstGeom>
+          <a:solidFill>
+            <a:srgbClr val="CC754E"/>
+          </a:solidFill>
+          <a:ln>
+            <a:noFill/>
+          </a:ln>
+          <a:effectLst/>
+        </p:spPr>
+        <p:style>
+          <a:lnRef idx="1">
+            <a:schemeClr val="accent1"/>
+          </a:lnRef>
+          <a:fillRef idx="3">
+            <a:schemeClr val="accent1"/>
+          </a:fillRef>
+          <a:effectRef idx="2">
+            <a:schemeClr val="accent1"/>
+          </a:effectRef>
+          <a:fontRef idx="minor">
+            <a:schemeClr val="lt1"/>
+          </a:fontRef>
+        </p:style>
+        <p:txBody>
+          <a:bodyPr rtlCol="0" anchor="ctr"/>
+          <a:lstStyle/>
+          <a:p>
+            <a:pPr algn="ctr"/>
+          </a:p>
+        </p:txBody>
+      </p:sp>
+      <p:sp>
+        <p:nvSpPr>
+          <p:cNvPr id="13" name="TextBox 12"/>
           <p:cNvSpPr txBox="1"/>
           <p:nvPr/>
         </p:nvSpPr>
         <p:spPr>
           <a:xfrm>
-            <a:off x="2011680" y="6444813"/>
-            <a:ext cx="12252960" cy="554431"/>
+            <a:off x="3986784" y="6311773"/>
+            <a:ext cx="10314432" cy="980440"/>
           </a:xfrm>
           <a:prstGeom prst="rect">
             <a:avLst/>
@@ -10535,13 +10599,13 @@
           </a:bodyPr>
           <a:lstStyle/>
           <a:p>
-            <a:pPr algn="l">
-              <a:lnSpc>
-                <a:spcPct val="140000"/>
-              </a:lnSpc>
-            </a:pPr>
-            <a:r>
-              <a:rPr sz="2100" i="0" b="0">
+            <a:pPr algn="ctr">
+              <a:lnSpc>
+                <a:spcPts val="3500"/>
+              </a:lnSpc>
+            </a:pPr>
+            <a:r>
+              <a:rPr sz="2500" i="0" b="0">
                 <a:solidFill>
                   <a:srgbClr val="6B6B66"/>
                 </a:solidFill>
@@ -10658,8 +10722,8 @@
         </p:nvSpPr>
         <p:spPr>
           <a:xfrm>
-            <a:off x="2011680" y="1944837"/>
-            <a:ext cx="14264640" cy="882396"/>
+            <a:off x="2011680" y="1904238"/>
+            <a:ext cx="14264640" cy="1005078"/>
           </a:xfrm>
           <a:prstGeom prst="rect">
             <a:avLst/>
@@ -10674,7 +10738,7 @@
           <a:p>
             <a:pPr algn="l">
               <a:lnSpc>
-                <a:spcPct val="114000"/>
+                <a:spcPts val="5754"/>
               </a:lnSpc>
             </a:pPr>
             <a:r>
@@ -10684,7 +10748,25 @@
                 </a:solidFill>
                 <a:latin typeface="Outfit 1 Light"/>
               </a:rPr>
-              <a:t>O VERDADEIRO ALTO PADRÃO É A TRANQUILIDADE DE QUEM CONFIA.</a:t>
+              <a:t>O VERDADEIRO ALTO PADRÃO É A </a:t>
+            </a:r>
+            <a:r>
+              <a:rPr sz="4200" i="0" b="0">
+                <a:solidFill>
+                  <a:srgbClr val="1C1C1A"/>
+                </a:solidFill>
+                <a:latin typeface="Outfit 1 Bold"/>
+              </a:rPr>
+              <a:t>TRANQUILIDADE DE QUEM CONFIA</a:t>
+            </a:r>
+            <a:r>
+              <a:rPr sz="4200" i="0" b="0">
+                <a:solidFill>
+                  <a:srgbClr val="1C1C1A"/>
+                </a:solidFill>
+                <a:latin typeface="Outfit 1 Light"/>
+              </a:rPr>
+              <a:t>.</a:t>
             </a:r>
           </a:p>
         </p:txBody>
@@ -10697,14 +10779,14 @@
         </p:nvSpPr>
         <p:spPr>
           <a:xfrm>
-            <a:off x="2011680" y="3635745"/>
+            <a:off x="2011680" y="3548634"/>
             <a:ext cx="14264640" cy="10973"/>
           </a:xfrm>
           <a:prstGeom prst="rect">
             <a:avLst/>
           </a:prstGeom>
           <a:solidFill>
-            <a:srgbClr val="DFDDD7"/>
+            <a:srgbClr val="A5A49F"/>
           </a:solidFill>
           <a:ln>
             <a:noFill/>
@@ -10741,14 +10823,14 @@
         </p:nvSpPr>
         <p:spPr>
           <a:xfrm>
-            <a:off x="2011680" y="3983217"/>
-            <a:ext cx="6880860" cy="10973"/>
+            <a:off x="2011680" y="3896106"/>
+            <a:ext cx="6880860" cy="56693"/>
           </a:xfrm>
           <a:prstGeom prst="rect">
             <a:avLst/>
           </a:prstGeom>
           <a:solidFill>
-            <a:srgbClr val="DFDDD7"/>
+            <a:srgbClr val="CC754E"/>
           </a:solidFill>
           <a:ln>
             <a:noFill/>
@@ -10785,8 +10867,8 @@
         </p:nvSpPr>
         <p:spPr>
           <a:xfrm>
-            <a:off x="2011680" y="4239249"/>
-            <a:ext cx="6880860" cy="526085"/>
+            <a:off x="2011680" y="4170426"/>
+            <a:ext cx="6880860" cy="535940"/>
           </a:xfrm>
           <a:prstGeom prst="rect">
             <a:avLst/>
@@ -10801,11 +10883,11 @@
           <a:p>
             <a:pPr algn="l">
               <a:lnSpc>
-                <a:spcPct val="140000"/>
-              </a:lnSpc>
-            </a:pPr>
-            <a:r>
-              <a:rPr sz="2300" i="0" b="0">
+                <a:spcPts val="3500"/>
+              </a:lnSpc>
+            </a:pPr>
+            <a:r>
+              <a:rPr sz="2500" i="0" b="0">
                 <a:solidFill>
                   <a:srgbClr val="1C1C1A"/>
                 </a:solidFill>
@@ -10824,8 +10906,8 @@
         </p:nvSpPr>
         <p:spPr>
           <a:xfrm>
-            <a:off x="2011680" y="4929926"/>
-            <a:ext cx="6880860" cy="1480414"/>
+            <a:off x="2011680" y="4907534"/>
+            <a:ext cx="6880860" cy="1424940"/>
           </a:xfrm>
           <a:prstGeom prst="rect">
             <a:avLst/>
@@ -10840,11 +10922,11 @@
           <a:p>
             <a:pPr algn="l">
               <a:lnSpc>
-                <a:spcPct val="140000"/>
-              </a:lnSpc>
-            </a:pPr>
-            <a:r>
-              <a:rPr sz="2100" i="0" b="0">
+                <a:spcPts val="3500"/>
+              </a:lnSpc>
+            </a:pPr>
+            <a:r>
+              <a:rPr sz="2500" i="0" b="0">
                 <a:solidFill>
                   <a:srgbClr val="6B6B66"/>
                 </a:solidFill>
@@ -10863,14 +10945,14 @@
         </p:nvSpPr>
         <p:spPr>
           <a:xfrm>
-            <a:off x="9395460" y="3983217"/>
-            <a:ext cx="6880860" cy="10973"/>
+            <a:off x="9395460" y="3896106"/>
+            <a:ext cx="6880860" cy="56693"/>
           </a:xfrm>
           <a:prstGeom prst="rect">
             <a:avLst/>
           </a:prstGeom>
           <a:solidFill>
-            <a:srgbClr val="DFDDD7"/>
+            <a:srgbClr val="CC754E"/>
           </a:solidFill>
           <a:ln>
             <a:noFill/>
@@ -10907,8 +10989,8 @@
         </p:nvSpPr>
         <p:spPr>
           <a:xfrm>
-            <a:off x="9395460" y="4239249"/>
-            <a:ext cx="6880860" cy="526085"/>
+            <a:off x="9395460" y="4170426"/>
+            <a:ext cx="6880860" cy="535940"/>
           </a:xfrm>
           <a:prstGeom prst="rect">
             <a:avLst/>
@@ -10923,11 +11005,11 @@
           <a:p>
             <a:pPr algn="l">
               <a:lnSpc>
-                <a:spcPct val="140000"/>
-              </a:lnSpc>
-            </a:pPr>
-            <a:r>
-              <a:rPr sz="2300" i="0" b="0">
+                <a:spcPts val="3500"/>
+              </a:lnSpc>
+            </a:pPr>
+            <a:r>
+              <a:rPr sz="2500" i="0" b="0">
                 <a:solidFill>
                   <a:srgbClr val="1C1C1A"/>
                 </a:solidFill>
@@ -10946,8 +11028,8 @@
         </p:nvSpPr>
         <p:spPr>
           <a:xfrm>
-            <a:off x="9395460" y="4929926"/>
-            <a:ext cx="6880860" cy="1480414"/>
+            <a:off x="9395460" y="4907534"/>
+            <a:ext cx="6880860" cy="1424940"/>
           </a:xfrm>
           <a:prstGeom prst="rect">
             <a:avLst/>
@@ -10962,11 +11044,11 @@
           <a:p>
             <a:pPr algn="l">
               <a:lnSpc>
-                <a:spcPct val="140000"/>
-              </a:lnSpc>
-            </a:pPr>
-            <a:r>
-              <a:rPr sz="2100" i="0" b="0">
+                <a:spcPts val="3500"/>
+              </a:lnSpc>
+            </a:pPr>
+            <a:r>
+              <a:rPr sz="2500" i="0" b="0">
                 <a:solidFill>
                   <a:srgbClr val="6B6B66"/>
                 </a:solidFill>
@@ -10979,14 +11061,58 @@
       </p:sp>
       <p:sp>
         <p:nvSpPr>
-          <p:cNvPr id="12" name="TextBox 11"/>
+          <p:cNvPr id="12" name="Rectangle 11"/>
+          <p:cNvSpPr/>
+          <p:nvPr/>
+        </p:nvSpPr>
+        <p:spPr>
+          <a:xfrm>
+            <a:off x="9133942" y="4207002"/>
+            <a:ext cx="19202" cy="1979168"/>
+          </a:xfrm>
+          <a:prstGeom prst="rect">
+            <a:avLst/>
+          </a:prstGeom>
+          <a:solidFill>
+            <a:srgbClr val="CC754E"/>
+          </a:solidFill>
+          <a:ln>
+            <a:noFill/>
+          </a:ln>
+          <a:effectLst/>
+        </p:spPr>
+        <p:style>
+          <a:lnRef idx="1">
+            <a:schemeClr val="accent1"/>
+          </a:lnRef>
+          <a:fillRef idx="3">
+            <a:schemeClr val="accent1"/>
+          </a:fillRef>
+          <a:effectRef idx="2">
+            <a:schemeClr val="accent1"/>
+          </a:effectRef>
+          <a:fontRef idx="minor">
+            <a:schemeClr val="lt1"/>
+          </a:fontRef>
+        </p:style>
+        <p:txBody>
+          <a:bodyPr rtlCol="0" anchor="ctr"/>
+          <a:lstStyle/>
+          <a:p>
+            <a:pPr algn="ctr"/>
+          </a:p>
+        </p:txBody>
+      </p:sp>
+      <p:sp>
+        <p:nvSpPr>
+          <p:cNvPr id="13" name="TextBox 12"/>
           <p:cNvSpPr txBox="1"/>
           <p:nvPr/>
         </p:nvSpPr>
         <p:spPr>
           <a:xfrm>
-            <a:off x="2011680" y="6821820"/>
-            <a:ext cx="12252960" cy="1017422"/>
+            <a:off x="3986784" y="6899402"/>
+            <a:ext cx="10314432" cy="980440"/>
           </a:xfrm>
           <a:prstGeom prst="rect">
             <a:avLst/>
@@ -10999,13 +11125,13 @@
           </a:bodyPr>
           <a:lstStyle/>
           <a:p>
-            <a:pPr algn="l">
-              <a:lnSpc>
-                <a:spcPct val="140000"/>
-              </a:lnSpc>
-            </a:pPr>
-            <a:r>
-              <a:rPr sz="2100" i="0" b="0">
+            <a:pPr algn="ctr">
+              <a:lnSpc>
+                <a:spcPts val="3500"/>
+              </a:lnSpc>
+            </a:pPr>
+            <a:r>
+              <a:rPr sz="2500" i="0" b="0">
                 <a:solidFill>
                   <a:srgbClr val="6B6B66"/>
                 </a:solidFill>
@@ -11122,8 +11248,8 @@
         </p:nvSpPr>
         <p:spPr>
           <a:xfrm>
-            <a:off x="2011680" y="3036295"/>
-            <a:ext cx="14264640" cy="882396"/>
+            <a:off x="2011680" y="3043301"/>
+            <a:ext cx="14264640" cy="1005078"/>
           </a:xfrm>
           <a:prstGeom prst="rect">
             <a:avLst/>
@@ -11138,7 +11264,7 @@
           <a:p>
             <a:pPr algn="l">
               <a:lnSpc>
-                <a:spcPct val="114000"/>
+                <a:spcPts val="5754"/>
               </a:lnSpc>
             </a:pPr>
             <a:r>
@@ -11148,7 +11274,25 @@
                 </a:solidFill>
                 <a:latin typeface="Outfit 1 Light"/>
               </a:rPr>
-              <a:t>TRANSFORMAR COMPLEXIDADE EM CONFIANÇA.</a:t>
+              <a:t>TRANSFORMAR COMPLEXIDADE EM </a:t>
+            </a:r>
+            <a:r>
+              <a:rPr sz="4200" i="0" b="0">
+                <a:solidFill>
+                  <a:srgbClr val="1C1C1A"/>
+                </a:solidFill>
+                <a:latin typeface="Outfit 1 Bold"/>
+              </a:rPr>
+              <a:t>CONFIANÇA</a:t>
+            </a:r>
+            <a:r>
+              <a:rPr sz="4200" i="0" b="0">
+                <a:solidFill>
+                  <a:srgbClr val="1C1C1A"/>
+                </a:solidFill>
+                <a:latin typeface="Outfit 1 Light"/>
+              </a:rPr>
+              <a:t>.</a:t>
             </a:r>
           </a:p>
         </p:txBody>
@@ -11161,14 +11305,14 @@
         </p:nvSpPr>
         <p:spPr>
           <a:xfrm>
-            <a:off x="2011680" y="3973189"/>
+            <a:off x="2011680" y="3956939"/>
             <a:ext cx="14264640" cy="10973"/>
           </a:xfrm>
           <a:prstGeom prst="rect">
             <a:avLst/>
           </a:prstGeom>
           <a:solidFill>
-            <a:srgbClr val="DFDDD7"/>
+            <a:srgbClr val="A5A49F"/>
           </a:solidFill>
           <a:ln>
             <a:noFill/>
@@ -11205,14 +11349,14 @@
         </p:nvSpPr>
         <p:spPr>
           <a:xfrm>
-            <a:off x="2011680" y="4320661"/>
-            <a:ext cx="6880860" cy="10973"/>
+            <a:off x="2011680" y="4304411"/>
+            <a:ext cx="6880860" cy="56693"/>
           </a:xfrm>
           <a:prstGeom prst="rect">
             <a:avLst/>
           </a:prstGeom>
           <a:solidFill>
-            <a:srgbClr val="DFDDD7"/>
+            <a:srgbClr val="CC754E"/>
           </a:solidFill>
           <a:ln>
             <a:noFill/>
@@ -11249,8 +11393,8 @@
         </p:nvSpPr>
         <p:spPr>
           <a:xfrm>
-            <a:off x="2011680" y="4576693"/>
-            <a:ext cx="6880860" cy="526085"/>
+            <a:off x="2011680" y="4578731"/>
+            <a:ext cx="6880860" cy="535940"/>
           </a:xfrm>
           <a:prstGeom prst="rect">
             <a:avLst/>
@@ -11265,11 +11409,11 @@
           <a:p>
             <a:pPr algn="l">
               <a:lnSpc>
-                <a:spcPct val="140000"/>
-              </a:lnSpc>
-            </a:pPr>
-            <a:r>
-              <a:rPr sz="2300" i="0" b="0">
+                <a:spcPts val="3500"/>
+              </a:lnSpc>
+            </a:pPr>
+            <a:r>
+              <a:rPr sz="2500" i="0" b="0">
                 <a:solidFill>
                   <a:srgbClr val="1C1C1A"/>
                 </a:solidFill>
@@ -11288,8 +11432,8 @@
         </p:nvSpPr>
         <p:spPr>
           <a:xfrm>
-            <a:off x="2011680" y="5267370"/>
-            <a:ext cx="6880860" cy="1480414"/>
+            <a:off x="2011680" y="5315839"/>
+            <a:ext cx="6880860" cy="1424940"/>
           </a:xfrm>
           <a:prstGeom prst="rect">
             <a:avLst/>
@@ -11304,11 +11448,11 @@
           <a:p>
             <a:pPr algn="l">
               <a:lnSpc>
-                <a:spcPct val="140000"/>
-              </a:lnSpc>
-            </a:pPr>
-            <a:r>
-              <a:rPr sz="2100" i="0" b="0">
+                <a:spcPts val="3500"/>
+              </a:lnSpc>
+            </a:pPr>
+            <a:r>
+              <a:rPr sz="2500" i="0" b="0">
                 <a:solidFill>
                   <a:srgbClr val="6B6B66"/>
                 </a:solidFill>
@@ -11327,14 +11471,14 @@
         </p:nvSpPr>
         <p:spPr>
           <a:xfrm>
-            <a:off x="9395460" y="4320661"/>
-            <a:ext cx="6880860" cy="10973"/>
+            <a:off x="9395460" y="4304411"/>
+            <a:ext cx="6880860" cy="56693"/>
           </a:xfrm>
           <a:prstGeom prst="rect">
             <a:avLst/>
           </a:prstGeom>
           <a:solidFill>
-            <a:srgbClr val="DFDDD7"/>
+            <a:srgbClr val="CC754E"/>
           </a:solidFill>
           <a:ln>
             <a:noFill/>
@@ -11371,8 +11515,8 @@
         </p:nvSpPr>
         <p:spPr>
           <a:xfrm>
-            <a:off x="9395460" y="4576693"/>
-            <a:ext cx="6880860" cy="526085"/>
+            <a:off x="9395460" y="4578731"/>
+            <a:ext cx="6880860" cy="535940"/>
           </a:xfrm>
           <a:prstGeom prst="rect">
             <a:avLst/>
@@ -11387,11 +11531,11 @@
           <a:p>
             <a:pPr algn="l">
               <a:lnSpc>
-                <a:spcPct val="140000"/>
-              </a:lnSpc>
-            </a:pPr>
-            <a:r>
-              <a:rPr sz="2300" i="0" b="0">
+                <a:spcPts val="3500"/>
+              </a:lnSpc>
+            </a:pPr>
+            <a:r>
+              <a:rPr sz="2500" i="0" b="0">
                 <a:solidFill>
                   <a:srgbClr val="1C1C1A"/>
                 </a:solidFill>
@@ -11410,8 +11554,8 @@
         </p:nvSpPr>
         <p:spPr>
           <a:xfrm>
-            <a:off x="9395460" y="5267370"/>
-            <a:ext cx="6880860" cy="1017422"/>
+            <a:off x="9395460" y="5315839"/>
+            <a:ext cx="6880860" cy="980440"/>
           </a:xfrm>
           <a:prstGeom prst="rect">
             <a:avLst/>
@@ -11426,11 +11570,11 @@
           <a:p>
             <a:pPr algn="l">
               <a:lnSpc>
-                <a:spcPct val="140000"/>
-              </a:lnSpc>
-            </a:pPr>
-            <a:r>
-              <a:rPr sz="2100" i="0" b="0">
+                <a:spcPts val="3500"/>
+              </a:lnSpc>
+            </a:pPr>
+            <a:r>
+              <a:rPr sz="2500" i="0" b="0">
                 <a:solidFill>
                   <a:srgbClr val="6B6B66"/>
                 </a:solidFill>
@@ -11438,6 +11582,50 @@
               </a:rPr>
               <a:t>Preservar a personalização e a proximidade mesmo com a expansão industrial.</a:t>
             </a:r>
+          </a:p>
+        </p:txBody>
+      </p:sp>
+      <p:sp>
+        <p:nvSpPr>
+          <p:cNvPr id="12" name="Rectangle 11"/>
+          <p:cNvSpPr/>
+          <p:nvPr/>
+        </p:nvSpPr>
+        <p:spPr>
+          <a:xfrm>
+            <a:off x="9133942" y="4615307"/>
+            <a:ext cx="19202" cy="1979168"/>
+          </a:xfrm>
+          <a:prstGeom prst="rect">
+            <a:avLst/>
+          </a:prstGeom>
+          <a:solidFill>
+            <a:srgbClr val="CC754E"/>
+          </a:solidFill>
+          <a:ln>
+            <a:noFill/>
+          </a:ln>
+          <a:effectLst/>
+        </p:spPr>
+        <p:style>
+          <a:lnRef idx="1">
+            <a:schemeClr val="accent1"/>
+          </a:lnRef>
+          <a:fillRef idx="3">
+            <a:schemeClr val="accent1"/>
+          </a:fillRef>
+          <a:effectRef idx="2">
+            <a:schemeClr val="accent1"/>
+          </a:effectRef>
+          <a:fontRef idx="minor">
+            <a:schemeClr val="lt1"/>
+          </a:fontRef>
+        </p:style>
+        <p:txBody>
+          <a:bodyPr rtlCol="0" anchor="ctr"/>
+          <a:lstStyle/>
+          <a:p>
+            <a:pPr algn="ctr"/>
           </a:p>
         </p:txBody>
       </p:sp>
@@ -11539,59 +11727,22 @@
       </p:sp>
       <p:sp>
         <p:nvSpPr>
-          <p:cNvPr id="4" name="TextBox 3"/>
-          <p:cNvSpPr txBox="1"/>
-          <p:nvPr/>
-        </p:nvSpPr>
-        <p:spPr>
-          <a:xfrm>
-            <a:off x="2011680" y="3902751"/>
-            <a:ext cx="14081760" cy="1742664"/>
-          </a:xfrm>
-          <a:prstGeom prst="rect">
-            <a:avLst/>
-          </a:prstGeom>
-          <a:noFill/>
-        </p:spPr>
-        <p:txBody>
-          <a:bodyPr wrap="square" anchor="t" lIns="0" rIns="0" tIns="0" bIns="0">
-            <a:spAutoFit/>
-          </a:bodyPr>
-          <a:lstStyle/>
-          <a:p>
-            <a:pPr algn="l">
-              <a:lnSpc>
-                <a:spcPct val="126000"/>
-              </a:lnSpc>
-            </a:pPr>
-            <a:r>
-              <a:rPr sz="7400" i="0" b="0">
-                <a:solidFill>
-                  <a:srgbClr val="FFFFFF"/>
-                </a:solidFill>
-                <a:latin typeface="Outfit 1 Light"/>
-              </a:rPr>
-              <a:t>Precisão que realiza.</a:t>
-            </a:r>
-          </a:p>
-        </p:txBody>
-      </p:sp>
-      <p:sp>
-        <p:nvSpPr>
-          <p:cNvPr id="5" name="Rectangle 4"/>
+          <p:cNvPr id="4" name="Rounded Rectangle 3"/>
           <p:cNvSpPr/>
           <p:nvPr/>
         </p:nvSpPr>
         <p:spPr>
           <a:xfrm>
-            <a:off x="2011680" y="5326899"/>
-            <a:ext cx="1188720" cy="27432"/>
-          </a:xfrm>
-          <a:prstGeom prst="rect">
-            <a:avLst/>
+            <a:off x="10479024" y="1028700"/>
+            <a:ext cx="7808976" cy="2077212"/>
+          </a:xfrm>
+          <a:prstGeom prst="roundRect">
+            <a:avLst>
+              <a:gd name="adj" fmla="val 7923"/>
+            </a:avLst>
           </a:prstGeom>
           <a:solidFill>
-            <a:srgbClr val="A9724A"/>
+            <a:srgbClr val="F8F7F2"/>
           </a:solidFill>
           <a:ln>
             <a:noFill/>
@@ -11622,14 +11773,14 @@
       </p:sp>
       <p:sp>
         <p:nvSpPr>
-          <p:cNvPr id="6" name="TextBox 5"/>
+          <p:cNvPr id="5" name="TextBox 4"/>
           <p:cNvSpPr txBox="1"/>
           <p:nvPr/>
         </p:nvSpPr>
         <p:spPr>
           <a:xfrm>
-            <a:off x="2011680" y="5601219"/>
-            <a:ext cx="11887200" cy="554431"/>
+            <a:off x="11045952" y="1595628"/>
+            <a:ext cx="6675120" cy="586232"/>
           </a:xfrm>
           <a:prstGeom prst="rect">
             <a:avLst/>
@@ -11644,13 +11795,52 @@
           <a:p>
             <a:pPr algn="l">
               <a:lnSpc>
-                <a:spcPct val="140000"/>
-              </a:lnSpc>
-            </a:pPr>
-            <a:r>
-              <a:rPr sz="2100" i="0" b="0">
-                <a:solidFill>
-                  <a:srgbClr val="FFFFFF"/>
+                <a:spcPts val="3752"/>
+              </a:lnSpc>
+            </a:pPr>
+            <a:r>
+              <a:rPr sz="2800" i="0" b="0">
+                <a:solidFill>
+                  <a:srgbClr val="1C1C1A"/>
+                </a:solidFill>
+                <a:latin typeface="Outfit 1 Light"/>
+              </a:rPr>
+              <a:t>Precisão que realiza.</a:t>
+            </a:r>
+          </a:p>
+        </p:txBody>
+      </p:sp>
+      <p:sp>
+        <p:nvSpPr>
+          <p:cNvPr id="6" name="TextBox 5"/>
+          <p:cNvSpPr txBox="1"/>
+          <p:nvPr/>
+        </p:nvSpPr>
+        <p:spPr>
+          <a:xfrm>
+            <a:off x="11045952" y="2236724"/>
+            <a:ext cx="6675120" cy="393700"/>
+          </a:xfrm>
+          <a:prstGeom prst="rect">
+            <a:avLst/>
+          </a:prstGeom>
+          <a:noFill/>
+        </p:spPr>
+        <p:txBody>
+          <a:bodyPr wrap="square" anchor="t" lIns="0" rIns="0" tIns="0" bIns="0">
+            <a:spAutoFit/>
+          </a:bodyPr>
+          <a:lstStyle/>
+          <a:p>
+            <a:pPr algn="l">
+              <a:lnSpc>
+                <a:spcPts val="2379"/>
+              </a:lnSpc>
+            </a:pPr>
+            <a:r>
+              <a:rPr sz="1700" i="0" b="0">
+                <a:solidFill>
+                  <a:srgbClr val="6B6B66"/>
                 </a:solidFill>
                 <a:latin typeface="Outfit 1 Light"/>
               </a:rPr>
@@ -11667,8 +11857,8 @@
         </p:nvSpPr>
         <p:spPr>
           <a:xfrm>
-            <a:off x="2011680" y="8220558"/>
-            <a:ext cx="11521440" cy="484530"/>
+            <a:off x="2011680" y="8293100"/>
+            <a:ext cx="11521440" cy="411988"/>
           </a:xfrm>
           <a:prstGeom prst="rect">
             <a:avLst/>
@@ -11811,8 +12001,8 @@
         </p:nvSpPr>
         <p:spPr>
           <a:xfrm>
-            <a:off x="2011680" y="3411829"/>
-            <a:ext cx="3657600" cy="274320"/>
+            <a:off x="2011680" y="2933382"/>
+            <a:ext cx="15247620" cy="292608"/>
           </a:xfrm>
           <a:prstGeom prst="rect">
             <a:avLst/>
@@ -11825,9 +12015,9 @@
           </a:bodyPr>
           <a:lstStyle/>
           <a:p>
-            <a:pPr algn="l">
-              <a:lnSpc>
-                <a:spcPct val="140000"/>
+            <a:pPr algn="r">
+              <a:lnSpc>
+                <a:spcPts val="1959"/>
               </a:lnSpc>
             </a:pPr>
             <a:r>
@@ -11850,8 +12040,8 @@
         </p:nvSpPr>
         <p:spPr>
           <a:xfrm>
-            <a:off x="2011680" y="3960469"/>
-            <a:ext cx="12801600" cy="1551940"/>
+            <a:off x="2011680" y="3408870"/>
+            <a:ext cx="15247620" cy="2187575"/>
           </a:xfrm>
           <a:prstGeom prst="rect">
             <a:avLst/>
@@ -11864,17 +12054,17 @@
           </a:bodyPr>
           <a:lstStyle/>
           <a:p>
-            <a:pPr algn="l">
-              <a:lnSpc>
-                <a:spcPct val="100000"/>
-              </a:lnSpc>
-            </a:pPr>
-            <a:r>
-              <a:rPr sz="9400" i="0" b="0">
+            <a:pPr algn="r">
+              <a:lnSpc>
+                <a:spcPts val="15785"/>
+              </a:lnSpc>
+            </a:pPr>
+            <a:r>
+              <a:rPr sz="14350" i="0" b="0">
                 <a:solidFill>
                   <a:srgbClr val="FFFFFF"/>
                 </a:solidFill>
-                <a:latin typeface="Outfit 1 Light"/>
+                <a:latin typeface="Outfit 1 Bold"/>
               </a:rPr>
               <a:t>MY HOME</a:t>
             </a:r>
@@ -11883,58 +12073,14 @@
       </p:sp>
       <p:sp>
         <p:nvSpPr>
-          <p:cNvPr id="6" name="Rectangle 5"/>
-          <p:cNvSpPr/>
-          <p:nvPr/>
-        </p:nvSpPr>
-        <p:spPr>
-          <a:xfrm>
-            <a:off x="2011680" y="5751677"/>
-            <a:ext cx="14264640" cy="10973"/>
-          </a:xfrm>
-          <a:prstGeom prst="rect">
-            <a:avLst/>
-          </a:prstGeom>
-          <a:solidFill>
-            <a:srgbClr val="A5A49F"/>
-          </a:solidFill>
-          <a:ln>
-            <a:noFill/>
-          </a:ln>
-          <a:effectLst/>
-        </p:spPr>
-        <p:style>
-          <a:lnRef idx="1">
-            <a:schemeClr val="accent1"/>
-          </a:lnRef>
-          <a:fillRef idx="3">
-            <a:schemeClr val="accent1"/>
-          </a:fillRef>
-          <a:effectRef idx="2">
-            <a:schemeClr val="accent1"/>
-          </a:effectRef>
-          <a:fontRef idx="minor">
-            <a:schemeClr val="lt1"/>
-          </a:fontRef>
-        </p:style>
-        <p:txBody>
-          <a:bodyPr rtlCol="0" anchor="ctr"/>
-          <a:lstStyle/>
-          <a:p>
-            <a:pPr algn="ctr"/>
-          </a:p>
-        </p:txBody>
-      </p:sp>
-      <p:sp>
-        <p:nvSpPr>
-          <p:cNvPr id="7" name="TextBox 6"/>
+          <p:cNvPr id="6" name="TextBox 5"/>
           <p:cNvSpPr txBox="1"/>
           <p:nvPr/>
         </p:nvSpPr>
         <p:spPr>
           <a:xfrm>
-            <a:off x="2011680" y="6025997"/>
-            <a:ext cx="11887200" cy="620573"/>
+            <a:off x="2011680" y="5669598"/>
+            <a:ext cx="15247620" cy="888492"/>
           </a:xfrm>
           <a:prstGeom prst="rect">
             <a:avLst/>
@@ -11947,13 +12093,13 @@
           </a:bodyPr>
           <a:lstStyle/>
           <a:p>
-            <a:pPr algn="l">
-              <a:lnSpc>
-                <a:spcPct val="140000"/>
-              </a:lnSpc>
-            </a:pPr>
-            <a:r>
-              <a:rPr sz="2400" i="0" b="0">
+            <a:pPr algn="r">
+              <a:lnSpc>
+                <a:spcPts val="5916"/>
+              </a:lnSpc>
+            </a:pPr>
+            <a:r>
+              <a:rPr sz="5100" i="0" b="0">
                 <a:solidFill>
                   <a:srgbClr val="FFFFFF"/>
                 </a:solidFill>
@@ -11966,14 +12112,14 @@
       </p:sp>
       <p:sp>
         <p:nvSpPr>
-          <p:cNvPr id="8" name="TextBox 7"/>
+          <p:cNvPr id="7" name="TextBox 6"/>
           <p:cNvSpPr txBox="1"/>
           <p:nvPr/>
         </p:nvSpPr>
         <p:spPr>
           <a:xfrm>
-            <a:off x="2011680" y="8220558"/>
-            <a:ext cx="11521440" cy="484530"/>
+            <a:off x="2011680" y="8293100"/>
+            <a:ext cx="11521440" cy="411988"/>
           </a:xfrm>
           <a:prstGeom prst="rect">
             <a:avLst/>
@@ -12118,14 +12264,14 @@
         </p:nvSpPr>
         <p:spPr>
           <a:xfrm>
-            <a:off x="2011680" y="2886943"/>
+            <a:off x="2011680" y="3566922"/>
             <a:ext cx="1188720" cy="27432"/>
           </a:xfrm>
           <a:prstGeom prst="rect">
             <a:avLst/>
           </a:prstGeom>
           <a:solidFill>
-            <a:srgbClr val="A9724A"/>
+            <a:srgbClr val="CC754E"/>
           </a:solidFill>
           <a:ln>
             <a:noFill/>
@@ -12162,8 +12308,8 @@
         </p:nvSpPr>
         <p:spPr>
           <a:xfrm>
-            <a:off x="2011680" y="3289279"/>
-            <a:ext cx="14081760" cy="3607857"/>
+            <a:off x="2011680" y="3969258"/>
+            <a:ext cx="14081760" cy="2247900"/>
           </a:xfrm>
           <a:prstGeom prst="rect">
             <a:avLst/>
@@ -12178,13 +12324,13 @@
           <a:p>
             <a:pPr algn="l">
               <a:lnSpc>
-                <a:spcPct val="126000"/>
-              </a:lnSpc>
-            </a:pPr>
-            <a:r>
-              <a:rPr sz="5600" i="0" b="0">
-                <a:solidFill>
-                  <a:srgbClr val="1C1C1A"/>
+                <a:spcPts val="5180"/>
+              </a:lnSpc>
+            </a:pPr>
+            <a:r>
+              <a:rPr sz="3700" i="0" b="0">
+                <a:solidFill>
+                  <a:srgbClr val="323330"/>
                 </a:solidFill>
                 <a:latin typeface="Outfit 1 Light"/>
               </a:rPr>
@@ -12194,13 +12340,13 @@
           <a:p>
             <a:pPr algn="l">
               <a:lnSpc>
-                <a:spcPct val="126000"/>
-              </a:lnSpc>
-            </a:pPr>
-            <a:r>
-              <a:rPr sz="5600" i="0" b="0">
-                <a:solidFill>
-                  <a:srgbClr val="1C1C1A"/>
+                <a:spcPts val="5180"/>
+              </a:lnSpc>
+            </a:pPr>
+            <a:r>
+              <a:rPr sz="3700" i="0" b="0">
+                <a:solidFill>
+                  <a:srgbClr val="323330"/>
                 </a:solidFill>
                 <a:latin typeface="Outfit 1 Light"/>
               </a:rPr>
@@ -12210,13 +12356,13 @@
           <a:p>
             <a:pPr algn="l">
               <a:lnSpc>
-                <a:spcPct val="126000"/>
-              </a:lnSpc>
-            </a:pPr>
-            <a:r>
-              <a:rPr sz="5600" i="0" b="0">
-                <a:solidFill>
-                  <a:srgbClr val="1C1C1A"/>
+                <a:spcPts val="5180"/>
+              </a:lnSpc>
+            </a:pPr>
+            <a:r>
+              <a:rPr sz="3700" i="0" b="0">
+                <a:solidFill>
+                  <a:srgbClr val="323330"/>
                 </a:solidFill>
                 <a:latin typeface="Outfit 1 Light"/>
               </a:rPr>
@@ -12329,14 +12475,14 @@
         </p:nvSpPr>
         <p:spPr>
           <a:xfrm>
-            <a:off x="594360" y="4241597"/>
+            <a:off x="594360" y="4037838"/>
             <a:ext cx="1188720" cy="27432"/>
           </a:xfrm>
           <a:prstGeom prst="rect">
             <a:avLst/>
           </a:prstGeom>
           <a:solidFill>
-            <a:srgbClr val="A9724A"/>
+            <a:srgbClr val="CC754E"/>
           </a:solidFill>
           <a:ln>
             <a:noFill/>
@@ -12373,7 +12519,7 @@
         </p:nvSpPr>
         <p:spPr>
           <a:xfrm>
-            <a:off x="594360" y="4552493"/>
+            <a:off x="594360" y="4348734"/>
             <a:ext cx="5760720" cy="292608"/>
           </a:xfrm>
           <a:prstGeom prst="rect">
@@ -12389,13 +12535,13 @@
           <a:p>
             <a:pPr algn="l">
               <a:lnSpc>
-                <a:spcPct val="140000"/>
+                <a:spcPts val="1959"/>
               </a:lnSpc>
             </a:pPr>
             <a:r>
               <a:rPr sz="1400" i="0" b="0" spc="300">
                 <a:solidFill>
-                  <a:srgbClr val="A9724A"/>
+                  <a:srgbClr val="CC754E"/>
                 </a:solidFill>
                 <a:latin typeface="Outfit 1 Semi-Bold"/>
               </a:rPr>
@@ -12412,8 +12558,8 @@
         </p:nvSpPr>
         <p:spPr>
           <a:xfrm>
-            <a:off x="594360" y="5119421"/>
-            <a:ext cx="5760720" cy="1017422"/>
+            <a:off x="594360" y="4915662"/>
+            <a:ext cx="5760720" cy="1424940"/>
           </a:xfrm>
           <a:prstGeom prst="rect">
             <a:avLst/>
@@ -12428,11 +12574,11 @@
           <a:p>
             <a:pPr algn="l">
               <a:lnSpc>
-                <a:spcPct val="140000"/>
-              </a:lnSpc>
-            </a:pPr>
-            <a:r>
-              <a:rPr sz="2100" i="0" b="0">
+                <a:spcPts val="3500"/>
+              </a:lnSpc>
+            </a:pPr>
+            <a:r>
+              <a:rPr sz="2500" i="0" b="0">
                 <a:solidFill>
                   <a:srgbClr val="6B6B66"/>
                 </a:solidFill>
@@ -12495,8 +12641,8 @@
         </p:nvSpPr>
         <p:spPr>
           <a:xfrm>
-            <a:off x="7818120" y="2873716"/>
-            <a:ext cx="9601200" cy="882396"/>
+            <a:off x="7818120" y="2711704"/>
+            <a:ext cx="9601200" cy="1005078"/>
           </a:xfrm>
           <a:prstGeom prst="rect">
             <a:avLst/>
@@ -12511,7 +12657,7 @@
           <a:p>
             <a:pPr algn="l">
               <a:lnSpc>
-                <a:spcPct val="114000"/>
+                <a:spcPts val="5754"/>
               </a:lnSpc>
             </a:pPr>
             <a:r>
@@ -12521,7 +12667,25 @@
                 </a:solidFill>
                 <a:latin typeface="Outfit 1 Light"/>
               </a:rPr>
-              <a:t>ENXERGAR POSSIBILIDADES ONDE OUTROS ENXERGAM LIMITES.</a:t>
+              <a:t>ENXERGAR </a:t>
+            </a:r>
+            <a:r>
+              <a:rPr sz="4200" i="0" b="0">
+                <a:solidFill>
+                  <a:srgbClr val="1C1C1A"/>
+                </a:solidFill>
+                <a:latin typeface="Outfit 1 Bold"/>
+              </a:rPr>
+              <a:t>POSSIBILIDADES</a:t>
+            </a:r>
+            <a:r>
+              <a:rPr sz="4200" i="0" b="0">
+                <a:solidFill>
+                  <a:srgbClr val="1C1C1A"/>
+                </a:solidFill>
+                <a:latin typeface="Outfit 1 Light"/>
+              </a:rPr>
+              <a:t> ONDE OUTROS ENXERGAM LIMITES.</a:t>
             </a:r>
           </a:p>
         </p:txBody>
@@ -12534,14 +12698,14 @@
         </p:nvSpPr>
         <p:spPr>
           <a:xfrm>
-            <a:off x="7818120" y="4564624"/>
+            <a:off x="7818120" y="4356100"/>
             <a:ext cx="9601200" cy="10973"/>
           </a:xfrm>
           <a:prstGeom prst="rect">
             <a:avLst/>
           </a:prstGeom>
           <a:solidFill>
-            <a:srgbClr val="DFDDD7"/>
+            <a:srgbClr val="A5A49F"/>
           </a:solidFill>
           <a:ln>
             <a:noFill/>
@@ -12578,8 +12742,8 @@
         </p:nvSpPr>
         <p:spPr>
           <a:xfrm>
-            <a:off x="7818120" y="4912096"/>
-            <a:ext cx="9601200" cy="1017422"/>
+            <a:off x="7818120" y="4703572"/>
+            <a:ext cx="9601200" cy="1424940"/>
           </a:xfrm>
           <a:prstGeom prst="rect">
             <a:avLst/>
@@ -12594,11 +12758,11 @@
           <a:p>
             <a:pPr algn="l">
               <a:lnSpc>
-                <a:spcPct val="140000"/>
-              </a:lnSpc>
-            </a:pPr>
-            <a:r>
-              <a:rPr sz="2100" i="0" b="0">
+                <a:spcPts val="3500"/>
+              </a:lnSpc>
+            </a:pPr>
+            <a:r>
+              <a:rPr sz="2500" i="0" b="0">
                 <a:solidFill>
                   <a:srgbClr val="6B6B66"/>
                 </a:solidFill>
@@ -12617,8 +12781,8 @@
         </p:nvSpPr>
         <p:spPr>
           <a:xfrm>
-            <a:off x="7818120" y="6167263"/>
-            <a:ext cx="9601200" cy="1017422"/>
+            <a:off x="7818120" y="6366256"/>
+            <a:ext cx="9601200" cy="980440"/>
           </a:xfrm>
           <a:prstGeom prst="rect">
             <a:avLst/>
@@ -12633,11 +12797,11 @@
           <a:p>
             <a:pPr algn="l">
               <a:lnSpc>
-                <a:spcPct val="140000"/>
-              </a:lnSpc>
-            </a:pPr>
-            <a:r>
-              <a:rPr sz="2100" i="0" b="0">
+                <a:spcPts val="3500"/>
+              </a:lnSpc>
+            </a:pPr>
+            <a:r>
+              <a:rPr sz="2500" i="0" b="0">
                 <a:solidFill>
                   <a:srgbClr val="6B6B66"/>
                 </a:solidFill>
@@ -12754,14 +12918,14 @@
         </p:nvSpPr>
         <p:spPr>
           <a:xfrm>
-            <a:off x="2011680" y="2355098"/>
+            <a:off x="2011680" y="3314573"/>
             <a:ext cx="1188720" cy="27432"/>
           </a:xfrm>
           <a:prstGeom prst="rect">
             <a:avLst/>
           </a:prstGeom>
           <a:solidFill>
-            <a:srgbClr val="A9724A"/>
+            <a:srgbClr val="CC754E"/>
           </a:solidFill>
           <a:ln>
             <a:noFill/>
@@ -12798,8 +12962,8 @@
         </p:nvSpPr>
         <p:spPr>
           <a:xfrm>
-            <a:off x="2011680" y="2757434"/>
-            <a:ext cx="14081760" cy="4262658"/>
+            <a:off x="2011680" y="3716909"/>
+            <a:ext cx="14081760" cy="2247900"/>
           </a:xfrm>
           <a:prstGeom prst="rect">
             <a:avLst/>
@@ -12814,13 +12978,13 @@
           <a:p>
             <a:pPr algn="l">
               <a:lnSpc>
-                <a:spcPct val="126000"/>
-              </a:lnSpc>
-            </a:pPr>
-            <a:r>
-              <a:rPr sz="6700" i="0" b="0">
-                <a:solidFill>
-                  <a:srgbClr val="1C1C1A"/>
+                <a:spcPts val="5180"/>
+              </a:lnSpc>
+            </a:pPr>
+            <a:r>
+              <a:rPr sz="3700" i="0" b="0">
+                <a:solidFill>
+                  <a:srgbClr val="323330"/>
                 </a:solidFill>
                 <a:latin typeface="Outfit 1 Light"/>
               </a:rPr>
@@ -12830,13 +12994,13 @@
           <a:p>
             <a:pPr algn="l">
               <a:lnSpc>
-                <a:spcPct val="126000"/>
-              </a:lnSpc>
-            </a:pPr>
-            <a:r>
-              <a:rPr sz="6700" i="0" b="0">
-                <a:solidFill>
-                  <a:srgbClr val="1C1C1A"/>
+                <a:spcPts val="5180"/>
+              </a:lnSpc>
+            </a:pPr>
+            <a:r>
+              <a:rPr sz="3700" i="0" b="0">
+                <a:solidFill>
+                  <a:srgbClr val="323330"/>
                 </a:solidFill>
                 <a:latin typeface="Outfit 1 Light"/>
               </a:rPr>
@@ -12846,13 +13010,13 @@
           <a:p>
             <a:pPr algn="l">
               <a:lnSpc>
-                <a:spcPct val="126000"/>
-              </a:lnSpc>
-            </a:pPr>
-            <a:r>
-              <a:rPr sz="6700" i="0" b="0">
-                <a:solidFill>
-                  <a:srgbClr val="1C1C1A"/>
+                <a:spcPts val="5180"/>
+              </a:lnSpc>
+            </a:pPr>
+            <a:r>
+              <a:rPr sz="3700" i="0" b="0">
+                <a:solidFill>
+                  <a:srgbClr val="323330"/>
                 </a:solidFill>
                 <a:latin typeface="Outfit 1 Light"/>
               </a:rPr>
@@ -12869,8 +13033,8 @@
         </p:nvSpPr>
         <p:spPr>
           <a:xfrm>
-            <a:off x="2011680" y="6874551"/>
-            <a:ext cx="11887200" cy="554431"/>
+            <a:off x="2011680" y="5933567"/>
+            <a:ext cx="11887200" cy="535940"/>
           </a:xfrm>
           <a:prstGeom prst="rect">
             <a:avLst/>
@@ -12885,11 +13049,11 @@
           <a:p>
             <a:pPr algn="l">
               <a:lnSpc>
-                <a:spcPct val="140000"/>
-              </a:lnSpc>
-            </a:pPr>
-            <a:r>
-              <a:rPr sz="2100" i="0" b="0">
+                <a:spcPts val="3500"/>
+              </a:lnSpc>
+            </a:pPr>
+            <a:r>
+              <a:rPr sz="2500" i="0" b="0">
                 <a:solidFill>
                   <a:srgbClr val="6B6B66"/>
                 </a:solidFill>
@@ -13006,8 +13170,8 @@
         </p:nvSpPr>
         <p:spPr>
           <a:xfrm>
-            <a:off x="2011680" y="3267791"/>
-            <a:ext cx="14264640" cy="882396"/>
+            <a:off x="2011680" y="3265551"/>
+            <a:ext cx="14264640" cy="1005078"/>
           </a:xfrm>
           <a:prstGeom prst="rect">
             <a:avLst/>
@@ -13022,7 +13186,7 @@
           <a:p>
             <a:pPr algn="l">
               <a:lnSpc>
-                <a:spcPct val="114000"/>
+                <a:spcPts val="5754"/>
               </a:lnSpc>
             </a:pPr>
             <a:r>
@@ -13032,7 +13196,16 @@
                 </a:solidFill>
                 <a:latin typeface="Outfit 1 Light"/>
               </a:rPr>
-              <a:t>OS VALORES E A PERSONALIDADE DA MY HOME</a:t>
+              <a:t>OS VALORES E A PERSONALIDADE DA </a:t>
+            </a:r>
+            <a:r>
+              <a:rPr sz="4200" i="0" b="0">
+                <a:solidFill>
+                  <a:srgbClr val="1C1C1A"/>
+                </a:solidFill>
+                <a:latin typeface="Outfit 1 Bold"/>
+              </a:rPr>
+              <a:t>MY HOME</a:t>
             </a:r>
           </a:p>
         </p:txBody>
@@ -13045,14 +13218,14 @@
         </p:nvSpPr>
         <p:spPr>
           <a:xfrm>
-            <a:off x="2011680" y="4204685"/>
+            <a:off x="2011680" y="4179189"/>
             <a:ext cx="14264640" cy="10973"/>
           </a:xfrm>
           <a:prstGeom prst="rect">
             <a:avLst/>
           </a:prstGeom>
           <a:solidFill>
-            <a:srgbClr val="DFDDD7"/>
+            <a:srgbClr val="A5A49F"/>
           </a:solidFill>
           <a:ln>
             <a:noFill/>
@@ -13089,14 +13262,14 @@
         </p:nvSpPr>
         <p:spPr>
           <a:xfrm>
-            <a:off x="2011680" y="4552157"/>
-            <a:ext cx="6880860" cy="10973"/>
+            <a:off x="2011680" y="4526661"/>
+            <a:ext cx="6880860" cy="56693"/>
           </a:xfrm>
           <a:prstGeom prst="rect">
             <a:avLst/>
           </a:prstGeom>
           <a:solidFill>
-            <a:srgbClr val="DFDDD7"/>
+            <a:srgbClr val="CC754E"/>
           </a:solidFill>
           <a:ln>
             <a:noFill/>
@@ -13133,8 +13306,8 @@
         </p:nvSpPr>
         <p:spPr>
           <a:xfrm>
-            <a:off x="2011680" y="4808189"/>
-            <a:ext cx="6880860" cy="526085"/>
+            <a:off x="2011680" y="4800981"/>
+            <a:ext cx="6880860" cy="535940"/>
           </a:xfrm>
           <a:prstGeom prst="rect">
             <a:avLst/>
@@ -13149,11 +13322,11 @@
           <a:p>
             <a:pPr algn="l">
               <a:lnSpc>
-                <a:spcPct val="140000"/>
-              </a:lnSpc>
-            </a:pPr>
-            <a:r>
-              <a:rPr sz="2300" i="0" b="0">
+                <a:spcPts val="3500"/>
+              </a:lnSpc>
+            </a:pPr>
+            <a:r>
+              <a:rPr sz="2500" i="0" b="0">
                 <a:solidFill>
                   <a:srgbClr val="1C1C1A"/>
                 </a:solidFill>
@@ -13172,8 +13345,8 @@
         </p:nvSpPr>
         <p:spPr>
           <a:xfrm>
-            <a:off x="2011680" y="5498866"/>
-            <a:ext cx="6880860" cy="1017422"/>
+            <a:off x="2011680" y="5538089"/>
+            <a:ext cx="6880860" cy="980440"/>
           </a:xfrm>
           <a:prstGeom prst="rect">
             <a:avLst/>
@@ -13188,11 +13361,11 @@
           <a:p>
             <a:pPr algn="l">
               <a:lnSpc>
-                <a:spcPct val="140000"/>
-              </a:lnSpc>
-            </a:pPr>
-            <a:r>
-              <a:rPr sz="2100" i="0" b="0">
+                <a:spcPts val="3500"/>
+              </a:lnSpc>
+            </a:pPr>
+            <a:r>
+              <a:rPr sz="2500" i="0" b="0">
                 <a:solidFill>
                   <a:srgbClr val="6B6B66"/>
                 </a:solidFill>
@@ -13211,14 +13384,14 @@
         </p:nvSpPr>
         <p:spPr>
           <a:xfrm>
-            <a:off x="9395460" y="4552157"/>
-            <a:ext cx="6880860" cy="10973"/>
+            <a:off x="9395460" y="4526661"/>
+            <a:ext cx="6880860" cy="56693"/>
           </a:xfrm>
           <a:prstGeom prst="rect">
             <a:avLst/>
           </a:prstGeom>
           <a:solidFill>
-            <a:srgbClr val="DFDDD7"/>
+            <a:srgbClr val="CC754E"/>
           </a:solidFill>
           <a:ln>
             <a:noFill/>
@@ -13255,8 +13428,8 @@
         </p:nvSpPr>
         <p:spPr>
           <a:xfrm>
-            <a:off x="9395460" y="4808189"/>
-            <a:ext cx="6880860" cy="526085"/>
+            <a:off x="9395460" y="4800981"/>
+            <a:ext cx="6880860" cy="535940"/>
           </a:xfrm>
           <a:prstGeom prst="rect">
             <a:avLst/>
@@ -13271,11 +13444,11 @@
           <a:p>
             <a:pPr algn="l">
               <a:lnSpc>
-                <a:spcPct val="140000"/>
-              </a:lnSpc>
-            </a:pPr>
-            <a:r>
-              <a:rPr sz="2300" i="0" b="0">
+                <a:spcPts val="3500"/>
+              </a:lnSpc>
+            </a:pPr>
+            <a:r>
+              <a:rPr sz="2500" i="0" b="0">
                 <a:solidFill>
                   <a:srgbClr val="1C1C1A"/>
                 </a:solidFill>
@@ -13294,8 +13467,8 @@
         </p:nvSpPr>
         <p:spPr>
           <a:xfrm>
-            <a:off x="9395460" y="5498866"/>
-            <a:ext cx="6880860" cy="554431"/>
+            <a:off x="9395460" y="5538089"/>
+            <a:ext cx="6880860" cy="535940"/>
           </a:xfrm>
           <a:prstGeom prst="rect">
             <a:avLst/>
@@ -13310,11 +13483,11 @@
           <a:p>
             <a:pPr algn="l">
               <a:lnSpc>
-                <a:spcPct val="140000"/>
-              </a:lnSpc>
-            </a:pPr>
-            <a:r>
-              <a:rPr sz="2100" i="0" b="0">
+                <a:spcPts val="3500"/>
+              </a:lnSpc>
+            </a:pPr>
+            <a:r>
+              <a:rPr sz="2500" i="0" b="0">
                 <a:solidFill>
                   <a:srgbClr val="6B6B66"/>
                 </a:solidFill>
@@ -13322,6 +13495,50 @@
               </a:rPr>
               <a:t>Criativa · Curiosa · Expressiva · Próxima</a:t>
             </a:r>
+          </a:p>
+        </p:txBody>
+      </p:sp>
+      <p:sp>
+        <p:nvSpPr>
+          <p:cNvPr id="12" name="Rectangle 11"/>
+          <p:cNvSpPr/>
+          <p:nvPr/>
+        </p:nvSpPr>
+        <p:spPr>
+          <a:xfrm>
+            <a:off x="9133942" y="4837557"/>
+            <a:ext cx="19202" cy="1534668"/>
+          </a:xfrm>
+          <a:prstGeom prst="rect">
+            <a:avLst/>
+          </a:prstGeom>
+          <a:solidFill>
+            <a:srgbClr val="CC754E"/>
+          </a:solidFill>
+          <a:ln>
+            <a:noFill/>
+          </a:ln>
+          <a:effectLst/>
+        </p:spPr>
+        <p:style>
+          <a:lnRef idx="1">
+            <a:schemeClr val="accent1"/>
+          </a:lnRef>
+          <a:fillRef idx="3">
+            <a:schemeClr val="accent1"/>
+          </a:fillRef>
+          <a:effectRef idx="2">
+            <a:schemeClr val="accent1"/>
+          </a:effectRef>
+          <a:fontRef idx="minor">
+            <a:schemeClr val="lt1"/>
+          </a:fontRef>
+        </p:style>
+        <p:txBody>
+          <a:bodyPr rtlCol="0" anchor="ctr"/>
+          <a:lstStyle/>
+          <a:p>
+            <a:pPr algn="ctr"/>
           </a:p>
         </p:txBody>
       </p:sp>
@@ -13431,8 +13648,8 @@
         </p:nvSpPr>
         <p:spPr>
           <a:xfrm>
-            <a:off x="2011680" y="1944837"/>
-            <a:ext cx="14264640" cy="882396"/>
+            <a:off x="2011680" y="1904238"/>
+            <a:ext cx="14264640" cy="1005078"/>
           </a:xfrm>
           <a:prstGeom prst="rect">
             <a:avLst/>
@@ -13447,7 +13664,7 @@
           <a:p>
             <a:pPr algn="l">
               <a:lnSpc>
-                <a:spcPct val="114000"/>
+                <a:spcPts val="5754"/>
               </a:lnSpc>
             </a:pPr>
             <a:r>
@@ -13457,7 +13674,25 @@
                 </a:solidFill>
                 <a:latin typeface="Outfit 1 Light"/>
               </a:rPr>
-              <a:t>CRIAR NÃO É IMPROVISAR. É TRANSFORMAR COM CONHECIMENTO.</a:t>
+              <a:t>CRIAR NÃO É IMPROVISAR. É </a:t>
+            </a:r>
+            <a:r>
+              <a:rPr sz="4200" i="0" b="0">
+                <a:solidFill>
+                  <a:srgbClr val="1C1C1A"/>
+                </a:solidFill>
+                <a:latin typeface="Outfit 1 Bold"/>
+              </a:rPr>
+              <a:t>TRANSFORMAR COM CONHECIMENTO</a:t>
+            </a:r>
+            <a:r>
+              <a:rPr sz="4200" i="0" b="0">
+                <a:solidFill>
+                  <a:srgbClr val="1C1C1A"/>
+                </a:solidFill>
+                <a:latin typeface="Outfit 1 Light"/>
+              </a:rPr>
+              <a:t>.</a:t>
             </a:r>
           </a:p>
         </p:txBody>
@@ -13470,14 +13705,14 @@
         </p:nvSpPr>
         <p:spPr>
           <a:xfrm>
-            <a:off x="2011680" y="3635745"/>
+            <a:off x="2011680" y="3548634"/>
             <a:ext cx="14264640" cy="10973"/>
           </a:xfrm>
           <a:prstGeom prst="rect">
             <a:avLst/>
           </a:prstGeom>
           <a:solidFill>
-            <a:srgbClr val="DFDDD7"/>
+            <a:srgbClr val="A5A49F"/>
           </a:solidFill>
           <a:ln>
             <a:noFill/>
@@ -13514,14 +13749,14 @@
         </p:nvSpPr>
         <p:spPr>
           <a:xfrm>
-            <a:off x="2011680" y="3983217"/>
-            <a:ext cx="6880860" cy="10973"/>
+            <a:off x="2011680" y="3896106"/>
+            <a:ext cx="6880860" cy="56693"/>
           </a:xfrm>
           <a:prstGeom prst="rect">
             <a:avLst/>
           </a:prstGeom>
           <a:solidFill>
-            <a:srgbClr val="DFDDD7"/>
+            <a:srgbClr val="CC754E"/>
           </a:solidFill>
           <a:ln>
             <a:noFill/>
@@ -13558,8 +13793,8 @@
         </p:nvSpPr>
         <p:spPr>
           <a:xfrm>
-            <a:off x="2011680" y="4239249"/>
-            <a:ext cx="6880860" cy="526085"/>
+            <a:off x="2011680" y="4170426"/>
+            <a:ext cx="6880860" cy="535940"/>
           </a:xfrm>
           <a:prstGeom prst="rect">
             <a:avLst/>
@@ -13574,11 +13809,11 @@
           <a:p>
             <a:pPr algn="l">
               <a:lnSpc>
-                <a:spcPct val="140000"/>
-              </a:lnSpc>
-            </a:pPr>
-            <a:r>
-              <a:rPr sz="2300" i="0" b="0">
+                <a:spcPts val="3500"/>
+              </a:lnSpc>
+            </a:pPr>
+            <a:r>
+              <a:rPr sz="2500" i="0" b="0">
                 <a:solidFill>
                   <a:srgbClr val="1C1C1A"/>
                 </a:solidFill>
@@ -13597,8 +13832,8 @@
         </p:nvSpPr>
         <p:spPr>
           <a:xfrm>
-            <a:off x="2011680" y="4929926"/>
-            <a:ext cx="6880860" cy="1480414"/>
+            <a:off x="2011680" y="4907534"/>
+            <a:ext cx="6880860" cy="1424940"/>
           </a:xfrm>
           <a:prstGeom prst="rect">
             <a:avLst/>
@@ -13613,11 +13848,11 @@
           <a:p>
             <a:pPr algn="l">
               <a:lnSpc>
-                <a:spcPct val="140000"/>
-              </a:lnSpc>
-            </a:pPr>
-            <a:r>
-              <a:rPr sz="2100" i="0" b="0">
+                <a:spcPts val="3500"/>
+              </a:lnSpc>
+            </a:pPr>
+            <a:r>
+              <a:rPr sz="2500" i="0" b="0">
                 <a:solidFill>
                   <a:srgbClr val="6B6B66"/>
                 </a:solidFill>
@@ -13636,14 +13871,14 @@
         </p:nvSpPr>
         <p:spPr>
           <a:xfrm>
-            <a:off x="9395460" y="3983217"/>
-            <a:ext cx="6880860" cy="10973"/>
+            <a:off x="9395460" y="3896106"/>
+            <a:ext cx="6880860" cy="56693"/>
           </a:xfrm>
           <a:prstGeom prst="rect">
             <a:avLst/>
           </a:prstGeom>
           <a:solidFill>
-            <a:srgbClr val="DFDDD7"/>
+            <a:srgbClr val="CC754E"/>
           </a:solidFill>
           <a:ln>
             <a:noFill/>
@@ -13680,8 +13915,8 @@
         </p:nvSpPr>
         <p:spPr>
           <a:xfrm>
-            <a:off x="9395460" y="4239249"/>
-            <a:ext cx="6880860" cy="526085"/>
+            <a:off x="9395460" y="4170426"/>
+            <a:ext cx="6880860" cy="535940"/>
           </a:xfrm>
           <a:prstGeom prst="rect">
             <a:avLst/>
@@ -13696,11 +13931,11 @@
           <a:p>
             <a:pPr algn="l">
               <a:lnSpc>
-                <a:spcPct val="140000"/>
-              </a:lnSpc>
-            </a:pPr>
-            <a:r>
-              <a:rPr sz="2300" i="0" b="0">
+                <a:spcPts val="3500"/>
+              </a:lnSpc>
+            </a:pPr>
+            <a:r>
+              <a:rPr sz="2500" i="0" b="0">
                 <a:solidFill>
                   <a:srgbClr val="1C1C1A"/>
                 </a:solidFill>
@@ -13719,8 +13954,8 @@
         </p:nvSpPr>
         <p:spPr>
           <a:xfrm>
-            <a:off x="9395460" y="4929926"/>
-            <a:ext cx="6880860" cy="1480414"/>
+            <a:off x="9395460" y="4907534"/>
+            <a:ext cx="6880860" cy="1424940"/>
           </a:xfrm>
           <a:prstGeom prst="rect">
             <a:avLst/>
@@ -13735,11 +13970,11 @@
           <a:p>
             <a:pPr algn="l">
               <a:lnSpc>
-                <a:spcPct val="140000"/>
-              </a:lnSpc>
-            </a:pPr>
-            <a:r>
-              <a:rPr sz="2100" i="0" b="0">
+                <a:spcPts val="3500"/>
+              </a:lnSpc>
+            </a:pPr>
+            <a:r>
+              <a:rPr sz="2500" i="0" b="0">
                 <a:solidFill>
                   <a:srgbClr val="6B6B66"/>
                 </a:solidFill>
@@ -13752,14 +13987,58 @@
       </p:sp>
       <p:sp>
         <p:nvSpPr>
-          <p:cNvPr id="12" name="TextBox 11"/>
+          <p:cNvPr id="12" name="Rectangle 11"/>
+          <p:cNvSpPr/>
+          <p:nvPr/>
+        </p:nvSpPr>
+        <p:spPr>
+          <a:xfrm>
+            <a:off x="9133942" y="4207002"/>
+            <a:ext cx="19202" cy="1979168"/>
+          </a:xfrm>
+          <a:prstGeom prst="rect">
+            <a:avLst/>
+          </a:prstGeom>
+          <a:solidFill>
+            <a:srgbClr val="CC754E"/>
+          </a:solidFill>
+          <a:ln>
+            <a:noFill/>
+          </a:ln>
+          <a:effectLst/>
+        </p:spPr>
+        <p:style>
+          <a:lnRef idx="1">
+            <a:schemeClr val="accent1"/>
+          </a:lnRef>
+          <a:fillRef idx="3">
+            <a:schemeClr val="accent1"/>
+          </a:fillRef>
+          <a:effectRef idx="2">
+            <a:schemeClr val="accent1"/>
+          </a:effectRef>
+          <a:fontRef idx="minor">
+            <a:schemeClr val="lt1"/>
+          </a:fontRef>
+        </p:style>
+        <p:txBody>
+          <a:bodyPr rtlCol="0" anchor="ctr"/>
+          <a:lstStyle/>
+          <a:p>
+            <a:pPr algn="ctr"/>
+          </a:p>
+        </p:txBody>
+      </p:sp>
+      <p:sp>
+        <p:nvSpPr>
+          <p:cNvPr id="13" name="TextBox 12"/>
           <p:cNvSpPr txBox="1"/>
           <p:nvPr/>
         </p:nvSpPr>
         <p:spPr>
           <a:xfrm>
-            <a:off x="2011680" y="6821820"/>
-            <a:ext cx="12252960" cy="1017422"/>
+            <a:off x="3986784" y="6899402"/>
+            <a:ext cx="10314432" cy="980440"/>
           </a:xfrm>
           <a:prstGeom prst="rect">
             <a:avLst/>
@@ -13772,13 +14051,13 @@
           </a:bodyPr>
           <a:lstStyle/>
           <a:p>
-            <a:pPr algn="l">
-              <a:lnSpc>
-                <a:spcPct val="140000"/>
-              </a:lnSpc>
-            </a:pPr>
-            <a:r>
-              <a:rPr sz="2100" i="0" b="0">
+            <a:pPr algn="ctr">
+              <a:lnSpc>
+                <a:spcPts val="3500"/>
+              </a:lnSpc>
+            </a:pPr>
+            <a:r>
+              <a:rPr sz="2500" i="0" b="0">
                 <a:solidFill>
                   <a:srgbClr val="6B6B66"/>
                 </a:solidFill>
@@ -13895,8 +14174,8 @@
         </p:nvSpPr>
         <p:spPr>
           <a:xfrm>
-            <a:off x="2011680" y="3036295"/>
-            <a:ext cx="14264640" cy="882396"/>
+            <a:off x="2011680" y="2821051"/>
+            <a:ext cx="14264640" cy="1005078"/>
           </a:xfrm>
           <a:prstGeom prst="rect">
             <a:avLst/>
@@ -13911,7 +14190,7 @@
           <a:p>
             <a:pPr algn="l">
               <a:lnSpc>
-                <a:spcPct val="114000"/>
+                <a:spcPts val="5754"/>
               </a:lnSpc>
             </a:pPr>
             <a:r>
@@ -13921,7 +14200,25 @@
                 </a:solidFill>
                 <a:latin typeface="Outfit 1 Light"/>
               </a:rPr>
-              <a:t>TRANSFORMAR POSSIBILIDADES EM CRIAÇÃO.</a:t>
+              <a:t>TRANSFORMAR POSSIBILIDADES EM </a:t>
+            </a:r>
+            <a:r>
+              <a:rPr sz="4200" i="0" b="0">
+                <a:solidFill>
+                  <a:srgbClr val="1C1C1A"/>
+                </a:solidFill>
+                <a:latin typeface="Outfit 1 Bold"/>
+              </a:rPr>
+              <a:t>CRIAÇÃO</a:t>
+            </a:r>
+            <a:r>
+              <a:rPr sz="4200" i="0" b="0">
+                <a:solidFill>
+                  <a:srgbClr val="1C1C1A"/>
+                </a:solidFill>
+                <a:latin typeface="Outfit 1 Light"/>
+              </a:rPr>
+              <a:t>.</a:t>
             </a:r>
           </a:p>
         </p:txBody>
@@ -13934,14 +14231,14 @@
         </p:nvSpPr>
         <p:spPr>
           <a:xfrm>
-            <a:off x="2011680" y="3973189"/>
+            <a:off x="2011680" y="3734689"/>
             <a:ext cx="14264640" cy="10973"/>
           </a:xfrm>
           <a:prstGeom prst="rect">
             <a:avLst/>
           </a:prstGeom>
           <a:solidFill>
-            <a:srgbClr val="DFDDD7"/>
+            <a:srgbClr val="A5A49F"/>
           </a:solidFill>
           <a:ln>
             <a:noFill/>
@@ -13978,14 +14275,14 @@
         </p:nvSpPr>
         <p:spPr>
           <a:xfrm>
-            <a:off x="2011680" y="4320661"/>
-            <a:ext cx="6880860" cy="10973"/>
+            <a:off x="2011680" y="4082161"/>
+            <a:ext cx="6880860" cy="56693"/>
           </a:xfrm>
           <a:prstGeom prst="rect">
             <a:avLst/>
           </a:prstGeom>
           <a:solidFill>
-            <a:srgbClr val="DFDDD7"/>
+            <a:srgbClr val="CC754E"/>
           </a:solidFill>
           <a:ln>
             <a:noFill/>
@@ -14022,8 +14319,8 @@
         </p:nvSpPr>
         <p:spPr>
           <a:xfrm>
-            <a:off x="2011680" y="4576693"/>
-            <a:ext cx="6880860" cy="526085"/>
+            <a:off x="2011680" y="4356481"/>
+            <a:ext cx="6880860" cy="535940"/>
           </a:xfrm>
           <a:prstGeom prst="rect">
             <a:avLst/>
@@ -14038,11 +14335,11 @@
           <a:p>
             <a:pPr algn="l">
               <a:lnSpc>
-                <a:spcPct val="140000"/>
-              </a:lnSpc>
-            </a:pPr>
-            <a:r>
-              <a:rPr sz="2300" i="0" b="0">
+                <a:spcPts val="3500"/>
+              </a:lnSpc>
+            </a:pPr>
+            <a:r>
+              <a:rPr sz="2500" i="0" b="0">
                 <a:solidFill>
                   <a:srgbClr val="1C1C1A"/>
                 </a:solidFill>
@@ -14061,8 +14358,8 @@
         </p:nvSpPr>
         <p:spPr>
           <a:xfrm>
-            <a:off x="2011680" y="5267370"/>
-            <a:ext cx="6880860" cy="1480414"/>
+            <a:off x="2011680" y="5093589"/>
+            <a:ext cx="6880860" cy="1424940"/>
           </a:xfrm>
           <a:prstGeom prst="rect">
             <a:avLst/>
@@ -14077,11 +14374,11 @@
           <a:p>
             <a:pPr algn="l">
               <a:lnSpc>
-                <a:spcPct val="140000"/>
-              </a:lnSpc>
-            </a:pPr>
-            <a:r>
-              <a:rPr sz="2100" i="0" b="0">
+                <a:spcPts val="3500"/>
+              </a:lnSpc>
+            </a:pPr>
+            <a:r>
+              <a:rPr sz="2500" i="0" b="0">
                 <a:solidFill>
                   <a:srgbClr val="6B6B66"/>
                 </a:solidFill>
@@ -14100,14 +14397,14 @@
         </p:nvSpPr>
         <p:spPr>
           <a:xfrm>
-            <a:off x="9395460" y="4320661"/>
-            <a:ext cx="6880860" cy="10973"/>
+            <a:off x="9395460" y="4082161"/>
+            <a:ext cx="6880860" cy="56693"/>
           </a:xfrm>
           <a:prstGeom prst="rect">
             <a:avLst/>
           </a:prstGeom>
           <a:solidFill>
-            <a:srgbClr val="DFDDD7"/>
+            <a:srgbClr val="CC754E"/>
           </a:solidFill>
           <a:ln>
             <a:noFill/>
@@ -14144,8 +14441,8 @@
         </p:nvSpPr>
         <p:spPr>
           <a:xfrm>
-            <a:off x="9395460" y="4576693"/>
-            <a:ext cx="6880860" cy="526085"/>
+            <a:off x="9395460" y="4356481"/>
+            <a:ext cx="6880860" cy="535940"/>
           </a:xfrm>
           <a:prstGeom prst="rect">
             <a:avLst/>
@@ -14160,11 +14457,11 @@
           <a:p>
             <a:pPr algn="l">
               <a:lnSpc>
-                <a:spcPct val="140000"/>
-              </a:lnSpc>
-            </a:pPr>
-            <a:r>
-              <a:rPr sz="2300" i="0" b="0">
+                <a:spcPts val="3500"/>
+              </a:lnSpc>
+            </a:pPr>
+            <a:r>
+              <a:rPr sz="2500" i="0" b="0">
                 <a:solidFill>
                   <a:srgbClr val="1C1C1A"/>
                 </a:solidFill>
@@ -14183,8 +14480,8 @@
         </p:nvSpPr>
         <p:spPr>
           <a:xfrm>
-            <a:off x="9395460" y="5267370"/>
-            <a:ext cx="6880860" cy="1480414"/>
+            <a:off x="9395460" y="5093589"/>
+            <a:ext cx="6880860" cy="1869440"/>
           </a:xfrm>
           <a:prstGeom prst="rect">
             <a:avLst/>
@@ -14199,11 +14496,11 @@
           <a:p>
             <a:pPr algn="l">
               <a:lnSpc>
-                <a:spcPct val="140000"/>
-              </a:lnSpc>
-            </a:pPr>
-            <a:r>
-              <a:rPr sz="2100" i="0" b="0">
+                <a:spcPts val="3500"/>
+              </a:lnSpc>
+            </a:pPr>
+            <a:r>
+              <a:rPr sz="2500" i="0" b="0">
                 <a:solidFill>
                   <a:srgbClr val="6B6B66"/>
                 </a:solidFill>
@@ -14211,6 +14508,50 @@
               </a:rPr>
               <a:t>Consolidar sua identidade independente e ser reconhecida pelo consumidor final pela criatividade, originalidade e qualidade dos produtos.</a:t>
             </a:r>
+          </a:p>
+        </p:txBody>
+      </p:sp>
+      <p:sp>
+        <p:nvSpPr>
+          <p:cNvPr id="12" name="Rectangle 11"/>
+          <p:cNvSpPr/>
+          <p:nvPr/>
+        </p:nvSpPr>
+        <p:spPr>
+          <a:xfrm>
+            <a:off x="9133942" y="4393057"/>
+            <a:ext cx="19202" cy="2423668"/>
+          </a:xfrm>
+          <a:prstGeom prst="rect">
+            <a:avLst/>
+          </a:prstGeom>
+          <a:solidFill>
+            <a:srgbClr val="CC754E"/>
+          </a:solidFill>
+          <a:ln>
+            <a:noFill/>
+          </a:ln>
+          <a:effectLst/>
+        </p:spPr>
+        <p:style>
+          <a:lnRef idx="1">
+            <a:schemeClr val="accent1"/>
+          </a:lnRef>
+          <a:fillRef idx="3">
+            <a:schemeClr val="accent1"/>
+          </a:fillRef>
+          <a:effectRef idx="2">
+            <a:schemeClr val="accent1"/>
+          </a:effectRef>
+          <a:fontRef idx="minor">
+            <a:schemeClr val="lt1"/>
+          </a:fontRef>
+        </p:style>
+        <p:txBody>
+          <a:bodyPr rtlCol="0" anchor="ctr"/>
+          <a:lstStyle/>
+          <a:p>
+            <a:pPr algn="ctr"/>
           </a:p>
         </p:txBody>
       </p:sp>
@@ -14312,59 +14653,22 @@
       </p:sp>
       <p:sp>
         <p:nvSpPr>
-          <p:cNvPr id="4" name="TextBox 3"/>
-          <p:cNvSpPr txBox="1"/>
-          <p:nvPr/>
-        </p:nvSpPr>
-        <p:spPr>
-          <a:xfrm>
-            <a:off x="2011680" y="3902751"/>
-            <a:ext cx="14081760" cy="1742664"/>
-          </a:xfrm>
-          <a:prstGeom prst="rect">
-            <a:avLst/>
-          </a:prstGeom>
-          <a:noFill/>
-        </p:spPr>
-        <p:txBody>
-          <a:bodyPr wrap="square" anchor="t" lIns="0" rIns="0" tIns="0" bIns="0">
-            <a:spAutoFit/>
-          </a:bodyPr>
-          <a:lstStyle/>
-          <a:p>
-            <a:pPr algn="l">
-              <a:lnSpc>
-                <a:spcPct val="126000"/>
-              </a:lnSpc>
-            </a:pPr>
-            <a:r>
-              <a:rPr sz="7400" i="0" b="0">
-                <a:solidFill>
-                  <a:srgbClr val="FFFFFF"/>
-                </a:solidFill>
-                <a:latin typeface="Outfit 1 Light"/>
-              </a:rPr>
-              <a:t>Criatividade que transforma.</a:t>
-            </a:r>
-          </a:p>
-        </p:txBody>
-      </p:sp>
-      <p:sp>
-        <p:nvSpPr>
-          <p:cNvPr id="5" name="Rectangle 4"/>
+          <p:cNvPr id="4" name="Rounded Rectangle 3"/>
           <p:cNvSpPr/>
           <p:nvPr/>
         </p:nvSpPr>
         <p:spPr>
           <a:xfrm>
-            <a:off x="2011680" y="5326899"/>
-            <a:ext cx="1188720" cy="27432"/>
-          </a:xfrm>
-          <a:prstGeom prst="rect">
-            <a:avLst/>
+            <a:off x="10479024" y="1028700"/>
+            <a:ext cx="7808976" cy="2077212"/>
+          </a:xfrm>
+          <a:prstGeom prst="roundRect">
+            <a:avLst>
+              <a:gd name="adj" fmla="val 7923"/>
+            </a:avLst>
           </a:prstGeom>
           <a:solidFill>
-            <a:srgbClr val="A9724A"/>
+            <a:srgbClr val="F8F7F2"/>
           </a:solidFill>
           <a:ln>
             <a:noFill/>
@@ -14395,14 +14699,14 @@
       </p:sp>
       <p:sp>
         <p:nvSpPr>
-          <p:cNvPr id="6" name="TextBox 5"/>
+          <p:cNvPr id="5" name="TextBox 4"/>
           <p:cNvSpPr txBox="1"/>
           <p:nvPr/>
         </p:nvSpPr>
         <p:spPr>
           <a:xfrm>
-            <a:off x="2011680" y="5601219"/>
-            <a:ext cx="11887200" cy="554431"/>
+            <a:off x="11045952" y="1595628"/>
+            <a:ext cx="6675120" cy="586232"/>
           </a:xfrm>
           <a:prstGeom prst="rect">
             <a:avLst/>
@@ -14417,13 +14721,52 @@
           <a:p>
             <a:pPr algn="l">
               <a:lnSpc>
-                <a:spcPct val="140000"/>
-              </a:lnSpc>
-            </a:pPr>
-            <a:r>
-              <a:rPr sz="2100" i="0" b="0">
-                <a:solidFill>
-                  <a:srgbClr val="FFFFFF"/>
+                <a:spcPts val="3752"/>
+              </a:lnSpc>
+            </a:pPr>
+            <a:r>
+              <a:rPr sz="2800" i="0" b="0">
+                <a:solidFill>
+                  <a:srgbClr val="1C1C1A"/>
+                </a:solidFill>
+                <a:latin typeface="Outfit 1 Light"/>
+              </a:rPr>
+              <a:t>Criatividade que transforma.</a:t>
+            </a:r>
+          </a:p>
+        </p:txBody>
+      </p:sp>
+      <p:sp>
+        <p:nvSpPr>
+          <p:cNvPr id="6" name="TextBox 5"/>
+          <p:cNvSpPr txBox="1"/>
+          <p:nvPr/>
+        </p:nvSpPr>
+        <p:spPr>
+          <a:xfrm>
+            <a:off x="11045952" y="2236724"/>
+            <a:ext cx="6675120" cy="393700"/>
+          </a:xfrm>
+          <a:prstGeom prst="rect">
+            <a:avLst/>
+          </a:prstGeom>
+          <a:noFill/>
+        </p:spPr>
+        <p:txBody>
+          <a:bodyPr wrap="square" anchor="t" lIns="0" rIns="0" tIns="0" bIns="0">
+            <a:spAutoFit/>
+          </a:bodyPr>
+          <a:lstStyle/>
+          <a:p>
+            <a:pPr algn="l">
+              <a:lnSpc>
+                <a:spcPts val="2379"/>
+              </a:lnSpc>
+            </a:pPr>
+            <a:r>
+              <a:rPr sz="1700" i="0" b="0">
+                <a:solidFill>
+                  <a:srgbClr val="6B6B66"/>
                 </a:solidFill>
                 <a:latin typeface="Outfit 1 Light"/>
               </a:rPr>
@@ -14440,8 +14783,8 @@
         </p:nvSpPr>
         <p:spPr>
           <a:xfrm>
-            <a:off x="2011680" y="8220558"/>
-            <a:ext cx="11521440" cy="484530"/>
+            <a:off x="2011680" y="8293100"/>
+            <a:ext cx="11521440" cy="411988"/>
           </a:xfrm>
           <a:prstGeom prst="rect">
             <a:avLst/>
@@ -14584,8 +14927,8 @@
         </p:nvSpPr>
         <p:spPr>
           <a:xfrm>
-            <a:off x="2011680" y="3411829"/>
-            <a:ext cx="3657600" cy="274320"/>
+            <a:off x="2011680" y="2992310"/>
+            <a:ext cx="15247620" cy="292608"/>
           </a:xfrm>
           <a:prstGeom prst="rect">
             <a:avLst/>
@@ -14598,9 +14941,9 @@
           </a:bodyPr>
           <a:lstStyle/>
           <a:p>
-            <a:pPr algn="l">
-              <a:lnSpc>
-                <a:spcPct val="140000"/>
+            <a:pPr algn="r">
+              <a:lnSpc>
+                <a:spcPts val="1959"/>
               </a:lnSpc>
             </a:pPr>
             <a:r>
@@ -14623,8 +14966,8 @@
         </p:nvSpPr>
         <p:spPr>
           <a:xfrm>
-            <a:off x="2011680" y="3960469"/>
-            <a:ext cx="12801600" cy="1551940"/>
+            <a:off x="2011680" y="3467798"/>
+            <a:ext cx="15247620" cy="2187575"/>
           </a:xfrm>
           <a:prstGeom prst="rect">
             <a:avLst/>
@@ -14637,17 +14980,17 @@
           </a:bodyPr>
           <a:lstStyle/>
           <a:p>
-            <a:pPr algn="l">
-              <a:lnSpc>
-                <a:spcPct val="100000"/>
-              </a:lnSpc>
-            </a:pPr>
-            <a:r>
-              <a:rPr sz="9400" i="0" b="0">
+            <a:pPr algn="r">
+              <a:lnSpc>
+                <a:spcPts val="15785"/>
+              </a:lnSpc>
+            </a:pPr>
+            <a:r>
+              <a:rPr sz="14350" i="0" b="0">
                 <a:solidFill>
                   <a:srgbClr val="FFFFFF"/>
                 </a:solidFill>
-                <a:latin typeface="Outfit 1 Light"/>
+                <a:latin typeface="Outfit 1 Bold"/>
               </a:rPr>
               <a:t>SÍNTESE</a:t>
             </a:r>
@@ -14656,58 +14999,14 @@
       </p:sp>
       <p:sp>
         <p:nvSpPr>
-          <p:cNvPr id="6" name="Rectangle 5"/>
-          <p:cNvSpPr/>
-          <p:nvPr/>
-        </p:nvSpPr>
-        <p:spPr>
-          <a:xfrm>
-            <a:off x="2011680" y="5751677"/>
-            <a:ext cx="14264640" cy="10973"/>
-          </a:xfrm>
-          <a:prstGeom prst="rect">
-            <a:avLst/>
-          </a:prstGeom>
-          <a:solidFill>
-            <a:srgbClr val="A5A49F"/>
-          </a:solidFill>
-          <a:ln>
-            <a:noFill/>
-          </a:ln>
-          <a:effectLst/>
-        </p:spPr>
-        <p:style>
-          <a:lnRef idx="1">
-            <a:schemeClr val="accent1"/>
-          </a:lnRef>
-          <a:fillRef idx="3">
-            <a:schemeClr val="accent1"/>
-          </a:fillRef>
-          <a:effectRef idx="2">
-            <a:schemeClr val="accent1"/>
-          </a:effectRef>
-          <a:fontRef idx="minor">
-            <a:schemeClr val="lt1"/>
-          </a:fontRef>
-        </p:style>
-        <p:txBody>
-          <a:bodyPr rtlCol="0" anchor="ctr"/>
-          <a:lstStyle/>
-          <a:p>
-            <a:pPr algn="ctr"/>
-          </a:p>
-        </p:txBody>
-      </p:sp>
-      <p:sp>
-        <p:nvSpPr>
-          <p:cNvPr id="7" name="TextBox 6"/>
+          <p:cNvPr id="6" name="TextBox 5"/>
           <p:cNvSpPr txBox="1"/>
           <p:nvPr/>
         </p:nvSpPr>
         <p:spPr>
           <a:xfrm>
-            <a:off x="2011680" y="6025997"/>
-            <a:ext cx="11887200" cy="620573"/>
+            <a:off x="2011680" y="5728526"/>
+            <a:ext cx="15247620" cy="770636"/>
           </a:xfrm>
           <a:prstGeom prst="rect">
             <a:avLst/>
@@ -14720,13 +15019,13 @@
           </a:bodyPr>
           <a:lstStyle/>
           <a:p>
-            <a:pPr algn="l">
-              <a:lnSpc>
-                <a:spcPct val="140000"/>
-              </a:lnSpc>
-            </a:pPr>
-            <a:r>
-              <a:rPr sz="2400" i="0" b="0">
+            <a:pPr algn="r">
+              <a:lnSpc>
+                <a:spcPts val="4988"/>
+              </a:lnSpc>
+            </a:pPr>
+            <a:r>
+              <a:rPr sz="4300" i="0" b="0">
                 <a:solidFill>
                   <a:srgbClr val="FFFFFF"/>
                 </a:solidFill>
@@ -14739,14 +15038,14 @@
       </p:sp>
       <p:sp>
         <p:nvSpPr>
-          <p:cNvPr id="8" name="TextBox 7"/>
+          <p:cNvPr id="7" name="TextBox 6"/>
           <p:cNvSpPr txBox="1"/>
           <p:nvPr/>
         </p:nvSpPr>
         <p:spPr>
           <a:xfrm>
-            <a:off x="2011680" y="8220558"/>
-            <a:ext cx="11521440" cy="484530"/>
+            <a:off x="2011680" y="8293100"/>
+            <a:ext cx="11521440" cy="411988"/>
           </a:xfrm>
           <a:prstGeom prst="rect">
             <a:avLst/>
@@ -14892,7 +15191,7 @@
         <p:spPr>
           <a:xfrm>
             <a:off x="2011680" y="1723644"/>
-            <a:ext cx="14264640" cy="882396"/>
+            <a:ext cx="14264640" cy="1005078"/>
           </a:xfrm>
           <a:prstGeom prst="rect">
             <a:avLst/>
@@ -14907,7 +15206,7 @@
           <a:p>
             <a:pPr algn="l">
               <a:lnSpc>
-                <a:spcPct val="114000"/>
+                <a:spcPts val="5754"/>
               </a:lnSpc>
             </a:pPr>
             <a:r>
@@ -14917,7 +15216,25 @@
                 </a:solidFill>
                 <a:latin typeface="Outfit 1 Light"/>
               </a:rPr>
-              <a:t>UMA CULTURA COMPARTILHADA. DUAS IDENTIDADES DE MARCA.</a:t>
+              <a:t>UMA CULTURA COMPARTILHADA. </a:t>
+            </a:r>
+            <a:r>
+              <a:rPr sz="4200" i="0" b="0">
+                <a:solidFill>
+                  <a:srgbClr val="1C1C1A"/>
+                </a:solidFill>
+                <a:latin typeface="Outfit 1 Bold"/>
+              </a:rPr>
+              <a:t>DUAS IDENTIDADES DE MARCA</a:t>
+            </a:r>
+            <a:r>
+              <a:rPr sz="4200" i="0" b="0">
+                <a:solidFill>
+                  <a:srgbClr val="1C1C1A"/>
+                </a:solidFill>
+                <a:latin typeface="Outfit 1 Light"/>
+              </a:rPr>
+              <a:t>.</a:t>
             </a:r>
           </a:p>
         </p:txBody>
@@ -14930,14 +15247,14 @@
         </p:nvSpPr>
         <p:spPr>
           <a:xfrm>
-            <a:off x="2011680" y="3414552"/>
+            <a:off x="2011680" y="3368040"/>
             <a:ext cx="14264640" cy="10973"/>
           </a:xfrm>
           <a:prstGeom prst="rect">
             <a:avLst/>
           </a:prstGeom>
           <a:solidFill>
-            <a:srgbClr val="DFDDD7"/>
+            <a:srgbClr val="A5A49F"/>
           </a:solidFill>
           <a:ln>
             <a:noFill/>
@@ -14974,14 +15291,14 @@
         </p:nvSpPr>
         <p:spPr>
           <a:xfrm>
-            <a:off x="2011680" y="3762024"/>
+            <a:off x="2011680" y="3715512"/>
             <a:ext cx="14264640" cy="10973"/>
           </a:xfrm>
           <a:prstGeom prst="rect">
             <a:avLst/>
           </a:prstGeom>
           <a:solidFill>
-            <a:srgbClr val="DFDDD7"/>
+            <a:srgbClr val="A5A49F"/>
           </a:solidFill>
           <a:ln>
             <a:noFill/>
@@ -15018,8 +15335,8 @@
         </p:nvSpPr>
         <p:spPr>
           <a:xfrm>
-            <a:off x="2011680" y="3999768"/>
-            <a:ext cx="4754880" cy="256032"/>
+            <a:off x="2011680" y="3989832"/>
+            <a:ext cx="4754880" cy="365760"/>
           </a:xfrm>
           <a:prstGeom prst="rect">
             <a:avLst/>
@@ -15034,13 +15351,13 @@
           <a:p>
             <a:pPr algn="l">
               <a:lnSpc>
-                <a:spcPct val="140000"/>
-              </a:lnSpc>
-            </a:pPr>
-            <a:r>
-              <a:rPr sz="1400" i="0" b="0" spc="220">
-                <a:solidFill>
-                  <a:srgbClr val="A5A49F"/>
+                <a:spcPts val="2520"/>
+              </a:lnSpc>
+            </a:pPr>
+            <a:r>
+              <a:rPr sz="1800" i="0" b="0" spc="282">
+                <a:solidFill>
+                  <a:srgbClr val="1C1C1A"/>
                 </a:solidFill>
                 <a:latin typeface="Outfit 1 Semi-Bold"/>
               </a:rPr>
@@ -15057,8 +15374,8 @@
         </p:nvSpPr>
         <p:spPr>
           <a:xfrm>
-            <a:off x="7132320" y="3926616"/>
-            <a:ext cx="9144000" cy="1185916"/>
+            <a:off x="7132320" y="3916680"/>
+            <a:ext cx="9144000" cy="1164844"/>
           </a:xfrm>
           <a:prstGeom prst="rect">
             <a:avLst/>
@@ -15073,11 +15390,11 @@
           <a:p>
             <a:pPr algn="l">
               <a:lnSpc>
-                <a:spcPct val="140000"/>
-              </a:lnSpc>
-            </a:pPr>
-            <a:r>
-              <a:rPr sz="2400" i="0" b="0">
+                <a:spcPts val="3500"/>
+              </a:lnSpc>
+            </a:pPr>
+            <a:r>
+              <a:rPr sz="2500" i="0" b="0">
                 <a:solidFill>
                   <a:srgbClr val="1C1C1A"/>
                 </a:solidFill>
@@ -15096,14 +15413,14 @@
         </p:nvSpPr>
         <p:spPr>
           <a:xfrm>
-            <a:off x="2011680" y="5185684"/>
+            <a:off x="2011680" y="5154676"/>
             <a:ext cx="14264640" cy="10973"/>
           </a:xfrm>
           <a:prstGeom prst="rect">
             <a:avLst/>
           </a:prstGeom>
           <a:solidFill>
-            <a:srgbClr val="DFDDD7"/>
+            <a:srgbClr val="A5A49F"/>
           </a:solidFill>
           <a:ln>
             <a:noFill/>
@@ -15140,8 +15457,8 @@
         </p:nvSpPr>
         <p:spPr>
           <a:xfrm>
-            <a:off x="2011680" y="5423428"/>
-            <a:ext cx="4754880" cy="256032"/>
+            <a:off x="2011680" y="5428996"/>
+            <a:ext cx="4754880" cy="365760"/>
           </a:xfrm>
           <a:prstGeom prst="rect">
             <a:avLst/>
@@ -15156,13 +15473,13 @@
           <a:p>
             <a:pPr algn="l">
               <a:lnSpc>
-                <a:spcPct val="140000"/>
-              </a:lnSpc>
-            </a:pPr>
-            <a:r>
-              <a:rPr sz="1400" i="0" b="0" spc="220">
-                <a:solidFill>
-                  <a:srgbClr val="A5A49F"/>
+                <a:spcPts val="2520"/>
+              </a:lnSpc>
+            </a:pPr>
+            <a:r>
+              <a:rPr sz="1800" i="0" b="0" spc="282">
+                <a:solidFill>
+                  <a:srgbClr val="1C1C1A"/>
                 </a:solidFill>
                 <a:latin typeface="Outfit 1 Semi-Bold"/>
               </a:rPr>
@@ -15179,8 +15496,8 @@
         </p:nvSpPr>
         <p:spPr>
           <a:xfrm>
-            <a:off x="7132320" y="5350276"/>
-            <a:ext cx="9144000" cy="1185916"/>
+            <a:off x="7132320" y="5355844"/>
+            <a:ext cx="9144000" cy="1164844"/>
           </a:xfrm>
           <a:prstGeom prst="rect">
             <a:avLst/>
@@ -15195,11 +15512,11 @@
           <a:p>
             <a:pPr algn="l">
               <a:lnSpc>
-                <a:spcPct val="140000"/>
-              </a:lnSpc>
-            </a:pPr>
-            <a:r>
-              <a:rPr sz="2400" i="0" b="0">
+                <a:spcPts val="3500"/>
+              </a:lnSpc>
+            </a:pPr>
+            <a:r>
+              <a:rPr sz="2500" i="0" b="0">
                 <a:solidFill>
                   <a:srgbClr val="1C1C1A"/>
                 </a:solidFill>
@@ -15218,14 +15535,14 @@
         </p:nvSpPr>
         <p:spPr>
           <a:xfrm>
-            <a:off x="2011680" y="6609344"/>
+            <a:off x="2011680" y="6593840"/>
             <a:ext cx="14264640" cy="10973"/>
           </a:xfrm>
           <a:prstGeom prst="rect">
             <a:avLst/>
           </a:prstGeom>
           <a:solidFill>
-            <a:srgbClr val="DFDDD7"/>
+            <a:srgbClr val="A5A49F"/>
           </a:solidFill>
           <a:ln>
             <a:noFill/>
@@ -15262,8 +15579,8 @@
         </p:nvSpPr>
         <p:spPr>
           <a:xfrm>
-            <a:off x="2011680" y="6847088"/>
-            <a:ext cx="4754880" cy="256032"/>
+            <a:off x="2011680" y="6868160"/>
+            <a:ext cx="4754880" cy="365760"/>
           </a:xfrm>
           <a:prstGeom prst="rect">
             <a:avLst/>
@@ -15278,13 +15595,13 @@
           <a:p>
             <a:pPr algn="l">
               <a:lnSpc>
-                <a:spcPct val="140000"/>
-              </a:lnSpc>
-            </a:pPr>
-            <a:r>
-              <a:rPr sz="1400" i="0" b="0" spc="220">
-                <a:solidFill>
-                  <a:srgbClr val="A9724A"/>
+                <a:spcPts val="2520"/>
+              </a:lnSpc>
+            </a:pPr>
+            <a:r>
+              <a:rPr sz="1800" i="0" b="0" spc="282">
+                <a:solidFill>
+                  <a:srgbClr val="CC754E"/>
                 </a:solidFill>
                 <a:latin typeface="Outfit 1 Semi-Bold"/>
               </a:rPr>
@@ -15301,8 +15618,8 @@
         </p:nvSpPr>
         <p:spPr>
           <a:xfrm>
-            <a:off x="7132320" y="6773936"/>
-            <a:ext cx="9144000" cy="1185916"/>
+            <a:off x="7132320" y="6795008"/>
+            <a:ext cx="9144000" cy="1164844"/>
           </a:xfrm>
           <a:prstGeom prst="rect">
             <a:avLst/>
@@ -15317,11 +15634,11 @@
           <a:p>
             <a:pPr algn="l">
               <a:lnSpc>
-                <a:spcPct val="140000"/>
-              </a:lnSpc>
-            </a:pPr>
-            <a:r>
-              <a:rPr sz="2400" i="0" b="0">
+                <a:spcPts val="3500"/>
+              </a:lnSpc>
+            </a:pPr>
+            <a:r>
+              <a:rPr sz="2500" i="0" b="0">
                 <a:solidFill>
                   <a:srgbClr val="1C1C1A"/>
                 </a:solidFill>
@@ -15347,7 +15664,7 @@
             <a:avLst/>
           </a:prstGeom>
           <a:solidFill>
-            <a:srgbClr val="A9724A"/>
+            <a:srgbClr val="CC754E"/>
           </a:solidFill>
           <a:ln>
             <a:noFill/>
@@ -15482,14 +15799,14 @@
         </p:nvSpPr>
         <p:spPr>
           <a:xfrm>
-            <a:off x="2011680" y="3065526"/>
+            <a:off x="2011680" y="3566922"/>
             <a:ext cx="1188720" cy="27432"/>
           </a:xfrm>
           <a:prstGeom prst="rect">
             <a:avLst/>
           </a:prstGeom>
           <a:solidFill>
-            <a:srgbClr val="A9724A"/>
+            <a:srgbClr val="CC754E"/>
           </a:solidFill>
           <a:ln>
             <a:noFill/>
@@ -15526,8 +15843,8 @@
         </p:nvSpPr>
         <p:spPr>
           <a:xfrm>
-            <a:off x="2011680" y="3467862"/>
-            <a:ext cx="14081760" cy="3250692"/>
+            <a:off x="2011680" y="3969258"/>
+            <a:ext cx="14081760" cy="2247900"/>
           </a:xfrm>
           <a:prstGeom prst="rect">
             <a:avLst/>
@@ -15542,13 +15859,13 @@
           <a:p>
             <a:pPr algn="l">
               <a:lnSpc>
-                <a:spcPct val="126000"/>
-              </a:lnSpc>
-            </a:pPr>
-            <a:r>
-              <a:rPr sz="5000" i="0" b="0">
-                <a:solidFill>
-                  <a:srgbClr val="1C1C1A"/>
+                <a:spcPts val="5180"/>
+              </a:lnSpc>
+            </a:pPr>
+            <a:r>
+              <a:rPr sz="3700" i="0" b="0">
+                <a:solidFill>
+                  <a:srgbClr val="323330"/>
                 </a:solidFill>
                 <a:latin typeface="Outfit 1 Light"/>
               </a:rPr>
@@ -15558,13 +15875,13 @@
           <a:p>
             <a:pPr algn="l">
               <a:lnSpc>
-                <a:spcPct val="126000"/>
-              </a:lnSpc>
-            </a:pPr>
-            <a:r>
-              <a:rPr sz="5000" i="0" b="0">
-                <a:solidFill>
-                  <a:srgbClr val="1C1C1A"/>
+                <a:spcPts val="5180"/>
+              </a:lnSpc>
+            </a:pPr>
+            <a:r>
+              <a:rPr sz="3700" i="0" b="0">
+                <a:solidFill>
+                  <a:srgbClr val="323330"/>
                 </a:solidFill>
                 <a:latin typeface="Outfit 1 Light"/>
               </a:rPr>
@@ -15574,13 +15891,13 @@
           <a:p>
             <a:pPr algn="l">
               <a:lnSpc>
-                <a:spcPct val="126000"/>
-              </a:lnSpc>
-            </a:pPr>
-            <a:r>
-              <a:rPr sz="5000" i="0" b="0">
-                <a:solidFill>
-                  <a:srgbClr val="1C1C1A"/>
+                <a:spcPts val="5180"/>
+              </a:lnSpc>
+            </a:pPr>
+            <a:r>
+              <a:rPr sz="3700" i="0" b="0">
+                <a:solidFill>
+                  <a:srgbClr val="323330"/>
                 </a:solidFill>
                 <a:latin typeface="Outfit 1 Light"/>
               </a:rPr>
@@ -15695,8 +16012,8 @@
         </p:nvSpPr>
         <p:spPr>
           <a:xfrm>
-            <a:off x="2011680" y="3151327"/>
-            <a:ext cx="14264640" cy="882396"/>
+            <a:off x="2011680" y="3190621"/>
+            <a:ext cx="14264640" cy="1005078"/>
           </a:xfrm>
           <a:prstGeom prst="rect">
             <a:avLst/>
@@ -15711,7 +16028,7 @@
           <a:p>
             <a:pPr algn="l">
               <a:lnSpc>
-                <a:spcPct val="114000"/>
+                <a:spcPts val="5754"/>
               </a:lnSpc>
             </a:pPr>
             <a:r>
@@ -15734,14 +16051,14 @@
         </p:nvSpPr>
         <p:spPr>
           <a:xfrm>
-            <a:off x="2011680" y="4088221"/>
+            <a:off x="2011680" y="4104259"/>
             <a:ext cx="14264640" cy="10973"/>
           </a:xfrm>
           <a:prstGeom prst="rect">
             <a:avLst/>
           </a:prstGeom>
           <a:solidFill>
-            <a:srgbClr val="DFDDD7"/>
+            <a:srgbClr val="A5A49F"/>
           </a:solidFill>
           <a:ln>
             <a:noFill/>
@@ -15778,14 +16095,14 @@
         </p:nvSpPr>
         <p:spPr>
           <a:xfrm>
-            <a:off x="2011680" y="5391607"/>
+            <a:off x="2011680" y="5430901"/>
             <a:ext cx="6355080" cy="27432"/>
           </a:xfrm>
           <a:prstGeom prst="rect">
             <a:avLst/>
           </a:prstGeom>
           <a:solidFill>
-            <a:srgbClr val="A9724A"/>
+            <a:srgbClr val="CC754E"/>
           </a:solidFill>
           <a:ln>
             <a:noFill/>
@@ -15822,7 +16139,7 @@
         </p:nvSpPr>
         <p:spPr>
           <a:xfrm>
-            <a:off x="2011680" y="5665927"/>
+            <a:off x="2011680" y="5705221"/>
             <a:ext cx="6355080" cy="256032"/>
           </a:xfrm>
           <a:prstGeom prst="rect">
@@ -15838,13 +16155,13 @@
           <a:p>
             <a:pPr algn="l">
               <a:lnSpc>
-                <a:spcPct val="140000"/>
+                <a:spcPts val="1959"/>
               </a:lnSpc>
             </a:pPr>
             <a:r>
               <a:rPr sz="1400" i="0" b="0" spc="220">
                 <a:solidFill>
-                  <a:srgbClr val="A9724A"/>
+                  <a:srgbClr val="CC754E"/>
                 </a:solidFill>
                 <a:latin typeface="Outfit 1 Semi-Bold"/>
               </a:rPr>
@@ -15861,8 +16178,8 @@
         </p:nvSpPr>
         <p:spPr>
           <a:xfrm>
-            <a:off x="2011680" y="6049975"/>
-            <a:ext cx="6355080" cy="564490"/>
+            <a:off x="2011680" y="6089269"/>
+            <a:ext cx="6355080" cy="485902"/>
           </a:xfrm>
           <a:prstGeom prst="rect">
             <a:avLst/>
@@ -15877,11 +16194,11 @@
           <a:p>
             <a:pPr algn="l">
               <a:lnSpc>
-                <a:spcPct val="140000"/>
-              </a:lnSpc>
-            </a:pPr>
-            <a:r>
-              <a:rPr sz="2400" i="0" b="0">
+                <a:spcPts val="3500"/>
+              </a:lnSpc>
+            </a:pPr>
+            <a:r>
+              <a:rPr sz="2500" i="0" b="0">
                 <a:solidFill>
                   <a:srgbClr val="1C1C1A"/>
                 </a:solidFill>
@@ -15900,14 +16217,14 @@
         </p:nvSpPr>
         <p:spPr>
           <a:xfrm>
-            <a:off x="9921240" y="5391607"/>
+            <a:off x="9921240" y="5430901"/>
             <a:ext cx="6355080" cy="10973"/>
           </a:xfrm>
           <a:prstGeom prst="rect">
             <a:avLst/>
           </a:prstGeom>
           <a:solidFill>
-            <a:srgbClr val="DFDDD7"/>
+            <a:srgbClr val="A5A49F"/>
           </a:solidFill>
           <a:ln>
             <a:noFill/>
@@ -15944,7 +16261,7 @@
         </p:nvSpPr>
         <p:spPr>
           <a:xfrm>
-            <a:off x="9921240" y="5665927"/>
+            <a:off x="9921240" y="5705221"/>
             <a:ext cx="6355080" cy="256032"/>
           </a:xfrm>
           <a:prstGeom prst="rect">
@@ -15960,7 +16277,7 @@
           <a:p>
             <a:pPr algn="l">
               <a:lnSpc>
-                <a:spcPct val="140000"/>
+                <a:spcPts val="1959"/>
               </a:lnSpc>
             </a:pPr>
             <a:r>
@@ -15983,8 +16300,8 @@
         </p:nvSpPr>
         <p:spPr>
           <a:xfrm>
-            <a:off x="9921240" y="6049975"/>
-            <a:ext cx="6355080" cy="564490"/>
+            <a:off x="9921240" y="6089269"/>
+            <a:ext cx="6355080" cy="485902"/>
           </a:xfrm>
           <a:prstGeom prst="rect">
             <a:avLst/>
@@ -15999,11 +16316,11 @@
           <a:p>
             <a:pPr algn="l">
               <a:lnSpc>
-                <a:spcPct val="140000"/>
-              </a:lnSpc>
-            </a:pPr>
-            <a:r>
-              <a:rPr sz="2400" i="0" b="0">
+                <a:spcPts val="3500"/>
+              </a:lnSpc>
+            </a:pPr>
+            <a:r>
+              <a:rPr sz="2500" i="0" b="0">
                 <a:solidFill>
                   <a:srgbClr val="1C1C1A"/>
                 </a:solidFill>
@@ -16022,14 +16339,14 @@
         </p:nvSpPr>
         <p:spPr>
           <a:xfrm>
-            <a:off x="9125712" y="5391607"/>
-            <a:ext cx="12802" cy="1241146"/>
+            <a:off x="9125712" y="5430901"/>
+            <a:ext cx="12802" cy="1162558"/>
           </a:xfrm>
           <a:prstGeom prst="rect">
             <a:avLst/>
           </a:prstGeom>
           <a:solidFill>
-            <a:srgbClr val="DFDDD7"/>
+            <a:srgbClr val="A5A49F"/>
           </a:solidFill>
           <a:ln>
             <a:noFill/>
@@ -16082,11 +16399,11 @@
           <a:p>
             <a:pPr algn="l">
               <a:lnSpc>
-                <a:spcPct val="140000"/>
-              </a:lnSpc>
-            </a:pPr>
-            <a:r>
-              <a:rPr sz="2900" i="0" b="0">
+                <a:spcPts val="3919"/>
+              </a:lnSpc>
+            </a:pPr>
+            <a:r>
+              <a:rPr sz="2800" i="0" b="0">
                 <a:solidFill>
                   <a:srgbClr val="A5A49F"/>
                 </a:solidFill>
@@ -16219,7 +16536,7 @@
           <a:p>
             <a:pPr algn="l">
               <a:lnSpc>
-                <a:spcPct val="100000"/>
+                <a:spcPts val="7800"/>
               </a:lnSpc>
             </a:pPr>
             <a:r>
@@ -16249,7 +16566,7 @@
             <a:avLst/>
           </a:prstGeom>
           <a:solidFill>
-            <a:srgbClr val="DFDDD7"/>
+            <a:srgbClr val="A5A49F"/>
           </a:solidFill>
           <a:ln>
             <a:noFill/>
@@ -16302,13 +16619,13 @@
           <a:p>
             <a:pPr algn="l">
               <a:lnSpc>
-                <a:spcPct val="140000"/>
+                <a:spcPts val="2170"/>
               </a:lnSpc>
             </a:pPr>
             <a:r>
               <a:rPr sz="1550" i="0" b="0" spc="240">
                 <a:solidFill>
-                  <a:srgbClr val="A9724A"/>
+                  <a:srgbClr val="CC754E"/>
                 </a:solidFill>
                 <a:latin typeface="Outfit 1 Semi-Bold"/>
               </a:rPr>
@@ -16341,7 +16658,7 @@
           <a:p>
             <a:pPr algn="l">
               <a:lnSpc>
-                <a:spcPct val="140000"/>
+                <a:spcPts val="3500"/>
               </a:lnSpc>
             </a:pPr>
             <a:r>
@@ -16380,7 +16697,7 @@
           <a:p>
             <a:pPr algn="l">
               <a:lnSpc>
-                <a:spcPct val="140000"/>
+                <a:spcPts val="2520"/>
               </a:lnSpc>
             </a:pPr>
             <a:r>
@@ -16410,7 +16727,7 @@
             <a:avLst/>
           </a:prstGeom>
           <a:solidFill>
-            <a:srgbClr val="DFDDD7"/>
+            <a:srgbClr val="A5A49F"/>
           </a:solidFill>
           <a:ln>
             <a:noFill/>
@@ -16463,13 +16780,13 @@
           <a:p>
             <a:pPr algn="l">
               <a:lnSpc>
-                <a:spcPct val="140000"/>
+                <a:spcPts val="2170"/>
               </a:lnSpc>
             </a:pPr>
             <a:r>
               <a:rPr sz="1550" i="0" b="0" spc="240">
                 <a:solidFill>
-                  <a:srgbClr val="A9724A"/>
+                  <a:srgbClr val="CC754E"/>
                 </a:solidFill>
                 <a:latin typeface="Outfit 1 Semi-Bold"/>
               </a:rPr>
@@ -16502,7 +16819,7 @@
           <a:p>
             <a:pPr algn="l">
               <a:lnSpc>
-                <a:spcPct val="140000"/>
+                <a:spcPts val="3500"/>
               </a:lnSpc>
             </a:pPr>
             <a:r>
@@ -16541,7 +16858,7 @@
           <a:p>
             <a:pPr algn="l">
               <a:lnSpc>
-                <a:spcPct val="140000"/>
+                <a:spcPts val="2520"/>
               </a:lnSpc>
             </a:pPr>
             <a:r>
@@ -16571,7 +16888,7 @@
             <a:avLst/>
           </a:prstGeom>
           <a:solidFill>
-            <a:srgbClr val="DFDDD7"/>
+            <a:srgbClr val="A5A49F"/>
           </a:solidFill>
           <a:ln>
             <a:noFill/>
@@ -16624,13 +16941,13 @@
           <a:p>
             <a:pPr algn="l">
               <a:lnSpc>
-                <a:spcPct val="140000"/>
+                <a:spcPts val="2170"/>
               </a:lnSpc>
             </a:pPr>
             <a:r>
               <a:rPr sz="1550" i="0" b="0" spc="240">
                 <a:solidFill>
-                  <a:srgbClr val="A9724A"/>
+                  <a:srgbClr val="CC754E"/>
                 </a:solidFill>
                 <a:latin typeface="Outfit 1 Semi-Bold"/>
               </a:rPr>
@@ -16663,7 +16980,7 @@
           <a:p>
             <a:pPr algn="l">
               <a:lnSpc>
-                <a:spcPct val="140000"/>
+                <a:spcPts val="3500"/>
               </a:lnSpc>
             </a:pPr>
             <a:r>
@@ -16702,7 +17019,7 @@
           <a:p>
             <a:pPr algn="l">
               <a:lnSpc>
-                <a:spcPct val="140000"/>
+                <a:spcPts val="2520"/>
               </a:lnSpc>
             </a:pPr>
             <a:r>
@@ -16732,7 +17049,7 @@
             <a:avLst/>
           </a:prstGeom>
           <a:solidFill>
-            <a:srgbClr val="DFDDD7"/>
+            <a:srgbClr val="A5A49F"/>
           </a:solidFill>
           <a:ln>
             <a:noFill/>
@@ -16785,13 +17102,13 @@
           <a:p>
             <a:pPr algn="l">
               <a:lnSpc>
-                <a:spcPct val="140000"/>
+                <a:spcPts val="2170"/>
               </a:lnSpc>
             </a:pPr>
             <a:r>
               <a:rPr sz="1550" i="0" b="0" spc="240">
                 <a:solidFill>
-                  <a:srgbClr val="A9724A"/>
+                  <a:srgbClr val="CC754E"/>
                 </a:solidFill>
                 <a:latin typeface="Outfit 1 Semi-Bold"/>
               </a:rPr>
@@ -16824,7 +17141,7 @@
           <a:p>
             <a:pPr algn="l">
               <a:lnSpc>
-                <a:spcPct val="140000"/>
+                <a:spcPts val="3500"/>
               </a:lnSpc>
             </a:pPr>
             <a:r>
@@ -16863,7 +17180,7 @@
           <a:p>
             <a:pPr algn="l">
               <a:lnSpc>
-                <a:spcPct val="140000"/>
+                <a:spcPts val="2520"/>
               </a:lnSpc>
             </a:pPr>
             <a:r>
@@ -16893,7 +17210,7 @@
             <a:avLst/>
           </a:prstGeom>
           <a:solidFill>
-            <a:srgbClr val="DFDDD7"/>
+            <a:srgbClr val="A5A49F"/>
           </a:solidFill>
           <a:ln>
             <a:noFill/>
@@ -16946,13 +17263,13 @@
           <a:p>
             <a:pPr algn="l">
               <a:lnSpc>
-                <a:spcPct val="140000"/>
+                <a:spcPts val="2170"/>
               </a:lnSpc>
             </a:pPr>
             <a:r>
               <a:rPr sz="1550" i="0" b="0" spc="240">
                 <a:solidFill>
-                  <a:srgbClr val="A9724A"/>
+                  <a:srgbClr val="CC754E"/>
                 </a:solidFill>
                 <a:latin typeface="Outfit 1 Semi-Bold"/>
               </a:rPr>
@@ -16985,7 +17302,7 @@
           <a:p>
             <a:pPr algn="l">
               <a:lnSpc>
-                <a:spcPct val="140000"/>
+                <a:spcPts val="3500"/>
               </a:lnSpc>
             </a:pPr>
             <a:r>
@@ -17024,7 +17341,7 @@
           <a:p>
             <a:pPr algn="l">
               <a:lnSpc>
-                <a:spcPct val="140000"/>
+                <a:spcPts val="2520"/>
               </a:lnSpc>
             </a:pPr>
             <a:r>
@@ -17054,7 +17371,7 @@
             <a:avLst/>
           </a:prstGeom>
           <a:solidFill>
-            <a:srgbClr val="DFDDD7"/>
+            <a:srgbClr val="A5A49F"/>
           </a:solidFill>
           <a:ln>
             <a:noFill/>
@@ -17143,8 +17460,8 @@
         </p:nvSpPr>
         <p:spPr>
           <a:xfrm>
-            <a:off x="2011680" y="3703320"/>
-            <a:ext cx="13716000" cy="923925"/>
+            <a:off x="2011680" y="2651760"/>
+            <a:ext cx="13716000" cy="1625600"/>
           </a:xfrm>
           <a:prstGeom prst="rect">
             <a:avLst/>
@@ -17159,11 +17476,11 @@
           <a:p>
             <a:pPr algn="l">
               <a:lnSpc>
-                <a:spcPct val="110000"/>
-              </a:lnSpc>
-            </a:pPr>
-            <a:r>
-              <a:rPr sz="4650" i="0" b="0">
+                <a:spcPts val="10640"/>
+              </a:lnSpc>
+            </a:pPr>
+            <a:r>
+              <a:rPr sz="9500" i="0" b="0">
                 <a:solidFill>
                   <a:srgbClr val="1C1C1A"/>
                 </a:solidFill>
@@ -17190,8 +17507,8 @@
         </p:blipFill>
         <p:spPr>
           <a:xfrm>
-            <a:off x="2011680" y="5440680"/>
-            <a:ext cx="3246120" cy="771466"/>
+            <a:off x="1028700" y="5257800"/>
+            <a:ext cx="4421124" cy="1050715"/>
           </a:xfrm>
           <a:prstGeom prst="rect">
             <a:avLst/>
@@ -17258,7 +17575,7 @@
         </p:blipFill>
         <p:spPr>
           <a:xfrm>
-            <a:off x="6355080" y="5394960"/>
+            <a:off x="6073445" y="5312664"/>
             <a:ext cx="3291840" cy="942889"/>
           </a:xfrm>
           <a:prstGeom prst="rect">
@@ -17370,8 +17687,8 @@
         </p:nvSpPr>
         <p:spPr>
           <a:xfrm>
-            <a:off x="2011680" y="3616553"/>
-            <a:ext cx="3657600" cy="274320"/>
+            <a:off x="2011680" y="3408680"/>
+            <a:ext cx="15247620" cy="292608"/>
           </a:xfrm>
           <a:prstGeom prst="rect">
             <a:avLst/>
@@ -17384,9 +17701,9 @@
           </a:bodyPr>
           <a:lstStyle/>
           <a:p>
-            <a:pPr algn="l">
-              <a:lnSpc>
-                <a:spcPct val="140000"/>
+            <a:pPr algn="r">
+              <a:lnSpc>
+                <a:spcPts val="1959"/>
               </a:lnSpc>
             </a:pPr>
             <a:r>
@@ -17409,8 +17726,8 @@
         </p:nvSpPr>
         <p:spPr>
           <a:xfrm>
-            <a:off x="2011680" y="4165193"/>
-            <a:ext cx="12801600" cy="1122680"/>
+            <a:off x="2011680" y="3884168"/>
+            <a:ext cx="15247620" cy="1384300"/>
           </a:xfrm>
           <a:prstGeom prst="rect">
             <a:avLst/>
@@ -17423,17 +17740,17 @@
           </a:bodyPr>
           <a:lstStyle/>
           <a:p>
-            <a:pPr algn="l">
-              <a:lnSpc>
-                <a:spcPct val="100000"/>
-              </a:lnSpc>
-            </a:pPr>
-            <a:r>
-              <a:rPr sz="6800" i="0" b="0">
+            <a:pPr algn="r">
+              <a:lnSpc>
+                <a:spcPts val="9460"/>
+              </a:lnSpc>
+            </a:pPr>
+            <a:r>
+              <a:rPr sz="8600" i="0" b="0">
                 <a:solidFill>
                   <a:srgbClr val="FFFFFF"/>
                 </a:solidFill>
-                <a:latin typeface="Outfit 1 Light"/>
+                <a:latin typeface="Outfit 1 Bold"/>
               </a:rPr>
               <a:t>CULTURA ORGANIZACIONAL</a:t>
             </a:r>
@@ -17442,58 +17759,14 @@
       </p:sp>
       <p:sp>
         <p:nvSpPr>
-          <p:cNvPr id="6" name="Rectangle 5"/>
-          <p:cNvSpPr/>
-          <p:nvPr/>
-        </p:nvSpPr>
-        <p:spPr>
-          <a:xfrm>
-            <a:off x="2011680" y="5546953"/>
-            <a:ext cx="14264640" cy="10973"/>
-          </a:xfrm>
-          <a:prstGeom prst="rect">
-            <a:avLst/>
-          </a:prstGeom>
-          <a:solidFill>
-            <a:srgbClr val="A5A49F"/>
-          </a:solidFill>
-          <a:ln>
-            <a:noFill/>
-          </a:ln>
-          <a:effectLst/>
-        </p:spPr>
-        <p:style>
-          <a:lnRef idx="1">
-            <a:schemeClr val="accent1"/>
-          </a:lnRef>
-          <a:fillRef idx="3">
-            <a:schemeClr val="accent1"/>
-          </a:fillRef>
-          <a:effectRef idx="2">
-            <a:schemeClr val="accent1"/>
-          </a:effectRef>
-          <a:fontRef idx="minor">
-            <a:schemeClr val="lt1"/>
-          </a:fontRef>
-        </p:style>
-        <p:txBody>
-          <a:bodyPr rtlCol="0" anchor="ctr"/>
-          <a:lstStyle/>
-          <a:p>
-            <a:pPr algn="ctr"/>
-          </a:p>
-        </p:txBody>
-      </p:sp>
-      <p:sp>
-        <p:nvSpPr>
-          <p:cNvPr id="7" name="TextBox 6"/>
+          <p:cNvPr id="6" name="TextBox 5"/>
           <p:cNvSpPr txBox="1"/>
           <p:nvPr/>
         </p:nvSpPr>
         <p:spPr>
           <a:xfrm>
-            <a:off x="2011680" y="5821273"/>
-            <a:ext cx="11887200" cy="620573"/>
+            <a:off x="2011680" y="5341620"/>
+            <a:ext cx="15247620" cy="741172"/>
           </a:xfrm>
           <a:prstGeom prst="rect">
             <a:avLst/>
@@ -17506,13 +17779,13 @@
           </a:bodyPr>
           <a:lstStyle/>
           <a:p>
-            <a:pPr algn="l">
-              <a:lnSpc>
-                <a:spcPct val="140000"/>
-              </a:lnSpc>
-            </a:pPr>
-            <a:r>
-              <a:rPr sz="2400" i="0" b="0">
+            <a:pPr algn="r">
+              <a:lnSpc>
+                <a:spcPts val="4755"/>
+              </a:lnSpc>
+            </a:pPr>
+            <a:r>
+              <a:rPr sz="4100" i="0" b="0">
                 <a:solidFill>
                   <a:srgbClr val="FFFFFF"/>
                 </a:solidFill>
@@ -17525,14 +17798,14 @@
       </p:sp>
       <p:sp>
         <p:nvSpPr>
-          <p:cNvPr id="8" name="TextBox 7"/>
+          <p:cNvPr id="7" name="TextBox 6"/>
           <p:cNvSpPr txBox="1"/>
           <p:nvPr/>
         </p:nvSpPr>
         <p:spPr>
           <a:xfrm>
-            <a:off x="2011680" y="8220558"/>
-            <a:ext cx="11521440" cy="484530"/>
+            <a:off x="2011680" y="8293100"/>
+            <a:ext cx="11521440" cy="411988"/>
           </a:xfrm>
           <a:prstGeom prst="rect">
             <a:avLst/>
@@ -17677,8 +17950,8 @@
         </p:nvSpPr>
         <p:spPr>
           <a:xfrm>
-            <a:off x="2011680" y="3410438"/>
-            <a:ext cx="14264640" cy="882396"/>
+            <a:off x="2011680" y="3549015"/>
+            <a:ext cx="14264640" cy="1005078"/>
           </a:xfrm>
           <a:prstGeom prst="rect">
             <a:avLst/>
@@ -17693,7 +17966,7 @@
           <a:p>
             <a:pPr algn="l">
               <a:lnSpc>
-                <a:spcPct val="114000"/>
+                <a:spcPts val="5754"/>
               </a:lnSpc>
             </a:pPr>
             <a:r>
@@ -17703,7 +17976,25 @@
                 </a:solidFill>
                 <a:latin typeface="Outfit 1 Light"/>
               </a:rPr>
-              <a:t>O QUE É CULTURA ORGANIZACIONAL?</a:t>
+              <a:t>O QUE É </a:t>
+            </a:r>
+            <a:r>
+              <a:rPr sz="4200" i="0" b="0">
+                <a:solidFill>
+                  <a:srgbClr val="1C1C1A"/>
+                </a:solidFill>
+                <a:latin typeface="Outfit 1 Bold"/>
+              </a:rPr>
+              <a:t>CULTURA ORGANIZACIONAL</a:t>
+            </a:r>
+            <a:r>
+              <a:rPr sz="4200" i="0" b="0">
+                <a:solidFill>
+                  <a:srgbClr val="1C1C1A"/>
+                </a:solidFill>
+                <a:latin typeface="Outfit 1 Light"/>
+              </a:rPr>
+              <a:t>?</a:t>
             </a:r>
           </a:p>
         </p:txBody>
@@ -17716,14 +18007,14 @@
         </p:nvSpPr>
         <p:spPr>
           <a:xfrm>
-            <a:off x="2011680" y="4347332"/>
+            <a:off x="2011680" y="4462653"/>
             <a:ext cx="14264640" cy="10973"/>
           </a:xfrm>
           <a:prstGeom prst="rect">
             <a:avLst/>
           </a:prstGeom>
           <a:solidFill>
-            <a:srgbClr val="DFDDD7"/>
+            <a:srgbClr val="A5A49F"/>
           </a:solidFill>
           <a:ln>
             <a:noFill/>
@@ -17760,8 +18051,8 @@
         </p:nvSpPr>
         <p:spPr>
           <a:xfrm>
-            <a:off x="2011680" y="4694804"/>
-            <a:ext cx="12252960" cy="1678838"/>
+            <a:off x="2011680" y="4810125"/>
+            <a:ext cx="12252960" cy="1424940"/>
           </a:xfrm>
           <a:prstGeom prst="rect">
             <a:avLst/>
@@ -17776,11 +18067,11 @@
           <a:p>
             <a:pPr algn="l">
               <a:lnSpc>
-                <a:spcPct val="140000"/>
-              </a:lnSpc>
-            </a:pPr>
-            <a:r>
-              <a:rPr sz="2400" i="0" b="0">
+                <a:spcPts val="3500"/>
+              </a:lnSpc>
+            </a:pPr>
+            <a:r>
+              <a:rPr sz="2500" i="0" b="0">
                 <a:solidFill>
                   <a:srgbClr val="6B6B66"/>
                 </a:solidFill>
@@ -17897,8 +18188,8 @@
         </p:nvSpPr>
         <p:spPr>
           <a:xfrm>
-            <a:off x="2011680" y="3113562"/>
-            <a:ext cx="14264640" cy="882396"/>
+            <a:off x="2011680" y="3162173"/>
+            <a:ext cx="14264640" cy="1005078"/>
           </a:xfrm>
           <a:prstGeom prst="rect">
             <a:avLst/>
@@ -17913,7 +18204,7 @@
           <a:p>
             <a:pPr algn="l">
               <a:lnSpc>
-                <a:spcPct val="114000"/>
+                <a:spcPts val="5754"/>
               </a:lnSpc>
             </a:pPr>
             <a:r>
@@ -17936,14 +18227,14 @@
         </p:nvSpPr>
         <p:spPr>
           <a:xfrm>
-            <a:off x="2011680" y="4050456"/>
+            <a:off x="2011680" y="4075811"/>
             <a:ext cx="14264640" cy="10973"/>
           </a:xfrm>
           <a:prstGeom prst="rect">
             <a:avLst/>
           </a:prstGeom>
           <a:solidFill>
-            <a:srgbClr val="DFDDD7"/>
+            <a:srgbClr val="A5A49F"/>
           </a:solidFill>
           <a:ln>
             <a:noFill/>
@@ -17980,8 +18271,8 @@
         </p:nvSpPr>
         <p:spPr>
           <a:xfrm>
-            <a:off x="2011680" y="4397928"/>
-            <a:ext cx="12252960" cy="1017422"/>
+            <a:off x="2011680" y="4423283"/>
+            <a:ext cx="12252960" cy="980440"/>
           </a:xfrm>
           <a:prstGeom prst="rect">
             <a:avLst/>
@@ -17996,11 +18287,11 @@
           <a:p>
             <a:pPr algn="l">
               <a:lnSpc>
-                <a:spcPct val="140000"/>
-              </a:lnSpc>
-            </a:pPr>
-            <a:r>
-              <a:rPr sz="2100" i="0" b="0">
+                <a:spcPts val="3500"/>
+              </a:lnSpc>
+            </a:pPr>
+            <a:r>
+              <a:rPr sz="2500" i="0" b="0">
                 <a:solidFill>
                   <a:srgbClr val="6B6B66"/>
                 </a:solidFill>
@@ -18019,8 +18310,8 @@
         </p:nvSpPr>
         <p:spPr>
           <a:xfrm>
-            <a:off x="2011680" y="5653095"/>
-            <a:ext cx="12252960" cy="1017422"/>
+            <a:off x="2011680" y="5641467"/>
+            <a:ext cx="12252960" cy="980440"/>
           </a:xfrm>
           <a:prstGeom prst="rect">
             <a:avLst/>
@@ -18035,11 +18326,11 @@
           <a:p>
             <a:pPr algn="l">
               <a:lnSpc>
-                <a:spcPct val="140000"/>
-              </a:lnSpc>
-            </a:pPr>
-            <a:r>
-              <a:rPr sz="2100" i="0" b="0">
+                <a:spcPts val="3500"/>
+              </a:lnSpc>
+            </a:pPr>
+            <a:r>
+              <a:rPr sz="2500" i="0" b="0">
                 <a:solidFill>
                   <a:srgbClr val="6B6B66"/>
                 </a:solidFill>
@@ -18156,8 +18447,8 @@
         </p:nvSpPr>
         <p:spPr>
           <a:xfrm>
-            <a:off x="2011680" y="3222173"/>
-            <a:ext cx="14264640" cy="882396"/>
+            <a:off x="2011680" y="3137281"/>
+            <a:ext cx="14264640" cy="1005078"/>
           </a:xfrm>
           <a:prstGeom prst="rect">
             <a:avLst/>
@@ -18172,7 +18463,7 @@
           <a:p>
             <a:pPr algn="l">
               <a:lnSpc>
-                <a:spcPct val="114000"/>
+                <a:spcPts val="5754"/>
               </a:lnSpc>
             </a:pPr>
             <a:r>
@@ -18195,14 +18486,14 @@
         </p:nvSpPr>
         <p:spPr>
           <a:xfrm>
-            <a:off x="2011680" y="4159067"/>
+            <a:off x="2011680" y="4050919"/>
             <a:ext cx="14264640" cy="10973"/>
           </a:xfrm>
           <a:prstGeom prst="rect">
             <a:avLst/>
           </a:prstGeom>
           <a:solidFill>
-            <a:srgbClr val="DFDDD7"/>
+            <a:srgbClr val="A5A49F"/>
           </a:solidFill>
           <a:ln>
             <a:noFill/>
@@ -18239,14 +18530,14 @@
         </p:nvSpPr>
         <p:spPr>
           <a:xfrm>
-            <a:off x="2011680" y="4860361"/>
+            <a:off x="2011680" y="4800473"/>
             <a:ext cx="6880860" cy="10973"/>
           </a:xfrm>
           <a:prstGeom prst="rect">
             <a:avLst/>
           </a:prstGeom>
           <a:solidFill>
-            <a:srgbClr val="DFDDD7"/>
+            <a:srgbClr val="A5A49F"/>
           </a:solidFill>
           <a:ln>
             <a:noFill/>
@@ -18283,8 +18574,8 @@
         </p:nvSpPr>
         <p:spPr>
           <a:xfrm>
-            <a:off x="2011680" y="4506539"/>
-            <a:ext cx="6880860" cy="390398"/>
+            <a:off x="2011680" y="4398391"/>
+            <a:ext cx="6880860" cy="438658"/>
           </a:xfrm>
           <a:prstGeom prst="rect">
             <a:avLst/>
@@ -18299,11 +18590,11 @@
           <a:p>
             <a:pPr algn="l">
               <a:lnSpc>
-                <a:spcPct val="140000"/>
-              </a:lnSpc>
-            </a:pPr>
-            <a:r>
-              <a:rPr sz="2300" i="0" b="0">
+                <a:spcPts val="3500"/>
+              </a:lnSpc>
+            </a:pPr>
+            <a:r>
+              <a:rPr sz="2500" i="0" b="0">
                 <a:solidFill>
                   <a:srgbClr val="1C1C1A"/>
                 </a:solidFill>
@@ -18322,14 +18613,14 @@
         </p:nvSpPr>
         <p:spPr>
           <a:xfrm>
-            <a:off x="2011680" y="5415351"/>
+            <a:off x="2011680" y="5403723"/>
             <a:ext cx="6880860" cy="10973"/>
           </a:xfrm>
           <a:prstGeom prst="rect">
             <a:avLst/>
           </a:prstGeom>
           <a:solidFill>
-            <a:srgbClr val="DFDDD7"/>
+            <a:srgbClr val="A5A49F"/>
           </a:solidFill>
           <a:ln>
             <a:noFill/>
@@ -18366,8 +18657,8 @@
         </p:nvSpPr>
         <p:spPr>
           <a:xfrm>
-            <a:off x="2011680" y="5061529"/>
-            <a:ext cx="6880860" cy="390398"/>
+            <a:off x="2011680" y="5001641"/>
+            <a:ext cx="6880860" cy="438658"/>
           </a:xfrm>
           <a:prstGeom prst="rect">
             <a:avLst/>
@@ -18382,11 +18673,11 @@
           <a:p>
             <a:pPr algn="l">
               <a:lnSpc>
-                <a:spcPct val="140000"/>
-              </a:lnSpc>
-            </a:pPr>
-            <a:r>
-              <a:rPr sz="2300" i="0" b="0">
+                <a:spcPts val="3500"/>
+              </a:lnSpc>
+            </a:pPr>
+            <a:r>
+              <a:rPr sz="2500" i="0" b="0">
                 <a:solidFill>
                   <a:srgbClr val="1C1C1A"/>
                 </a:solidFill>
@@ -18405,14 +18696,14 @@
         </p:nvSpPr>
         <p:spPr>
           <a:xfrm>
-            <a:off x="2011680" y="5970341"/>
+            <a:off x="2011680" y="6006973"/>
             <a:ext cx="6880860" cy="10973"/>
           </a:xfrm>
           <a:prstGeom prst="rect">
             <a:avLst/>
           </a:prstGeom>
           <a:solidFill>
-            <a:srgbClr val="DFDDD7"/>
+            <a:srgbClr val="A5A49F"/>
           </a:solidFill>
           <a:ln>
             <a:noFill/>
@@ -18449,8 +18740,8 @@
         </p:nvSpPr>
         <p:spPr>
           <a:xfrm>
-            <a:off x="2011680" y="5616519"/>
-            <a:ext cx="6880860" cy="390398"/>
+            <a:off x="2011680" y="5604891"/>
+            <a:ext cx="6880860" cy="438658"/>
           </a:xfrm>
           <a:prstGeom prst="rect">
             <a:avLst/>
@@ -18465,11 +18756,11 @@
           <a:p>
             <a:pPr algn="l">
               <a:lnSpc>
-                <a:spcPct val="140000"/>
-              </a:lnSpc>
-            </a:pPr>
-            <a:r>
-              <a:rPr sz="2300" i="0" b="0">
+                <a:spcPts val="3500"/>
+              </a:lnSpc>
+            </a:pPr>
+            <a:r>
+              <a:rPr sz="2500" i="0" b="0">
                 <a:solidFill>
                   <a:srgbClr val="1C1C1A"/>
                 </a:solidFill>
@@ -18488,14 +18779,14 @@
         </p:nvSpPr>
         <p:spPr>
           <a:xfrm>
-            <a:off x="2011680" y="6525331"/>
+            <a:off x="2011680" y="6610223"/>
             <a:ext cx="6880860" cy="10973"/>
           </a:xfrm>
           <a:prstGeom prst="rect">
             <a:avLst/>
           </a:prstGeom>
           <a:solidFill>
-            <a:srgbClr val="DFDDD7"/>
+            <a:srgbClr val="A5A49F"/>
           </a:solidFill>
           <a:ln>
             <a:noFill/>
@@ -18532,8 +18823,8 @@
         </p:nvSpPr>
         <p:spPr>
           <a:xfrm>
-            <a:off x="2011680" y="6171509"/>
-            <a:ext cx="6880860" cy="390398"/>
+            <a:off x="2011680" y="6208141"/>
+            <a:ext cx="6880860" cy="438658"/>
           </a:xfrm>
           <a:prstGeom prst="rect">
             <a:avLst/>
@@ -18548,11 +18839,11 @@
           <a:p>
             <a:pPr algn="l">
               <a:lnSpc>
-                <a:spcPct val="140000"/>
-              </a:lnSpc>
-            </a:pPr>
-            <a:r>
-              <a:rPr sz="2300" i="0" b="0">
+                <a:spcPts val="3500"/>
+              </a:lnSpc>
+            </a:pPr>
+            <a:r>
+              <a:rPr sz="2500" i="0" b="0">
                 <a:solidFill>
                   <a:srgbClr val="1C1C1A"/>
                 </a:solidFill>
@@ -18571,14 +18862,14 @@
         </p:nvSpPr>
         <p:spPr>
           <a:xfrm>
-            <a:off x="9395460" y="4860361"/>
+            <a:off x="9395460" y="4800473"/>
             <a:ext cx="6880860" cy="10973"/>
           </a:xfrm>
           <a:prstGeom prst="rect">
             <a:avLst/>
           </a:prstGeom>
           <a:solidFill>
-            <a:srgbClr val="DFDDD7"/>
+            <a:srgbClr val="A5A49F"/>
           </a:solidFill>
           <a:ln>
             <a:noFill/>
@@ -18615,8 +18906,8 @@
         </p:nvSpPr>
         <p:spPr>
           <a:xfrm>
-            <a:off x="9395460" y="4506539"/>
-            <a:ext cx="6880860" cy="390398"/>
+            <a:off x="9395460" y="4398391"/>
+            <a:ext cx="6880860" cy="438658"/>
           </a:xfrm>
           <a:prstGeom prst="rect">
             <a:avLst/>
@@ -18631,11 +18922,11 @@
           <a:p>
             <a:pPr algn="l">
               <a:lnSpc>
-                <a:spcPct val="140000"/>
-              </a:lnSpc>
-            </a:pPr>
-            <a:r>
-              <a:rPr sz="2300" i="0" b="0">
+                <a:spcPts val="3500"/>
+              </a:lnSpc>
+            </a:pPr>
+            <a:r>
+              <a:rPr sz="2500" i="0" b="0">
                 <a:solidFill>
                   <a:srgbClr val="1C1C1A"/>
                 </a:solidFill>
@@ -18654,14 +18945,14 @@
         </p:nvSpPr>
         <p:spPr>
           <a:xfrm>
-            <a:off x="9395460" y="5415351"/>
+            <a:off x="9395460" y="5403723"/>
             <a:ext cx="6880860" cy="10973"/>
           </a:xfrm>
           <a:prstGeom prst="rect">
             <a:avLst/>
           </a:prstGeom>
           <a:solidFill>
-            <a:srgbClr val="DFDDD7"/>
+            <a:srgbClr val="A5A49F"/>
           </a:solidFill>
           <a:ln>
             <a:noFill/>
@@ -18698,8 +18989,8 @@
         </p:nvSpPr>
         <p:spPr>
           <a:xfrm>
-            <a:off x="9395460" y="5061529"/>
-            <a:ext cx="6880860" cy="390398"/>
+            <a:off x="9395460" y="5001641"/>
+            <a:ext cx="6880860" cy="438658"/>
           </a:xfrm>
           <a:prstGeom prst="rect">
             <a:avLst/>
@@ -18714,11 +19005,11 @@
           <a:p>
             <a:pPr algn="l">
               <a:lnSpc>
-                <a:spcPct val="140000"/>
-              </a:lnSpc>
-            </a:pPr>
-            <a:r>
-              <a:rPr sz="2300" i="0" b="0">
+                <a:spcPts val="3500"/>
+              </a:lnSpc>
+            </a:pPr>
+            <a:r>
+              <a:rPr sz="2500" i="0" b="0">
                 <a:solidFill>
                   <a:srgbClr val="1C1C1A"/>
                 </a:solidFill>
@@ -18737,14 +19028,14 @@
         </p:nvSpPr>
         <p:spPr>
           <a:xfrm>
-            <a:off x="9395460" y="5970341"/>
+            <a:off x="9395460" y="6006973"/>
             <a:ext cx="6880860" cy="10973"/>
           </a:xfrm>
           <a:prstGeom prst="rect">
             <a:avLst/>
           </a:prstGeom>
           <a:solidFill>
-            <a:srgbClr val="DFDDD7"/>
+            <a:srgbClr val="A5A49F"/>
           </a:solidFill>
           <a:ln>
             <a:noFill/>
@@ -18781,8 +19072,8 @@
         </p:nvSpPr>
         <p:spPr>
           <a:xfrm>
-            <a:off x="9395460" y="5616519"/>
-            <a:ext cx="6880860" cy="390398"/>
+            <a:off x="9395460" y="5604891"/>
+            <a:ext cx="6880860" cy="438658"/>
           </a:xfrm>
           <a:prstGeom prst="rect">
             <a:avLst/>
@@ -18797,11 +19088,11 @@
           <a:p>
             <a:pPr algn="l">
               <a:lnSpc>
-                <a:spcPct val="140000"/>
-              </a:lnSpc>
-            </a:pPr>
-            <a:r>
-              <a:rPr sz="2300" i="0" b="0">
+                <a:spcPts val="3500"/>
+              </a:lnSpc>
+            </a:pPr>
+            <a:r>
+              <a:rPr sz="2500" i="0" b="0">
                 <a:solidFill>
                   <a:srgbClr val="1C1C1A"/>
                 </a:solidFill>
@@ -18960,14 +19251,14 @@
         </p:nvSpPr>
         <p:spPr>
           <a:xfrm>
-            <a:off x="11932920" y="4010101"/>
+            <a:off x="11932920" y="4037838"/>
             <a:ext cx="1188720" cy="27432"/>
           </a:xfrm>
           <a:prstGeom prst="rect">
             <a:avLst/>
           </a:prstGeom>
           <a:solidFill>
-            <a:srgbClr val="A9724A"/>
+            <a:srgbClr val="CC754E"/>
           </a:solidFill>
           <a:ln>
             <a:noFill/>
@@ -19004,7 +19295,7 @@
         </p:nvSpPr>
         <p:spPr>
           <a:xfrm>
-            <a:off x="11932920" y="4320997"/>
+            <a:off x="11932920" y="4348734"/>
             <a:ext cx="5760720" cy="292608"/>
           </a:xfrm>
           <a:prstGeom prst="rect">
@@ -19020,13 +19311,13 @@
           <a:p>
             <a:pPr algn="l">
               <a:lnSpc>
-                <a:spcPct val="140000"/>
+                <a:spcPts val="1959"/>
               </a:lnSpc>
             </a:pPr>
             <a:r>
               <a:rPr sz="1400" i="0" b="0" spc="300">
                 <a:solidFill>
-                  <a:srgbClr val="A9724A"/>
+                  <a:srgbClr val="CC754E"/>
                 </a:solidFill>
                 <a:latin typeface="Outfit 1 Semi-Bold"/>
               </a:rPr>
@@ -19043,8 +19334,8 @@
         </p:nvSpPr>
         <p:spPr>
           <a:xfrm>
-            <a:off x="11932920" y="4887925"/>
-            <a:ext cx="5760720" cy="1480414"/>
+            <a:off x="11932920" y="4915662"/>
+            <a:ext cx="5760720" cy="1424940"/>
           </a:xfrm>
           <a:prstGeom prst="rect">
             <a:avLst/>
@@ -19059,11 +19350,11 @@
           <a:p>
             <a:pPr algn="l">
               <a:lnSpc>
-                <a:spcPct val="140000"/>
-              </a:lnSpc>
-            </a:pPr>
-            <a:r>
-              <a:rPr sz="2100" i="0" b="0">
+                <a:spcPts val="3500"/>
+              </a:lnSpc>
+            </a:pPr>
+            <a:r>
+              <a:rPr sz="2500" i="0" b="0">
                 <a:solidFill>
                   <a:srgbClr val="6B6B66"/>
                 </a:solidFill>
@@ -19082,8 +19373,8 @@
         </p:nvSpPr>
         <p:spPr>
           <a:xfrm>
-            <a:off x="2011680" y="2642220"/>
-            <a:ext cx="8458200" cy="882396"/>
+            <a:off x="2011680" y="2489454"/>
+            <a:ext cx="8458200" cy="1005078"/>
           </a:xfrm>
           <a:prstGeom prst="rect">
             <a:avLst/>
@@ -19098,7 +19389,7 @@
           <a:p>
             <a:pPr algn="l">
               <a:lnSpc>
-                <a:spcPct val="114000"/>
+                <a:spcPts val="5754"/>
               </a:lnSpc>
             </a:pPr>
             <a:r>
@@ -19108,7 +19399,25 @@
                 </a:solidFill>
                 <a:latin typeface="Outfit 1 Light"/>
               </a:rPr>
-              <a:t>NÃO ACEITAR O LIMITE COMO RESPOSTA DEFINITIVA.</a:t>
+              <a:t>NÃO ACEITAR O LIMITE COMO </a:t>
+            </a:r>
+            <a:r>
+              <a:rPr sz="4200" i="0" b="0">
+                <a:solidFill>
+                  <a:srgbClr val="1C1C1A"/>
+                </a:solidFill>
+                <a:latin typeface="Outfit 1 Bold"/>
+              </a:rPr>
+              <a:t>RESPOSTA DEFINITIVA</a:t>
+            </a:r>
+            <a:r>
+              <a:rPr sz="4200" i="0" b="0">
+                <a:solidFill>
+                  <a:srgbClr val="1C1C1A"/>
+                </a:solidFill>
+                <a:latin typeface="Outfit 1 Light"/>
+              </a:rPr>
+              <a:t>.</a:t>
             </a:r>
           </a:p>
         </p:txBody>
@@ -19121,14 +19430,14 @@
         </p:nvSpPr>
         <p:spPr>
           <a:xfrm>
-            <a:off x="2011680" y="4333128"/>
+            <a:off x="2011680" y="4133850"/>
             <a:ext cx="8458200" cy="10973"/>
           </a:xfrm>
           <a:prstGeom prst="rect">
             <a:avLst/>
           </a:prstGeom>
           <a:solidFill>
-            <a:srgbClr val="DFDDD7"/>
+            <a:srgbClr val="A5A49F"/>
           </a:solidFill>
           <a:ln>
             <a:noFill/>
@@ -19165,8 +19474,8 @@
         </p:nvSpPr>
         <p:spPr>
           <a:xfrm>
-            <a:off x="2011680" y="4680600"/>
-            <a:ext cx="8458200" cy="1017422"/>
+            <a:off x="2011680" y="4481322"/>
+            <a:ext cx="8458200" cy="980440"/>
           </a:xfrm>
           <a:prstGeom prst="rect">
             <a:avLst/>
@@ -19181,11 +19490,11 @@
           <a:p>
             <a:pPr algn="l">
               <a:lnSpc>
-                <a:spcPct val="140000"/>
-              </a:lnSpc>
-            </a:pPr>
-            <a:r>
-              <a:rPr sz="2100" i="0" b="0">
+                <a:spcPts val="3500"/>
+              </a:lnSpc>
+            </a:pPr>
+            <a:r>
+              <a:rPr sz="2500" i="0" b="0">
                 <a:solidFill>
                   <a:srgbClr val="6B6B66"/>
                 </a:solidFill>
@@ -19204,8 +19513,8 @@
         </p:nvSpPr>
         <p:spPr>
           <a:xfrm>
-            <a:off x="2011680" y="5935767"/>
-            <a:ext cx="8458200" cy="1480414"/>
+            <a:off x="2011680" y="5699506"/>
+            <a:ext cx="8458200" cy="1869440"/>
           </a:xfrm>
           <a:prstGeom prst="rect">
             <a:avLst/>
@@ -19220,11 +19529,11 @@
           <a:p>
             <a:pPr algn="l">
               <a:lnSpc>
-                <a:spcPct val="140000"/>
-              </a:lnSpc>
-            </a:pPr>
-            <a:r>
-              <a:rPr sz="2100" i="0" b="0">
+                <a:spcPts val="3500"/>
+              </a:lnSpc>
+            </a:pPr>
+            <a:r>
+              <a:rPr sz="2500" i="0" b="0">
                 <a:solidFill>
                   <a:srgbClr val="6B6B66"/>
                 </a:solidFill>

--- a/clientes/flavia-muccelin/Cultura-Organizacional-e-de-Marca-Forma-e-My-Home.pptx
+++ b/clientes/flavia-muccelin/Cultura-Organizacional-e-de-Marca-Forma-e-My-Home.pptx
@@ -3768,7 +3768,7 @@
         <p:spPr>
           <a:xfrm>
             <a:off x="2011680" y="3989832"/>
-            <a:ext cx="4754880" cy="365760"/>
+            <a:ext cx="4754880" cy="388620"/>
           </a:xfrm>
           <a:prstGeom prst="rect">
             <a:avLst/>
@@ -3890,7 +3890,7 @@
         <p:spPr>
           <a:xfrm>
             <a:off x="2011680" y="4853330"/>
-            <a:ext cx="4754880" cy="365760"/>
+            <a:ext cx="4754880" cy="388620"/>
           </a:xfrm>
           <a:prstGeom prst="rect">
             <a:avLst/>
@@ -4012,7 +4012,7 @@
         <p:spPr>
           <a:xfrm>
             <a:off x="2011680" y="5716829"/>
-            <a:ext cx="4754880" cy="365760"/>
+            <a:ext cx="4754880" cy="388620"/>
           </a:xfrm>
           <a:prstGeom prst="rect">
             <a:avLst/>
@@ -4134,7 +4134,7 @@
         <p:spPr>
           <a:xfrm>
             <a:off x="2011680" y="6580327"/>
-            <a:ext cx="4754880" cy="365760"/>
+            <a:ext cx="4754880" cy="388620"/>
           </a:xfrm>
           <a:prstGeom prst="rect">
             <a:avLst/>
@@ -4256,7 +4256,7 @@
         <p:spPr>
           <a:xfrm>
             <a:off x="2011680" y="7443826"/>
-            <a:ext cx="4754880" cy="365760"/>
+            <a:ext cx="4754880" cy="388620"/>
           </a:xfrm>
           <a:prstGeom prst="rect">
             <a:avLst/>
@@ -6336,7 +6336,7 @@
         <p:spPr>
           <a:xfrm>
             <a:off x="2011680" y="4018788"/>
-            <a:ext cx="4754880" cy="365760"/>
+            <a:ext cx="4754880" cy="388620"/>
           </a:xfrm>
           <a:prstGeom prst="rect">
             <a:avLst/>
@@ -6458,7 +6458,7 @@
         <p:spPr>
           <a:xfrm>
             <a:off x="2011680" y="4876495"/>
-            <a:ext cx="4754880" cy="365760"/>
+            <a:ext cx="4754880" cy="388620"/>
           </a:xfrm>
           <a:prstGeom prst="rect">
             <a:avLst/>
@@ -6580,7 +6580,7 @@
         <p:spPr>
           <a:xfrm>
             <a:off x="2011680" y="5734202"/>
-            <a:ext cx="4754880" cy="365760"/>
+            <a:ext cx="4754880" cy="388620"/>
           </a:xfrm>
           <a:prstGeom prst="rect">
             <a:avLst/>
@@ -6702,7 +6702,7 @@
         <p:spPr>
           <a:xfrm>
             <a:off x="2011680" y="6591910"/>
-            <a:ext cx="4754880" cy="365760"/>
+            <a:ext cx="4754880" cy="388620"/>
           </a:xfrm>
           <a:prstGeom prst="rect">
             <a:avLst/>
@@ -6824,7 +6824,7 @@
         <p:spPr>
           <a:xfrm>
             <a:off x="2011680" y="7449617"/>
-            <a:ext cx="4754880" cy="365760"/>
+            <a:ext cx="4754880" cy="388620"/>
           </a:xfrm>
           <a:prstGeom prst="rect">
             <a:avLst/>
@@ -7293,7 +7293,7 @@
         </p:nvSpPr>
         <p:spPr>
           <a:xfrm>
-            <a:off x="2011680" y="3120009"/>
+            <a:off x="2011680" y="3154934"/>
             <a:ext cx="15247620" cy="292608"/>
           </a:xfrm>
           <a:prstGeom prst="rect">
@@ -7332,8 +7332,8 @@
         </p:nvSpPr>
         <p:spPr>
           <a:xfrm>
-            <a:off x="2011680" y="3595497"/>
-            <a:ext cx="15247620" cy="1873250"/>
+            <a:off x="2011680" y="3630422"/>
+            <a:ext cx="15247620" cy="1803400"/>
           </a:xfrm>
           <a:prstGeom prst="rect">
             <a:avLst/>
@@ -7348,11 +7348,11 @@
           <a:p>
             <a:pPr algn="r">
               <a:lnSpc>
-                <a:spcPts val="13310"/>
-              </a:lnSpc>
-            </a:pPr>
-            <a:r>
-              <a:rPr sz="12100" i="0" b="0">
+                <a:spcPts val="12760"/>
+              </a:lnSpc>
+            </a:pPr>
+            <a:r>
+              <a:rPr sz="11600" i="0" b="0">
                 <a:solidFill>
                   <a:srgbClr val="FFFFFF"/>
                 </a:solidFill>
@@ -7371,7 +7371,7 @@
         </p:nvSpPr>
         <p:spPr>
           <a:xfrm>
-            <a:off x="2011680" y="5541899"/>
+            <a:off x="2011680" y="5506974"/>
             <a:ext cx="15247620" cy="829564"/>
           </a:xfrm>
           <a:prstGeom prst="rect">
@@ -15336,7 +15336,7 @@
         <p:spPr>
           <a:xfrm>
             <a:off x="2011680" y="3989832"/>
-            <a:ext cx="4754880" cy="365760"/>
+            <a:ext cx="4754880" cy="388620"/>
           </a:xfrm>
           <a:prstGeom prst="rect">
             <a:avLst/>
@@ -15458,7 +15458,7 @@
         <p:spPr>
           <a:xfrm>
             <a:off x="2011680" y="5428996"/>
-            <a:ext cx="4754880" cy="365760"/>
+            <a:ext cx="4754880" cy="388620"/>
           </a:xfrm>
           <a:prstGeom prst="rect">
             <a:avLst/>
@@ -15580,7 +15580,7 @@
         <p:spPr>
           <a:xfrm>
             <a:off x="2011680" y="6868160"/>
-            <a:ext cx="4754880" cy="365760"/>
+            <a:ext cx="4754880" cy="388620"/>
           </a:xfrm>
           <a:prstGeom prst="rect">
             <a:avLst/>
@@ -17687,7 +17687,7 @@
         </p:nvSpPr>
         <p:spPr>
           <a:xfrm>
-            <a:off x="2011680" y="3408680"/>
+            <a:off x="2011680" y="3426142"/>
             <a:ext cx="15247620" cy="292608"/>
           </a:xfrm>
           <a:prstGeom prst="rect">
@@ -17726,8 +17726,8 @@
         </p:nvSpPr>
         <p:spPr>
           <a:xfrm>
-            <a:off x="2011680" y="3884168"/>
-            <a:ext cx="15247620" cy="1384300"/>
+            <a:off x="2011680" y="3901630"/>
+            <a:ext cx="15247620" cy="1349375"/>
           </a:xfrm>
           <a:prstGeom prst="rect">
             <a:avLst/>
@@ -17742,11 +17742,11 @@
           <a:p>
             <a:pPr algn="r">
               <a:lnSpc>
-                <a:spcPts val="9460"/>
-              </a:lnSpc>
-            </a:pPr>
-            <a:r>
-              <a:rPr sz="8600" i="0" b="0">
+                <a:spcPts val="9185"/>
+              </a:lnSpc>
+            </a:pPr>
+            <a:r>
+              <a:rPr sz="8350" i="0" b="0">
                 <a:solidFill>
                   <a:srgbClr val="FFFFFF"/>
                 </a:solidFill>
@@ -17765,7 +17765,7 @@
         </p:nvSpPr>
         <p:spPr>
           <a:xfrm>
-            <a:off x="2011680" y="5341620"/>
+            <a:off x="2011680" y="5324158"/>
             <a:ext cx="15247620" cy="741172"/>
           </a:xfrm>
           <a:prstGeom prst="rect">
